--- a/finaldemoppt/PRAMAAN_AICTE_SIH2026_INTERACTIVE_WINNING.pptx
+++ b/finaldemoppt/PRAMAAN_AICTE_SIH2026_INTERACTIVE_WINNING.pptx
@@ -5718,8 +5718,8 @@
         </p:nvSpPr>
         <p:spPr>
           <a:xfrm>
-            <a:off x="365760" y="868680"/>
-            <a:ext cx="5943600" cy="365760"/>
+            <a:off x="365760" y="841248"/>
+            <a:ext cx="5943600" cy="320040"/>
           </a:xfrm>
         </p:spPr>
         <p:txBody>
@@ -5727,7 +5727,7 @@
           <a:lstStyle/>
           <a:p>
             <a:pPr algn="l">
-              <a:defRPr sz="1400" b="1">
+              <a:defRPr sz="1350" b="1">
                 <a:solidFill>
                   <a:srgbClr val="008C6E"/>
                 </a:solidFill>
@@ -5759,8 +5759,8 @@
         </p:nvSpPr>
         <p:spPr>
           <a:xfrm>
-            <a:off x="365760" y="182880"/>
-            <a:ext cx="9326880" cy="822960"/>
+            <a:off x="365760" y="164592"/>
+            <a:ext cx="9326880" cy="731520"/>
           </a:xfrm>
         </p:spPr>
         <p:txBody>
@@ -5768,7 +5768,7 @@
           <a:lstStyle/>
           <a:p>
             <a:pPr algn="l">
-              <a:defRPr sz="2800" b="1">
+              <a:defRPr sz="2700" b="1">
                 <a:solidFill>
                   <a:srgbClr val="112266"/>
                 </a:solidFill>
@@ -5795,8 +5795,8 @@
         </p:nvSpPr>
         <p:spPr>
           <a:xfrm>
-            <a:off x="365760" y="1325880"/>
-            <a:ext cx="6217920" cy="4892040"/>
+            <a:off x="365760" y="1234440"/>
+            <a:ext cx="6583680" cy="4069080"/>
           </a:xfrm>
           <a:prstGeom prst="rect">
             <a:avLst/>
@@ -5815,7 +5815,7 @@
               </a:spcBef>
             </a:pPr>
             <a:r>
-              <a:rPr sz="1080" b="1">
+              <a:rPr sz="1019" b="1">
                 <a:solidFill>
                   <a:srgbClr val="112266"/>
                 </a:solidFill>
@@ -5824,7 +5824,7 @@
               <a:t>Problem Statement ID: </a:t>
             </a:r>
             <a:r>
-              <a:rPr sz="1300" b="1">
+              <a:rPr sz="1250" b="1">
                 <a:solidFill>
                   <a:srgbClr val="112266"/>
                 </a:solidFill>
@@ -5837,11 +5837,11 @@
           <a:p>
             <a:pPr>
               <a:spcBef>
-                <a:spcPts val="400"/>
+                <a:spcPts val="300"/>
               </a:spcBef>
             </a:pPr>
             <a:r>
-              <a:rPr sz="1080" b="1">
+              <a:rPr sz="1019" b="1">
                 <a:solidFill>
                   <a:srgbClr val="112266"/>
                 </a:solidFill>
@@ -5850,7 +5850,7 @@
               <a:t>Problem Statement Title: </a:t>
             </a:r>
             <a:r>
-              <a:rPr sz="1100" b="0">
+              <a:rPr sz="1050" b="0">
                 <a:solidFill>
                   <a:srgbClr val="1A365D"/>
                 </a:solidFill>
@@ -5862,11 +5862,11 @@
           <a:p>
             <a:pPr>
               <a:spcBef>
-                <a:spcPts val="400"/>
+                <a:spcPts val="300"/>
               </a:spcBef>
             </a:pPr>
             <a:r>
-              <a:rPr sz="1080" b="1">
+              <a:rPr sz="1019" b="1">
                 <a:solidFill>
                   <a:srgbClr val="112266"/>
                 </a:solidFill>
@@ -5875,7 +5875,7 @@
               <a:t>Theme: </a:t>
             </a:r>
             <a:r>
-              <a:rPr sz="1100" b="0">
+              <a:rPr sz="1050" b="0">
                 <a:solidFill>
                   <a:srgbClr val="222222"/>
                 </a:solidFill>
@@ -5887,11 +5887,11 @@
           <a:p>
             <a:pPr>
               <a:spcBef>
-                <a:spcPts val="400"/>
+                <a:spcPts val="300"/>
               </a:spcBef>
             </a:pPr>
             <a:r>
-              <a:rPr sz="1080" b="1">
+              <a:rPr sz="1019" b="1">
                 <a:solidFill>
                   <a:srgbClr val="112266"/>
                 </a:solidFill>
@@ -5900,7 +5900,7 @@
               <a:t>PS Category: </a:t>
             </a:r>
             <a:r>
-              <a:rPr sz="1100" b="0">
+              <a:rPr sz="1050" b="0">
                 <a:solidFill>
                   <a:srgbClr val="222222"/>
                 </a:solidFill>
@@ -5912,11 +5912,11 @@
           <a:p>
             <a:pPr>
               <a:spcBef>
-                <a:spcPts val="400"/>
+                <a:spcPts val="300"/>
               </a:spcBef>
             </a:pPr>
             <a:r>
-              <a:rPr sz="1080" b="1">
+              <a:rPr sz="1019" b="1">
                 <a:solidFill>
                   <a:srgbClr val="112266"/>
                 </a:solidFill>
@@ -5925,7 +5925,7 @@
               <a:t>Team ID: </a:t>
             </a:r>
             <a:r>
-              <a:rPr sz="1100" b="0">
+              <a:rPr sz="1050" b="0">
                 <a:solidFill>
                   <a:srgbClr val="222222"/>
                 </a:solidFill>
@@ -5937,11 +5937,11 @@
           <a:p>
             <a:pPr>
               <a:spcBef>
-                <a:spcPts val="400"/>
+                <a:spcPts val="300"/>
               </a:spcBef>
             </a:pPr>
             <a:r>
-              <a:rPr sz="1080" b="1">
+              <a:rPr sz="1019" b="1">
                 <a:solidFill>
                   <a:srgbClr val="112266"/>
                 </a:solidFill>
@@ -5950,7 +5950,7 @@
               <a:t>Team Name: </a:t>
             </a:r>
             <a:r>
-              <a:rPr sz="1150" b="1">
+              <a:rPr sz="1100" b="1">
                 <a:solidFill>
                   <a:srgbClr val="112266"/>
                 </a:solidFill>
@@ -5962,11 +5962,11 @@
           <a:p>
             <a:pPr>
               <a:spcBef>
-                <a:spcPts val="400"/>
+                <a:spcPts val="300"/>
               </a:spcBef>
             </a:pPr>
             <a:r>
-              <a:rPr sz="1080" b="1">
+              <a:rPr sz="1019" b="1">
                 <a:solidFill>
                   <a:srgbClr val="112266"/>
                 </a:solidFill>
@@ -5975,7 +5975,7 @@
               <a:t>Institute Name: </a:t>
             </a:r>
             <a:r>
-              <a:rPr sz="1100" b="0">
+              <a:rPr sz="1050" b="0">
                 <a:solidFill>
                   <a:srgbClr val="1A365D"/>
                 </a:solidFill>
@@ -5987,11 +5987,11 @@
           <a:p>
             <a:pPr>
               <a:spcBef>
-                <a:spcPts val="400"/>
+                <a:spcPts val="300"/>
               </a:spcBef>
             </a:pPr>
             <a:r>
-              <a:rPr sz="1080" b="1">
+              <a:rPr sz="1019" b="1">
                 <a:solidFill>
                   <a:srgbClr val="112266"/>
                 </a:solidFill>
@@ -6000,7 +6000,7 @@
               <a:t>Live Web Platform: </a:t>
             </a:r>
             <a:r>
-              <a:rPr sz="1050" b="1">
+              <a:rPr sz="1000" b="1">
                 <a:solidFill>
                   <a:srgbClr val="008C6E"/>
                 </a:solidFill>
@@ -6013,11 +6013,11 @@
           <a:p>
             <a:pPr>
               <a:spcBef>
-                <a:spcPts val="400"/>
+                <a:spcPts val="300"/>
               </a:spcBef>
             </a:pPr>
             <a:r>
-              <a:rPr sz="1080" b="1">
+              <a:rPr sz="1019" b="1">
                 <a:solidFill>
                   <a:srgbClr val="112266"/>
                 </a:solidFill>
@@ -6026,7 +6026,7 @@
               <a:t>Live Backend &amp; API: </a:t>
             </a:r>
             <a:r>
-              <a:rPr sz="1050" b="1">
+              <a:rPr sz="1000" b="1">
                 <a:solidFill>
                   <a:srgbClr val="008C6E"/>
                 </a:solidFill>
@@ -6039,11 +6039,11 @@
           <a:p>
             <a:pPr>
               <a:spcBef>
-                <a:spcPts val="400"/>
+                <a:spcPts val="300"/>
               </a:spcBef>
             </a:pPr>
             <a:r>
-              <a:rPr sz="1080" b="1">
+              <a:rPr sz="1019" b="1">
                 <a:solidFill>
                   <a:srgbClr val="112266"/>
                 </a:solidFill>
@@ -6052,7 +6052,7 @@
               <a:t>Source Repository: </a:t>
             </a:r>
             <a:r>
-              <a:rPr sz="1050" b="1">
+              <a:rPr sz="1000" b="1">
                 <a:solidFill>
                   <a:srgbClr val="1A56DB"/>
                 </a:solidFill>
@@ -6065,11 +6065,11 @@
           <a:p>
             <a:pPr>
               <a:spcBef>
-                <a:spcPts val="400"/>
+                <a:spcPts val="300"/>
               </a:spcBef>
             </a:pPr>
             <a:r>
-              <a:rPr sz="1080" b="1">
+              <a:rPr sz="1019" b="1">
                 <a:solidFill>
                   <a:srgbClr val="112266"/>
                 </a:solidFill>
@@ -6078,7 +6078,7 @@
               <a:t>Verification Status: </a:t>
             </a:r>
             <a:r>
-              <a:rPr sz="1050" b="1">
+              <a:rPr sz="1000" b="1">
                 <a:solidFill>
                   <a:srgbClr val="008C6E"/>
                 </a:solidFill>
@@ -6121,14 +6121,1043 @@
       </p:pic>
       <p:sp>
         <p:nvSpPr>
-          <p:cNvPr id="38" name="Rectangle 37"/>
+          <p:cNvPr id="38" name="Rounded Rectangle 37"/>
           <p:cNvSpPr/>
           <p:nvPr/>
         </p:nvSpPr>
         <p:spPr>
           <a:xfrm>
-            <a:off x="0" y="6355080"/>
-            <a:ext cx="12191695" cy="502920"/>
+            <a:off x="9692640" y="1280160"/>
+            <a:ext cx="2103120" cy="3931920"/>
+          </a:xfrm>
+          <a:prstGeom prst="roundRect">
+            <a:avLst/>
+          </a:prstGeom>
+          <a:solidFill>
+            <a:srgbClr val="FFFFFF"/>
+          </a:solidFill>
+          <a:ln w="13970">
+            <a:solidFill>
+              <a:srgbClr val="008C6E"/>
+            </a:solidFill>
+          </a:ln>
+        </p:spPr>
+        <p:style>
+          <a:lnRef idx="1">
+            <a:schemeClr val="accent1"/>
+          </a:lnRef>
+          <a:fillRef idx="3">
+            <a:schemeClr val="accent1"/>
+          </a:fillRef>
+          <a:effectRef idx="2">
+            <a:schemeClr val="accent1"/>
+          </a:effectRef>
+          <a:fontRef idx="minor">
+            <a:schemeClr val="lt1"/>
+          </a:fontRef>
+        </p:style>
+        <p:txBody>
+          <a:bodyPr rtlCol="0" anchor="ctr"/>
+          <a:lstStyle/>
+          <a:p>
+            <a:pPr algn="ctr"/>
+          </a:p>
+        </p:txBody>
+      </p:sp>
+      <p:pic>
+        <p:nvPicPr>
+          <p:cNvPr id="39" name="Picture 38" descr="qrcode_brainforge.png"/>
+          <p:cNvPicPr>
+            <a:picLocks noChangeAspect="1"/>
+          </p:cNvPicPr>
+          <p:nvPr/>
+        </p:nvPicPr>
+        <p:blipFill>
+          <a:blip r:embed="rId7"/>
+          <a:stretch>
+            <a:fillRect/>
+          </a:stretch>
+        </p:blipFill>
+        <p:spPr>
+          <a:xfrm>
+            <a:off x="9921240" y="1463040"/>
+            <a:ext cx="1645920" cy="1645920"/>
+          </a:xfrm>
+          <a:prstGeom prst="rect">
+            <a:avLst/>
+          </a:prstGeom>
+        </p:spPr>
+      </p:pic>
+      <p:sp>
+        <p:nvSpPr>
+          <p:cNvPr id="40" name="TextBox 39"/>
+          <p:cNvSpPr txBox="1"/>
+          <p:nvPr/>
+        </p:nvSpPr>
+        <p:spPr>
+          <a:xfrm>
+            <a:off x="9784080" y="3200400"/>
+            <a:ext cx="1920240" cy="1920240"/>
+          </a:xfrm>
+          <a:prstGeom prst="rect">
+            <a:avLst/>
+          </a:prstGeom>
+          <a:noFill/>
+        </p:spPr>
+        <p:txBody>
+          <a:bodyPr wrap="square">
+            <a:spAutoFit/>
+          </a:bodyPr>
+          <a:lstStyle/>
+          <a:p>
+            <a:pPr algn="ctr">
+              <a:defRPr sz="1000" b="1">
+                <a:solidFill>
+                  <a:srgbClr val="112266"/>
+                </a:solidFill>
+                <a:latin typeface="Arial"/>
+              </a:defRPr>
+            </a:pPr>
+            <a:r>
+              <a:t>SCAN OR CLICK</a:t>
+            </a:r>
+          </a:p>
+          <a:p>
+            <a:pPr algn="ctr">
+              <a:defRPr sz="850" b="1">
+                <a:solidFill>
+                  <a:srgbClr val="008C6E"/>
+                </a:solidFill>
+                <a:latin typeface="Arial"/>
+              </a:defRPr>
+            </a:pPr>
+            <a:r>
+              <a:t>FOR LIVE PROTOTYPE</a:t>
+            </a:r>
+          </a:p>
+          <a:p>
+            <a:pPr algn="ctr">
+              <a:spcBef>
+                <a:spcPts val="400"/>
+              </a:spcBef>
+            </a:pPr>
+            <a:r>
+              <a:rPr sz="950" b="1">
+                <a:solidFill>
+                  <a:srgbClr val="1A56DB"/>
+                </a:solidFill>
+                <a:latin typeface="Arial"/>
+                <a:hlinkClick r:id="rId4"/>
+              </a:rPr>
+              <a:t>brainforge.info ↗</a:t>
+            </a:r>
+          </a:p>
+          <a:p>
+            <a:pPr algn="ctr">
+              <a:spcBef>
+                <a:spcPts val="200"/>
+              </a:spcBef>
+              <a:defRPr sz="720">
+                <a:solidFill>
+                  <a:srgbClr val="64748B"/>
+                </a:solidFill>
+                <a:latin typeface="Arial"/>
+              </a:defRPr>
+            </a:pPr>
+            <a:r>
+              <a:t>Deployed on Vercel Edge with Let's Encrypt SSL</a:t>
+            </a:r>
+          </a:p>
+        </p:txBody>
+      </p:sp>
+      <p:sp>
+        <p:nvSpPr>
+          <p:cNvPr id="41" name="Rounded Rectangle 40"/>
+          <p:cNvSpPr/>
+          <p:nvPr/>
+        </p:nvSpPr>
+        <p:spPr>
+          <a:xfrm>
+            <a:off x="365760" y="5394960"/>
+            <a:ext cx="11430000" cy="868680"/>
+          </a:xfrm>
+          <a:prstGeom prst="roundRect">
+            <a:avLst/>
+          </a:prstGeom>
+          <a:solidFill>
+            <a:srgbClr val="F8FAFC"/>
+          </a:solidFill>
+          <a:ln w="13970">
+            <a:solidFill>
+              <a:srgbClr val="CBD5E1"/>
+            </a:solidFill>
+          </a:ln>
+        </p:spPr>
+        <p:style>
+          <a:lnRef idx="1">
+            <a:schemeClr val="accent1"/>
+          </a:lnRef>
+          <a:fillRef idx="3">
+            <a:schemeClr val="accent1"/>
+          </a:fillRef>
+          <a:effectRef idx="2">
+            <a:schemeClr val="accent1"/>
+          </a:effectRef>
+          <a:fontRef idx="minor">
+            <a:schemeClr val="lt1"/>
+          </a:fontRef>
+        </p:style>
+        <p:txBody>
+          <a:bodyPr rtlCol="0" anchor="ctr"/>
+          <a:lstStyle/>
+          <a:p>
+            <a:pPr algn="ctr"/>
+          </a:p>
+        </p:txBody>
+      </p:sp>
+      <p:sp>
+        <p:nvSpPr>
+          <p:cNvPr id="42" name="Rounded Rectangle 41"/>
+          <p:cNvSpPr/>
+          <p:nvPr/>
+        </p:nvSpPr>
+        <p:spPr>
+          <a:xfrm>
+            <a:off x="502920" y="5285232"/>
+            <a:ext cx="2194560" cy="219456"/>
+          </a:xfrm>
+          <a:prstGeom prst="roundRect">
+            <a:avLst/>
+          </a:prstGeom>
+          <a:solidFill>
+            <a:srgbClr val="112266"/>
+          </a:solidFill>
+          <a:ln>
+            <a:noFill/>
+          </a:ln>
+        </p:spPr>
+        <p:style>
+          <a:lnRef idx="1">
+            <a:schemeClr val="accent1"/>
+          </a:lnRef>
+          <a:fillRef idx="3">
+            <a:schemeClr val="accent1"/>
+          </a:fillRef>
+          <a:effectRef idx="2">
+            <a:schemeClr val="accent1"/>
+          </a:effectRef>
+          <a:fontRef idx="minor">
+            <a:schemeClr val="lt1"/>
+          </a:fontRef>
+        </p:style>
+        <p:txBody>
+          <a:bodyPr rtlCol="0" anchor="ctr" wrap="none" lIns="54864" rIns="54864" tIns="0" bIns="0"/>
+          <a:lstStyle/>
+          <a:p>
+            <a:pPr algn="ctr">
+              <a:defRPr sz="900" b="1">
+                <a:solidFill>
+                  <a:srgbClr val="FFFFFF"/>
+                </a:solidFill>
+                <a:latin typeface="Arial"/>
+              </a:defRPr>
+            </a:pPr>
+            <a:r>
+              <a:t>ENTERPRISE TECH STACK</a:t>
+            </a:r>
+          </a:p>
+        </p:txBody>
+      </p:sp>
+      <p:pic>
+        <p:nvPicPr>
+          <p:cNvPr id="43" name="Picture 42" descr="nextjs.png"/>
+          <p:cNvPicPr>
+            <a:picLocks noChangeAspect="1"/>
+          </p:cNvPicPr>
+          <p:nvPr/>
+        </p:nvPicPr>
+        <p:blipFill>
+          <a:blip r:embed="rId8"/>
+          <a:stretch>
+            <a:fillRect/>
+          </a:stretch>
+        </p:blipFill>
+        <p:spPr>
+          <a:xfrm>
+            <a:off x="704088" y="5532120"/>
+            <a:ext cx="365760" cy="365760"/>
+          </a:xfrm>
+          <a:prstGeom prst="rect">
+            <a:avLst/>
+          </a:prstGeom>
+        </p:spPr>
+      </p:pic>
+      <p:sp>
+        <p:nvSpPr>
+          <p:cNvPr id="44" name="TextBox 43"/>
+          <p:cNvSpPr txBox="1"/>
+          <p:nvPr/>
+        </p:nvSpPr>
+        <p:spPr>
+          <a:xfrm>
+            <a:off x="502920" y="5925312"/>
+            <a:ext cx="858129" cy="274320"/>
+          </a:xfrm>
+          <a:prstGeom prst="rect">
+            <a:avLst/>
+          </a:prstGeom>
+          <a:noFill/>
+        </p:spPr>
+        <p:txBody>
+          <a:bodyPr wrap="none" lIns="0" rIns="0" tIns="0" bIns="0">
+            <a:spAutoFit/>
+          </a:bodyPr>
+          <a:lstStyle/>
+          <a:p>
+            <a:pPr algn="ctr">
+              <a:defRPr sz="680" b="1">
+                <a:solidFill>
+                  <a:srgbClr val="1A365D"/>
+                </a:solidFill>
+                <a:latin typeface="Arial"/>
+              </a:defRPr>
+            </a:pPr>
+            <a:r>
+              <a:t>Next.js 14</a:t>
+            </a:r>
+          </a:p>
+        </p:txBody>
+      </p:sp>
+      <p:pic>
+        <p:nvPicPr>
+          <p:cNvPr id="45" name="Picture 44" descr="react.png"/>
+          <p:cNvPicPr>
+            <a:picLocks noChangeAspect="1"/>
+          </p:cNvPicPr>
+          <p:nvPr/>
+        </p:nvPicPr>
+        <p:blipFill>
+          <a:blip r:embed="rId9"/>
+          <a:stretch>
+            <a:fillRect/>
+          </a:stretch>
+        </p:blipFill>
+        <p:spPr>
+          <a:xfrm>
+            <a:off x="1562217" y="5532120"/>
+            <a:ext cx="365760" cy="365760"/>
+          </a:xfrm>
+          <a:prstGeom prst="rect">
+            <a:avLst/>
+          </a:prstGeom>
+        </p:spPr>
+      </p:pic>
+      <p:sp>
+        <p:nvSpPr>
+          <p:cNvPr id="46" name="TextBox 45"/>
+          <p:cNvSpPr txBox="1"/>
+          <p:nvPr/>
+        </p:nvSpPr>
+        <p:spPr>
+          <a:xfrm>
+            <a:off x="1361049" y="5925312"/>
+            <a:ext cx="858129" cy="274320"/>
+          </a:xfrm>
+          <a:prstGeom prst="rect">
+            <a:avLst/>
+          </a:prstGeom>
+          <a:noFill/>
+        </p:spPr>
+        <p:txBody>
+          <a:bodyPr wrap="none" lIns="0" rIns="0" tIns="0" bIns="0">
+            <a:spAutoFit/>
+          </a:bodyPr>
+          <a:lstStyle/>
+          <a:p>
+            <a:pPr algn="ctr">
+              <a:defRPr sz="680" b="1">
+                <a:solidFill>
+                  <a:srgbClr val="1A365D"/>
+                </a:solidFill>
+                <a:latin typeface="Arial"/>
+              </a:defRPr>
+            </a:pPr>
+            <a:r>
+              <a:t>React 18</a:t>
+            </a:r>
+          </a:p>
+        </p:txBody>
+      </p:sp>
+      <p:pic>
+        <p:nvPicPr>
+          <p:cNvPr id="47" name="Picture 46" descr="typescript.png"/>
+          <p:cNvPicPr>
+            <a:picLocks noChangeAspect="1"/>
+          </p:cNvPicPr>
+          <p:nvPr/>
+        </p:nvPicPr>
+        <p:blipFill>
+          <a:blip r:embed="rId10"/>
+          <a:stretch>
+            <a:fillRect/>
+          </a:stretch>
+        </p:blipFill>
+        <p:spPr>
+          <a:xfrm>
+            <a:off x="2420346" y="5532120"/>
+            <a:ext cx="365760" cy="365760"/>
+          </a:xfrm>
+          <a:prstGeom prst="rect">
+            <a:avLst/>
+          </a:prstGeom>
+        </p:spPr>
+      </p:pic>
+      <p:sp>
+        <p:nvSpPr>
+          <p:cNvPr id="48" name="TextBox 47"/>
+          <p:cNvSpPr txBox="1"/>
+          <p:nvPr/>
+        </p:nvSpPr>
+        <p:spPr>
+          <a:xfrm>
+            <a:off x="2219178" y="5925312"/>
+            <a:ext cx="858129" cy="274320"/>
+          </a:xfrm>
+          <a:prstGeom prst="rect">
+            <a:avLst/>
+          </a:prstGeom>
+          <a:noFill/>
+        </p:spPr>
+        <p:txBody>
+          <a:bodyPr wrap="none" lIns="0" rIns="0" tIns="0" bIns="0">
+            <a:spAutoFit/>
+          </a:bodyPr>
+          <a:lstStyle/>
+          <a:p>
+            <a:pPr algn="ctr">
+              <a:defRPr sz="680" b="1">
+                <a:solidFill>
+                  <a:srgbClr val="1A365D"/>
+                </a:solidFill>
+                <a:latin typeface="Arial"/>
+              </a:defRPr>
+            </a:pPr>
+            <a:r>
+              <a:t>TypeScript</a:t>
+            </a:r>
+          </a:p>
+        </p:txBody>
+      </p:sp>
+      <p:pic>
+        <p:nvPicPr>
+          <p:cNvPr id="49" name="Picture 48" descr="tailwindcss.png"/>
+          <p:cNvPicPr>
+            <a:picLocks noChangeAspect="1"/>
+          </p:cNvPicPr>
+          <p:nvPr/>
+        </p:nvPicPr>
+        <p:blipFill>
+          <a:blip r:embed="rId11"/>
+          <a:stretch>
+            <a:fillRect/>
+          </a:stretch>
+        </p:blipFill>
+        <p:spPr>
+          <a:xfrm>
+            <a:off x="3278475" y="5532120"/>
+            <a:ext cx="365760" cy="365760"/>
+          </a:xfrm>
+          <a:prstGeom prst="rect">
+            <a:avLst/>
+          </a:prstGeom>
+        </p:spPr>
+      </p:pic>
+      <p:sp>
+        <p:nvSpPr>
+          <p:cNvPr id="50" name="TextBox 49"/>
+          <p:cNvSpPr txBox="1"/>
+          <p:nvPr/>
+        </p:nvSpPr>
+        <p:spPr>
+          <a:xfrm>
+            <a:off x="3077307" y="5925312"/>
+            <a:ext cx="858129" cy="274320"/>
+          </a:xfrm>
+          <a:prstGeom prst="rect">
+            <a:avLst/>
+          </a:prstGeom>
+          <a:noFill/>
+        </p:spPr>
+        <p:txBody>
+          <a:bodyPr wrap="none" lIns="0" rIns="0" tIns="0" bIns="0">
+            <a:spAutoFit/>
+          </a:bodyPr>
+          <a:lstStyle/>
+          <a:p>
+            <a:pPr algn="ctr">
+              <a:defRPr sz="680" b="1">
+                <a:solidFill>
+                  <a:srgbClr val="1A365D"/>
+                </a:solidFill>
+                <a:latin typeface="Arial"/>
+              </a:defRPr>
+            </a:pPr>
+            <a:r>
+              <a:t>Tailwind</a:t>
+            </a:r>
+          </a:p>
+        </p:txBody>
+      </p:sp>
+      <p:pic>
+        <p:nvPicPr>
+          <p:cNvPr id="51" name="Picture 50" descr="nodejs.png"/>
+          <p:cNvPicPr>
+            <a:picLocks noChangeAspect="1"/>
+          </p:cNvPicPr>
+          <p:nvPr/>
+        </p:nvPicPr>
+        <p:blipFill>
+          <a:blip r:embed="rId12"/>
+          <a:stretch>
+            <a:fillRect/>
+          </a:stretch>
+        </p:blipFill>
+        <p:spPr>
+          <a:xfrm>
+            <a:off x="4136604" y="5532120"/>
+            <a:ext cx="365760" cy="365760"/>
+          </a:xfrm>
+          <a:prstGeom prst="rect">
+            <a:avLst/>
+          </a:prstGeom>
+        </p:spPr>
+      </p:pic>
+      <p:sp>
+        <p:nvSpPr>
+          <p:cNvPr id="52" name="TextBox 51"/>
+          <p:cNvSpPr txBox="1"/>
+          <p:nvPr/>
+        </p:nvSpPr>
+        <p:spPr>
+          <a:xfrm>
+            <a:off x="3935436" y="5925312"/>
+            <a:ext cx="858129" cy="274320"/>
+          </a:xfrm>
+          <a:prstGeom prst="rect">
+            <a:avLst/>
+          </a:prstGeom>
+          <a:noFill/>
+        </p:spPr>
+        <p:txBody>
+          <a:bodyPr wrap="none" lIns="0" rIns="0" tIns="0" bIns="0">
+            <a:spAutoFit/>
+          </a:bodyPr>
+          <a:lstStyle/>
+          <a:p>
+            <a:pPr algn="ctr">
+              <a:defRPr sz="680" b="1">
+                <a:solidFill>
+                  <a:srgbClr val="1A365D"/>
+                </a:solidFill>
+                <a:latin typeface="Arial"/>
+              </a:defRPr>
+            </a:pPr>
+            <a:r>
+              <a:t>Node.js</a:t>
+            </a:r>
+          </a:p>
+        </p:txBody>
+      </p:sp>
+      <p:pic>
+        <p:nvPicPr>
+          <p:cNvPr id="53" name="Picture 52" descr="python.png"/>
+          <p:cNvPicPr>
+            <a:picLocks noChangeAspect="1"/>
+          </p:cNvPicPr>
+          <p:nvPr/>
+        </p:nvPicPr>
+        <p:blipFill>
+          <a:blip r:embed="rId13"/>
+          <a:stretch>
+            <a:fillRect/>
+          </a:stretch>
+        </p:blipFill>
+        <p:spPr>
+          <a:xfrm>
+            <a:off x="4994734" y="5532120"/>
+            <a:ext cx="365760" cy="365760"/>
+          </a:xfrm>
+          <a:prstGeom prst="rect">
+            <a:avLst/>
+          </a:prstGeom>
+        </p:spPr>
+      </p:pic>
+      <p:sp>
+        <p:nvSpPr>
+          <p:cNvPr id="54" name="TextBox 53"/>
+          <p:cNvSpPr txBox="1"/>
+          <p:nvPr/>
+        </p:nvSpPr>
+        <p:spPr>
+          <a:xfrm>
+            <a:off x="4793566" y="5925312"/>
+            <a:ext cx="858129" cy="274320"/>
+          </a:xfrm>
+          <a:prstGeom prst="rect">
+            <a:avLst/>
+          </a:prstGeom>
+          <a:noFill/>
+        </p:spPr>
+        <p:txBody>
+          <a:bodyPr wrap="none" lIns="0" rIns="0" tIns="0" bIns="0">
+            <a:spAutoFit/>
+          </a:bodyPr>
+          <a:lstStyle/>
+          <a:p>
+            <a:pPr algn="ctr">
+              <a:defRPr sz="680" b="1">
+                <a:solidFill>
+                  <a:srgbClr val="1A365D"/>
+                </a:solidFill>
+                <a:latin typeface="Arial"/>
+              </a:defRPr>
+            </a:pPr>
+            <a:r>
+              <a:t>Python 3.10</a:t>
+            </a:r>
+          </a:p>
+        </p:txBody>
+      </p:sp>
+      <p:pic>
+        <p:nvPicPr>
+          <p:cNvPr id="55" name="Picture 54" descr="fastapi.png"/>
+          <p:cNvPicPr>
+            <a:picLocks noChangeAspect="1"/>
+          </p:cNvPicPr>
+          <p:nvPr/>
+        </p:nvPicPr>
+        <p:blipFill>
+          <a:blip r:embed="rId14"/>
+          <a:stretch>
+            <a:fillRect/>
+          </a:stretch>
+        </p:blipFill>
+        <p:spPr>
+          <a:xfrm>
+            <a:off x="5852863" y="5532120"/>
+            <a:ext cx="365760" cy="365760"/>
+          </a:xfrm>
+          <a:prstGeom prst="rect">
+            <a:avLst/>
+          </a:prstGeom>
+        </p:spPr>
+      </p:pic>
+      <p:sp>
+        <p:nvSpPr>
+          <p:cNvPr id="56" name="TextBox 55"/>
+          <p:cNvSpPr txBox="1"/>
+          <p:nvPr/>
+        </p:nvSpPr>
+        <p:spPr>
+          <a:xfrm>
+            <a:off x="5651695" y="5925312"/>
+            <a:ext cx="858129" cy="274320"/>
+          </a:xfrm>
+          <a:prstGeom prst="rect">
+            <a:avLst/>
+          </a:prstGeom>
+          <a:noFill/>
+        </p:spPr>
+        <p:txBody>
+          <a:bodyPr wrap="none" lIns="0" rIns="0" tIns="0" bIns="0">
+            <a:spAutoFit/>
+          </a:bodyPr>
+          <a:lstStyle/>
+          <a:p>
+            <a:pPr algn="ctr">
+              <a:defRPr sz="680" b="1">
+                <a:solidFill>
+                  <a:srgbClr val="1A365D"/>
+                </a:solidFill>
+                <a:latin typeface="Arial"/>
+              </a:defRPr>
+            </a:pPr>
+            <a:r>
+              <a:t>FastAPI</a:t>
+            </a:r>
+          </a:p>
+        </p:txBody>
+      </p:sp>
+      <p:pic>
+        <p:nvPicPr>
+          <p:cNvPr id="57" name="Picture 56" descr="postgresql.png"/>
+          <p:cNvPicPr>
+            <a:picLocks noChangeAspect="1"/>
+          </p:cNvPicPr>
+          <p:nvPr/>
+        </p:nvPicPr>
+        <p:blipFill>
+          <a:blip r:embed="rId15"/>
+          <a:stretch>
+            <a:fillRect/>
+          </a:stretch>
+        </p:blipFill>
+        <p:spPr>
+          <a:xfrm>
+            <a:off x="6710992" y="5532120"/>
+            <a:ext cx="365760" cy="365760"/>
+          </a:xfrm>
+          <a:prstGeom prst="rect">
+            <a:avLst/>
+          </a:prstGeom>
+        </p:spPr>
+      </p:pic>
+      <p:sp>
+        <p:nvSpPr>
+          <p:cNvPr id="58" name="TextBox 57"/>
+          <p:cNvSpPr txBox="1"/>
+          <p:nvPr/>
+        </p:nvSpPr>
+        <p:spPr>
+          <a:xfrm>
+            <a:off x="6509824" y="5925312"/>
+            <a:ext cx="858129" cy="274320"/>
+          </a:xfrm>
+          <a:prstGeom prst="rect">
+            <a:avLst/>
+          </a:prstGeom>
+          <a:noFill/>
+        </p:spPr>
+        <p:txBody>
+          <a:bodyPr wrap="none" lIns="0" rIns="0" tIns="0" bIns="0">
+            <a:spAutoFit/>
+          </a:bodyPr>
+          <a:lstStyle/>
+          <a:p>
+            <a:pPr algn="ctr">
+              <a:defRPr sz="680" b="1">
+                <a:solidFill>
+                  <a:srgbClr val="1A365D"/>
+                </a:solidFill>
+                <a:latin typeface="Arial"/>
+              </a:defRPr>
+            </a:pPr>
+            <a:r>
+              <a:t>PostgreSQL 17</a:t>
+            </a:r>
+          </a:p>
+        </p:txBody>
+      </p:sp>
+      <p:pic>
+        <p:nvPicPr>
+          <p:cNvPr id="59" name="Picture 58" descr="supabase.png"/>
+          <p:cNvPicPr>
+            <a:picLocks noChangeAspect="1"/>
+          </p:cNvPicPr>
+          <p:nvPr/>
+        </p:nvPicPr>
+        <p:blipFill>
+          <a:blip r:embed="rId16"/>
+          <a:stretch>
+            <a:fillRect/>
+          </a:stretch>
+        </p:blipFill>
+        <p:spPr>
+          <a:xfrm>
+            <a:off x="7569121" y="5532120"/>
+            <a:ext cx="365760" cy="365760"/>
+          </a:xfrm>
+          <a:prstGeom prst="rect">
+            <a:avLst/>
+          </a:prstGeom>
+        </p:spPr>
+      </p:pic>
+      <p:sp>
+        <p:nvSpPr>
+          <p:cNvPr id="60" name="TextBox 59"/>
+          <p:cNvSpPr txBox="1"/>
+          <p:nvPr/>
+        </p:nvSpPr>
+        <p:spPr>
+          <a:xfrm>
+            <a:off x="7367953" y="5925312"/>
+            <a:ext cx="858129" cy="274320"/>
+          </a:xfrm>
+          <a:prstGeom prst="rect">
+            <a:avLst/>
+          </a:prstGeom>
+          <a:noFill/>
+        </p:spPr>
+        <p:txBody>
+          <a:bodyPr wrap="none" lIns="0" rIns="0" tIns="0" bIns="0">
+            <a:spAutoFit/>
+          </a:bodyPr>
+          <a:lstStyle/>
+          <a:p>
+            <a:pPr algn="ctr">
+              <a:defRPr sz="680" b="1">
+                <a:solidFill>
+                  <a:srgbClr val="1A365D"/>
+                </a:solidFill>
+                <a:latin typeface="Arial"/>
+              </a:defRPr>
+            </a:pPr>
+            <a:r>
+              <a:t>Supabase</a:t>
+            </a:r>
+          </a:p>
+        </p:txBody>
+      </p:sp>
+      <p:pic>
+        <p:nvPicPr>
+          <p:cNvPr id="61" name="Picture 60" descr="vercel.png"/>
+          <p:cNvPicPr>
+            <a:picLocks noChangeAspect="1"/>
+          </p:cNvPicPr>
+          <p:nvPr/>
+        </p:nvPicPr>
+        <p:blipFill>
+          <a:blip r:embed="rId17"/>
+          <a:stretch>
+            <a:fillRect/>
+          </a:stretch>
+        </p:blipFill>
+        <p:spPr>
+          <a:xfrm>
+            <a:off x="8427251" y="5532120"/>
+            <a:ext cx="365760" cy="365760"/>
+          </a:xfrm>
+          <a:prstGeom prst="rect">
+            <a:avLst/>
+          </a:prstGeom>
+        </p:spPr>
+      </p:pic>
+      <p:sp>
+        <p:nvSpPr>
+          <p:cNvPr id="62" name="TextBox 61"/>
+          <p:cNvSpPr txBox="1"/>
+          <p:nvPr/>
+        </p:nvSpPr>
+        <p:spPr>
+          <a:xfrm>
+            <a:off x="8226083" y="5925312"/>
+            <a:ext cx="858129" cy="274320"/>
+          </a:xfrm>
+          <a:prstGeom prst="rect">
+            <a:avLst/>
+          </a:prstGeom>
+          <a:noFill/>
+        </p:spPr>
+        <p:txBody>
+          <a:bodyPr wrap="none" lIns="0" rIns="0" tIns="0" bIns="0">
+            <a:spAutoFit/>
+          </a:bodyPr>
+          <a:lstStyle/>
+          <a:p>
+            <a:pPr algn="ctr">
+              <a:defRPr sz="680" b="1">
+                <a:solidFill>
+                  <a:srgbClr val="1A365D"/>
+                </a:solidFill>
+                <a:latin typeface="Arial"/>
+              </a:defRPr>
+            </a:pPr>
+            <a:r>
+              <a:t>Vercel Edge</a:t>
+            </a:r>
+          </a:p>
+        </p:txBody>
+      </p:sp>
+      <p:pic>
+        <p:nvPicPr>
+          <p:cNvPr id="63" name="Picture 62" descr="render.png"/>
+          <p:cNvPicPr>
+            <a:picLocks noChangeAspect="1"/>
+          </p:cNvPicPr>
+          <p:nvPr/>
+        </p:nvPicPr>
+        <p:blipFill>
+          <a:blip r:embed="rId18"/>
+          <a:stretch>
+            <a:fillRect/>
+          </a:stretch>
+        </p:blipFill>
+        <p:spPr>
+          <a:xfrm>
+            <a:off x="9285380" y="5532120"/>
+            <a:ext cx="365760" cy="365760"/>
+          </a:xfrm>
+          <a:prstGeom prst="rect">
+            <a:avLst/>
+          </a:prstGeom>
+        </p:spPr>
+      </p:pic>
+      <p:sp>
+        <p:nvSpPr>
+          <p:cNvPr id="64" name="TextBox 63"/>
+          <p:cNvSpPr txBox="1"/>
+          <p:nvPr/>
+        </p:nvSpPr>
+        <p:spPr>
+          <a:xfrm>
+            <a:off x="9084212" y="5925312"/>
+            <a:ext cx="858129" cy="274320"/>
+          </a:xfrm>
+          <a:prstGeom prst="rect">
+            <a:avLst/>
+          </a:prstGeom>
+          <a:noFill/>
+        </p:spPr>
+        <p:txBody>
+          <a:bodyPr wrap="none" lIns="0" rIns="0" tIns="0" bIns="0">
+            <a:spAutoFit/>
+          </a:bodyPr>
+          <a:lstStyle/>
+          <a:p>
+            <a:pPr algn="ctr">
+              <a:defRPr sz="680" b="1">
+                <a:solidFill>
+                  <a:srgbClr val="1A365D"/>
+                </a:solidFill>
+                <a:latin typeface="Arial"/>
+              </a:defRPr>
+            </a:pPr>
+            <a:r>
+              <a:t>Render Cloud</a:t>
+            </a:r>
+          </a:p>
+        </p:txBody>
+      </p:sp>
+      <p:pic>
+        <p:nvPicPr>
+          <p:cNvPr id="65" name="Picture 64" descr="docker.png"/>
+          <p:cNvPicPr>
+            <a:picLocks noChangeAspect="1"/>
+          </p:cNvPicPr>
+          <p:nvPr/>
+        </p:nvPicPr>
+        <p:blipFill>
+          <a:blip r:embed="rId19"/>
+          <a:stretch>
+            <a:fillRect/>
+          </a:stretch>
+        </p:blipFill>
+        <p:spPr>
+          <a:xfrm>
+            <a:off x="10143509" y="5532120"/>
+            <a:ext cx="365760" cy="365760"/>
+          </a:xfrm>
+          <a:prstGeom prst="rect">
+            <a:avLst/>
+          </a:prstGeom>
+        </p:spPr>
+      </p:pic>
+      <p:sp>
+        <p:nvSpPr>
+          <p:cNvPr id="66" name="TextBox 65"/>
+          <p:cNvSpPr txBox="1"/>
+          <p:nvPr/>
+        </p:nvSpPr>
+        <p:spPr>
+          <a:xfrm>
+            <a:off x="9942341" y="5925312"/>
+            <a:ext cx="858129" cy="274320"/>
+          </a:xfrm>
+          <a:prstGeom prst="rect">
+            <a:avLst/>
+          </a:prstGeom>
+          <a:noFill/>
+        </p:spPr>
+        <p:txBody>
+          <a:bodyPr wrap="none" lIns="0" rIns="0" tIns="0" bIns="0">
+            <a:spAutoFit/>
+          </a:bodyPr>
+          <a:lstStyle/>
+          <a:p>
+            <a:pPr algn="ctr">
+              <a:defRPr sz="680" b="1">
+                <a:solidFill>
+                  <a:srgbClr val="1A365D"/>
+                </a:solidFill>
+                <a:latin typeface="Arial"/>
+              </a:defRPr>
+            </a:pPr>
+            <a:r>
+              <a:t>Docker</a:t>
+            </a:r>
+          </a:p>
+        </p:txBody>
+      </p:sp>
+      <p:pic>
+        <p:nvPicPr>
+          <p:cNvPr id="67" name="Picture 66" descr="github.png"/>
+          <p:cNvPicPr>
+            <a:picLocks noChangeAspect="1"/>
+          </p:cNvPicPr>
+          <p:nvPr/>
+        </p:nvPicPr>
+        <p:blipFill>
+          <a:blip r:embed="rId20"/>
+          <a:stretch>
+            <a:fillRect/>
+          </a:stretch>
+        </p:blipFill>
+        <p:spPr>
+          <a:xfrm>
+            <a:off x="11001638" y="5532120"/>
+            <a:ext cx="365760" cy="365760"/>
+          </a:xfrm>
+          <a:prstGeom prst="rect">
+            <a:avLst/>
+          </a:prstGeom>
+        </p:spPr>
+      </p:pic>
+      <p:sp>
+        <p:nvSpPr>
+          <p:cNvPr id="68" name="TextBox 67"/>
+          <p:cNvSpPr txBox="1"/>
+          <p:nvPr/>
+        </p:nvSpPr>
+        <p:spPr>
+          <a:xfrm>
+            <a:off x="10800470" y="5925312"/>
+            <a:ext cx="858129" cy="274320"/>
+          </a:xfrm>
+          <a:prstGeom prst="rect">
+            <a:avLst/>
+          </a:prstGeom>
+          <a:noFill/>
+        </p:spPr>
+        <p:txBody>
+          <a:bodyPr wrap="none" lIns="0" rIns="0" tIns="0" bIns="0">
+            <a:spAutoFit/>
+          </a:bodyPr>
+          <a:lstStyle/>
+          <a:p>
+            <a:pPr algn="ctr">
+              <a:defRPr sz="680" b="1">
+                <a:solidFill>
+                  <a:srgbClr val="1A365D"/>
+                </a:solidFill>
+                <a:latin typeface="Arial"/>
+              </a:defRPr>
+            </a:pPr>
+            <a:r>
+              <a:t>GitHub CI/CD</a:t>
+            </a:r>
+          </a:p>
+        </p:txBody>
+      </p:sp>
+      <p:sp>
+        <p:nvSpPr>
+          <p:cNvPr id="69" name="Rectangle 68"/>
+          <p:cNvSpPr/>
+          <p:nvPr/>
+        </p:nvSpPr>
+        <p:spPr>
+          <a:xfrm>
+            <a:off x="0" y="6400800"/>
+            <a:ext cx="12191695" cy="457200"/>
           </a:xfrm>
           <a:prstGeom prst="rect">
             <a:avLst/>
@@ -6164,14 +7193,14 @@
       </p:sp>
       <p:sp>
         <p:nvSpPr>
-          <p:cNvPr id="39" name="TextBox 38"/>
+          <p:cNvPr id="70" name="TextBox 69"/>
           <p:cNvSpPr txBox="1"/>
           <p:nvPr/>
         </p:nvSpPr>
         <p:spPr>
           <a:xfrm>
-            <a:off x="2743200" y="6382512"/>
-            <a:ext cx="6702552" cy="365760"/>
+            <a:off x="2743200" y="6419088"/>
+            <a:ext cx="6702552" cy="347472"/>
           </a:xfrm>
           <a:prstGeom prst="rect">
             <a:avLst/>
@@ -6185,7 +7214,7 @@
           <a:lstStyle/>
           <a:p>
             <a:pPr algn="ctr">
-              <a:defRPr sz="1000">
+              <a:defRPr sz="950">
                 <a:solidFill>
                   <a:srgbClr val="FFFFFF"/>
                 </a:solidFill>
@@ -6200,14 +7229,14 @@
       </p:sp>
       <p:sp>
         <p:nvSpPr>
-          <p:cNvPr id="40" name="TextBox 39"/>
+          <p:cNvPr id="71" name="TextBox 70"/>
           <p:cNvSpPr txBox="1"/>
           <p:nvPr/>
         </p:nvSpPr>
         <p:spPr>
           <a:xfrm>
-            <a:off x="10058400" y="6382512"/>
-            <a:ext cx="1645920" cy="365760"/>
+            <a:off x="10058400" y="6419088"/>
+            <a:ext cx="1645920" cy="347472"/>
           </a:xfrm>
           <a:prstGeom prst="rect">
             <a:avLst/>
@@ -6221,7 +7250,7 @@
           <a:lstStyle/>
           <a:p>
             <a:pPr algn="r">
-              <a:defRPr sz="1000" b="1">
+              <a:defRPr sz="950" b="1">
                 <a:solidFill>
                   <a:srgbClr val="FFFFFF"/>
                 </a:solidFill>
@@ -6329,8 +7358,8 @@
         </p:nvSpPr>
         <p:spPr>
           <a:xfrm>
-            <a:off x="1691640" y="137160"/>
-            <a:ext cx="8092440" cy="822960"/>
+            <a:off x="1691640" y="109728"/>
+            <a:ext cx="8092440" cy="777240"/>
           </a:xfrm>
         </p:spPr>
         <p:txBody>
@@ -6354,7 +7383,7 @@
               <a:spcBef>
                 <a:spcPts val="200"/>
               </a:spcBef>
-              <a:defRPr sz="1000" b="1">
+              <a:defRPr sz="950" b="1">
                 <a:solidFill>
                   <a:srgbClr val="008C6E"/>
                 </a:solidFill>
@@ -6379,8 +7408,8 @@
         </p:nvSpPr>
         <p:spPr>
           <a:xfrm>
-            <a:off x="10058400" y="6382512"/>
-            <a:ext cx="1645920" cy="365760"/>
+            <a:off x="10058400" y="6419088"/>
+            <a:ext cx="1645920" cy="329184"/>
           </a:xfrm>
         </p:spPr>
         <p:txBody>
@@ -6388,7 +7417,7 @@
           <a:lstStyle/>
           <a:p>
             <a:pPr algn="r">
-              <a:defRPr sz="1000" b="1">
+              <a:defRPr sz="950" b="1">
                 <a:solidFill>
                   <a:srgbClr val="FFFFFF"/>
                 </a:solidFill>
@@ -6418,8 +7447,8 @@
         </p:nvSpPr>
         <p:spPr>
           <a:xfrm>
-            <a:off x="2743200" y="6382512"/>
-            <a:ext cx="6702552" cy="365760"/>
+            <a:off x="2743200" y="6419088"/>
+            <a:ext cx="6702552" cy="329184"/>
           </a:xfrm>
         </p:spPr>
         <p:txBody>
@@ -6427,7 +7456,7 @@
           <a:lstStyle/>
           <a:p>
             <a:pPr algn="ctr">
-              <a:defRPr sz="1000">
+              <a:defRPr sz="950">
                 <a:solidFill>
                   <a:srgbClr val="FFFFFF"/>
                 </a:solidFill>
@@ -6462,8 +7491,8 @@
         </p:nvSpPr>
         <p:spPr>
           <a:xfrm>
-            <a:off x="274320" y="164592"/>
-            <a:ext cx="1371600" cy="685800"/>
+            <a:off x="274320" y="137160"/>
+            <a:ext cx="1325880" cy="658368"/>
           </a:xfrm>
           <a:prstGeom prst="ellipse">
             <a:avLst/>
@@ -6540,8 +7569,8 @@
         </p:nvSpPr>
         <p:spPr>
           <a:xfrm>
-            <a:off x="365760" y="1097280"/>
-            <a:ext cx="5623560" cy="1143000"/>
+            <a:off x="365760" y="1051560"/>
+            <a:ext cx="5623560" cy="1115568"/>
           </a:xfrm>
           <a:prstGeom prst="roundRect">
             <a:avLst/>
@@ -6549,7 +7578,7 @@
           <a:solidFill>
             <a:srgbClr val="FFFFFF"/>
           </a:solidFill>
-          <a:ln w="15240">
+          <a:ln w="13970">
             <a:solidFill>
               <a:srgbClr val="CBD5E1"/>
             </a:solidFill>
@@ -6585,8 +7614,8 @@
         </p:nvSpPr>
         <p:spPr>
           <a:xfrm>
-            <a:off x="475488" y="987552"/>
-            <a:ext cx="2011680" cy="237744"/>
+            <a:off x="475488" y="941832"/>
+            <a:ext cx="2011680" cy="219456"/>
           </a:xfrm>
           <a:prstGeom prst="roundRect">
             <a:avLst/>
@@ -6613,11 +7642,11 @@
           </a:fontRef>
         </p:style>
         <p:txBody>
-          <a:bodyPr rtlCol="0" anchor="ctr" wrap="none" lIns="73152" rIns="73152" tIns="0" bIns="0"/>
+          <a:bodyPr rtlCol="0" anchor="ctr" wrap="none" lIns="54864" rIns="54864" tIns="0" bIns="0"/>
           <a:lstStyle/>
           <a:p>
             <a:pPr algn="ctr">
-              <a:defRPr sz="950" b="1">
+              <a:defRPr sz="900" b="1">
                 <a:solidFill>
                   <a:srgbClr val="FFFFFF"/>
                 </a:solidFill>
@@ -6638,7 +7667,7 @@
         </p:nvSpPr>
         <p:spPr>
           <a:xfrm>
-            <a:off x="502920" y="1243584"/>
+            <a:off x="502920" y="1170432"/>
             <a:ext cx="5349240" cy="960120"/>
           </a:xfrm>
           <a:prstGeom prst="rect">
@@ -6658,7 +7687,7 @@
               </a:spcBef>
             </a:pPr>
             <a:r>
-              <a:rPr sz="850" b="1">
+              <a:rPr sz="830" b="1">
                 <a:solidFill>
                   <a:srgbClr val="1A56DB"/>
                 </a:solidFill>
@@ -6667,7 +7696,7 @@
               <a:t>&gt; Fragmented Institutional Data : </a:t>
             </a:r>
             <a:r>
-              <a:rPr sz="800">
+              <a:rPr sz="780">
                 <a:solidFill>
                   <a:srgbClr val="222222"/>
                 </a:solidFill>
@@ -6683,7 +7712,7 @@
               </a:spcBef>
             </a:pPr>
             <a:r>
-              <a:rPr sz="850" b="1">
+              <a:rPr sz="830" b="1">
                 <a:solidFill>
                   <a:srgbClr val="1A56DB"/>
                 </a:solidFill>
@@ -6692,7 +7721,7 @@
               <a:t>&gt; Reconciliation Bottlenecks : </a:t>
             </a:r>
             <a:r>
-              <a:rPr sz="800">
+              <a:rPr sz="780">
                 <a:solidFill>
                   <a:srgbClr val="222222"/>
                 </a:solidFill>
@@ -6708,7 +7737,7 @@
               </a:spcBef>
             </a:pPr>
             <a:r>
-              <a:rPr sz="850" b="1">
+              <a:rPr sz="830" b="1">
                 <a:solidFill>
                   <a:srgbClr val="1A56DB"/>
                 </a:solidFill>
@@ -6717,7 +7746,7 @@
               <a:t>&gt; Intake &amp; Duplicate Risks : </a:t>
             </a:r>
             <a:r>
-              <a:rPr sz="800">
+              <a:rPr sz="780">
                 <a:solidFill>
                   <a:srgbClr val="222222"/>
                 </a:solidFill>
@@ -6736,8 +7765,8 @@
         </p:nvSpPr>
         <p:spPr>
           <a:xfrm>
-            <a:off x="365760" y="2377440"/>
-            <a:ext cx="5623560" cy="1536192"/>
+            <a:off x="365760" y="2286000"/>
+            <a:ext cx="5623560" cy="1481328"/>
           </a:xfrm>
           <a:prstGeom prst="roundRect">
             <a:avLst/>
@@ -6745,7 +7774,7 @@
           <a:solidFill>
             <a:srgbClr val="FFFFFF"/>
           </a:solidFill>
-          <a:ln w="15240">
+          <a:ln w="13970">
             <a:solidFill>
               <a:srgbClr val="CBD5E1"/>
             </a:solidFill>
@@ -6781,8 +7810,8 @@
         </p:nvSpPr>
         <p:spPr>
           <a:xfrm>
-            <a:off x="475488" y="2267712"/>
-            <a:ext cx="2011680" cy="237744"/>
+            <a:off x="475488" y="2176272"/>
+            <a:ext cx="2011680" cy="219456"/>
           </a:xfrm>
           <a:prstGeom prst="roundRect">
             <a:avLst/>
@@ -6809,11 +7838,11 @@
           </a:fontRef>
         </p:style>
         <p:txBody>
-          <a:bodyPr rtlCol="0" anchor="ctr" wrap="none" lIns="73152" rIns="73152" tIns="0" bIns="0"/>
+          <a:bodyPr rtlCol="0" anchor="ctr" wrap="none" lIns="54864" rIns="54864" tIns="0" bIns="0"/>
           <a:lstStyle/>
           <a:p>
             <a:pPr algn="ctr">
-              <a:defRPr sz="950" b="1">
+              <a:defRPr sz="900" b="1">
                 <a:solidFill>
                   <a:srgbClr val="FFFFFF"/>
                 </a:solidFill>
@@ -6834,8 +7863,8 @@
         </p:nvSpPr>
         <p:spPr>
           <a:xfrm>
-            <a:off x="502920" y="2523744"/>
-            <a:ext cx="5349240" cy="1353312"/>
+            <a:off x="502920" y="2414016"/>
+            <a:ext cx="5349240" cy="1316736"/>
           </a:xfrm>
           <a:prstGeom prst="rect">
             <a:avLst/>
@@ -6854,7 +7883,7 @@
               </a:spcBef>
             </a:pPr>
             <a:r>
-              <a:rPr sz="850" b="1">
+              <a:rPr sz="830" b="1">
                 <a:solidFill>
                   <a:srgbClr val="008C6E"/>
                 </a:solidFill>
@@ -6863,7 +7892,7 @@
               <a:t>&gt; Resilient One-Click Ingestion : </a:t>
             </a:r>
             <a:r>
-              <a:rPr sz="800">
+              <a:rPr sz="780">
                 <a:solidFill>
                   <a:srgbClr val="222222"/>
                 </a:solidFill>
@@ -6875,11 +7904,11 @@
           <a:p>
             <a:pPr>
               <a:spcBef>
-                <a:spcPts val="250"/>
+                <a:spcPts val="220"/>
               </a:spcBef>
             </a:pPr>
             <a:r>
-              <a:rPr sz="850" b="1">
+              <a:rPr sz="830" b="1">
                 <a:solidFill>
                   <a:srgbClr val="008C6E"/>
                 </a:solidFill>
@@ -6888,7 +7917,7 @@
               <a:t>&gt; Autonomous 3-Way Reconciliation : </a:t>
             </a:r>
             <a:r>
-              <a:rPr sz="800">
+              <a:rPr sz="780">
                 <a:solidFill>
                   <a:srgbClr val="222222"/>
                 </a:solidFill>
@@ -6900,11 +7929,11 @@
           <a:p>
             <a:pPr>
               <a:spcBef>
-                <a:spcPts val="250"/>
+                <a:spcPts val="220"/>
               </a:spcBef>
             </a:pPr>
             <a:r>
-              <a:rPr sz="850" b="1">
+              <a:rPr sz="830" b="1">
                 <a:solidFill>
                   <a:srgbClr val="008C6E"/>
                 </a:solidFill>
@@ -6913,7 +7942,7 @@
               <a:t>&gt; Tamper-Proof Digital Verification Receipt : </a:t>
             </a:r>
             <a:r>
-              <a:rPr sz="800">
+              <a:rPr sz="780">
                 <a:solidFill>
                   <a:srgbClr val="222222"/>
                 </a:solidFill>
@@ -6925,11 +7954,11 @@
           <a:p>
             <a:pPr>
               <a:spcBef>
-                <a:spcPts val="250"/>
+                <a:spcPts val="220"/>
               </a:spcBef>
             </a:pPr>
             <a:r>
-              <a:rPr sz="850" b="1">
+              <a:rPr sz="830" b="1">
                 <a:solidFill>
                   <a:srgbClr val="008C6E"/>
                 </a:solidFill>
@@ -6938,7 +7967,7 @@
               <a:t>&gt; Student Academic Passport : </a:t>
             </a:r>
             <a:r>
-              <a:rPr sz="800">
+              <a:rPr sz="780">
                 <a:solidFill>
                   <a:srgbClr val="222222"/>
                 </a:solidFill>
@@ -6957,8 +7986,8 @@
         </p:nvSpPr>
         <p:spPr>
           <a:xfrm>
-            <a:off x="365760" y="4041648"/>
-            <a:ext cx="5623560" cy="1572768"/>
+            <a:off x="365760" y="3886200"/>
+            <a:ext cx="5623560" cy="1508760"/>
           </a:xfrm>
           <a:prstGeom prst="roundRect">
             <a:avLst/>
@@ -6966,7 +7995,7 @@
           <a:solidFill>
             <a:srgbClr val="FFFFFF"/>
           </a:solidFill>
-          <a:ln w="15240">
+          <a:ln w="13970">
             <a:solidFill>
               <a:srgbClr val="CBD5E1"/>
             </a:solidFill>
@@ -7002,8 +8031,8 @@
         </p:nvSpPr>
         <p:spPr>
           <a:xfrm>
-            <a:off x="475488" y="3931920"/>
-            <a:ext cx="2834640" cy="237744"/>
+            <a:off x="475488" y="3776472"/>
+            <a:ext cx="2834640" cy="219456"/>
           </a:xfrm>
           <a:prstGeom prst="roundRect">
             <a:avLst/>
@@ -7030,11 +8059,11 @@
           </a:fontRef>
         </p:style>
         <p:txBody>
-          <a:bodyPr rtlCol="0" anchor="ctr" wrap="none" lIns="73152" rIns="73152" tIns="0" bIns="0"/>
+          <a:bodyPr rtlCol="0" anchor="ctr" wrap="none" lIns="54864" rIns="54864" tIns="0" bIns="0"/>
           <a:lstStyle/>
           <a:p>
             <a:pPr algn="ctr">
-              <a:defRPr sz="950" b="1">
+              <a:defRPr sz="900" b="1">
                 <a:solidFill>
                   <a:srgbClr val="FFFFFF"/>
                 </a:solidFill>
@@ -7055,8 +8084,8 @@
         </p:nvSpPr>
         <p:spPr>
           <a:xfrm>
-            <a:off x="502920" y="4187952"/>
-            <a:ext cx="5349240" cy="1389888"/>
+            <a:off x="502920" y="4014216"/>
+            <a:ext cx="5349240" cy="1344168"/>
           </a:xfrm>
           <a:prstGeom prst="rect">
             <a:avLst/>
@@ -7075,7 +8104,7 @@
               </a:spcBef>
             </a:pPr>
             <a:r>
-              <a:rPr sz="850" b="1">
+              <a:rPr sz="830" b="1">
                 <a:solidFill>
                   <a:srgbClr val="1A56DB"/>
                 </a:solidFill>
@@ -7084,7 +8113,7 @@
               <a:t>&gt; 100% Deterministic Python Engine : </a:t>
             </a:r>
             <a:r>
-              <a:rPr sz="800">
+              <a:rPr sz="780">
                 <a:solidFill>
                   <a:srgbClr val="222222"/>
                 </a:solidFill>
@@ -7096,11 +8125,11 @@
           <a:p>
             <a:pPr>
               <a:spcBef>
-                <a:spcPts val="250"/>
+                <a:spcPts val="220"/>
               </a:spcBef>
             </a:pPr>
             <a:r>
-              <a:rPr sz="850" b="1">
+              <a:rPr sz="830" b="1">
                 <a:solidFill>
                   <a:srgbClr val="1A56DB"/>
                 </a:solidFill>
@@ -7109,7 +8138,7 @@
               <a:t>&gt; Zero Plaintext APAAR Privacy Shield : </a:t>
             </a:r>
             <a:r>
-              <a:rPr sz="800">
+              <a:rPr sz="780">
                 <a:solidFill>
                   <a:srgbClr val="222222"/>
                 </a:solidFill>
@@ -7121,11 +8150,11 @@
           <a:p>
             <a:pPr>
               <a:spcBef>
-                <a:spcPts val="250"/>
+                <a:spcPts val="220"/>
               </a:spcBef>
             </a:pPr>
             <a:r>
-              <a:rPr sz="850" b="1">
+              <a:rPr sz="830" b="1">
                 <a:solidFill>
                   <a:srgbClr val="1A56DB"/>
                 </a:solidFill>
@@ -7134,7 +8163,7 @@
               <a:t>&gt; Offline Mathematical Trust : </a:t>
             </a:r>
             <a:r>
-              <a:rPr sz="800">
+              <a:rPr sz="780">
                 <a:solidFill>
                   <a:srgbClr val="222222"/>
                 </a:solidFill>
@@ -7146,11 +8175,11 @@
           <a:p>
             <a:pPr>
               <a:spcBef>
-                <a:spcPts val="250"/>
+                <a:spcPts val="220"/>
               </a:spcBef>
             </a:pPr>
             <a:r>
-              <a:rPr sz="850" b="1">
+              <a:rPr sz="830" b="1">
                 <a:solidFill>
                   <a:srgbClr val="1A56DB"/>
                 </a:solidFill>
@@ -7159,7 +8188,7 @@
               <a:t>&gt; Tamper-Evident SHA-256 Ledger : </a:t>
             </a:r>
             <a:r>
-              <a:rPr sz="800">
+              <a:rPr sz="780">
                 <a:solidFill>
                   <a:srgbClr val="222222"/>
                 </a:solidFill>
@@ -7178,8 +8207,8 @@
         </p:nvSpPr>
         <p:spPr>
           <a:xfrm>
-            <a:off x="6172200" y="1097280"/>
-            <a:ext cx="5623560" cy="4517136"/>
+            <a:off x="6172200" y="1051560"/>
+            <a:ext cx="5623560" cy="4343400"/>
           </a:xfrm>
           <a:prstGeom prst="roundRect">
             <a:avLst/>
@@ -7187,7 +8216,7 @@
           <a:solidFill>
             <a:srgbClr val="FFFFFF"/>
           </a:solidFill>
-          <a:ln w="15240">
+          <a:ln w="13970">
             <a:solidFill>
               <a:srgbClr val="CBD5E1"/>
             </a:solidFill>
@@ -7223,8 +8252,8 @@
         </p:nvSpPr>
         <p:spPr>
           <a:xfrm>
-            <a:off x="6309360" y="987552"/>
-            <a:ext cx="1645920" cy="237744"/>
+            <a:off x="6309360" y="941832"/>
+            <a:ext cx="2011680" cy="219456"/>
           </a:xfrm>
           <a:prstGeom prst="roundRect">
             <a:avLst/>
@@ -7251,11 +8280,11 @@
           </a:fontRef>
         </p:style>
         <p:txBody>
-          <a:bodyPr rtlCol="0" anchor="ctr" wrap="none" lIns="73152" rIns="73152" tIns="0" bIns="0"/>
+          <a:bodyPr rtlCol="0" anchor="ctr" wrap="none" lIns="54864" rIns="54864" tIns="0" bIns="0"/>
           <a:lstStyle/>
           <a:p>
             <a:pPr algn="ctr">
-              <a:defRPr sz="950" b="1">
+              <a:defRPr sz="900" b="1">
                 <a:solidFill>
                   <a:srgbClr val="FFFFFF"/>
                 </a:solidFill>
@@ -7263,7 +8292,7 @@
               </a:defRPr>
             </a:pPr>
             <a:r>
-              <a:t>ARCHITECTURE</a:t>
+              <a:t>ARCHITECTURE &amp; CONSOLE</a:t>
             </a:r>
           </a:p>
         </p:txBody>
@@ -7284,8 +8313,8 @@
         </p:blipFill>
         <p:spPr>
           <a:xfrm>
-            <a:off x="6281928" y="1298448"/>
-            <a:ext cx="5404104" cy="2926080"/>
+            <a:off x="6281928" y="1234440"/>
+            <a:ext cx="5404104" cy="2148840"/>
           </a:xfrm>
           <a:prstGeom prst="rect">
             <a:avLst/>
@@ -7300,8 +8329,8 @@
         </p:nvSpPr>
         <p:spPr>
           <a:xfrm>
-            <a:off x="6281928" y="4297680"/>
-            <a:ext cx="5404104" cy="1234440"/>
+            <a:off x="6281928" y="3429000"/>
+            <a:ext cx="5404104" cy="868680"/>
           </a:xfrm>
           <a:prstGeom prst="rect">
             <a:avLst/>
@@ -7320,7 +8349,7 @@
               </a:spcBef>
             </a:pPr>
             <a:r>
-              <a:rPr sz="819" b="1">
+              <a:rPr sz="800" b="1">
                 <a:solidFill>
                   <a:srgbClr val="1A365D"/>
                 </a:solidFill>
@@ -7329,7 +8358,7 @@
               <a:t>&gt; Central Intake Intelligence : </a:t>
             </a:r>
             <a:r>
-              <a:rPr sz="780">
+              <a:rPr sz="760">
                 <a:solidFill>
                   <a:srgbClr val="222222"/>
                 </a:solidFill>
@@ -7341,11 +8370,11 @@
           <a:p>
             <a:pPr>
               <a:spcBef>
-                <a:spcPts val="250"/>
+                <a:spcPts val="200"/>
               </a:spcBef>
             </a:pPr>
             <a:r>
-              <a:rPr sz="819" b="1">
+              <a:rPr sz="800" b="1">
                 <a:solidFill>
                   <a:srgbClr val="1A365D"/>
                 </a:solidFill>
@@ -7354,38 +8383,13 @@
               <a:t>&gt; Deterministic Review Desk : </a:t>
             </a:r>
             <a:r>
-              <a:rPr sz="780">
+              <a:rPr sz="760">
                 <a:solidFill>
                   <a:srgbClr val="222222"/>
                 </a:solidFill>
                 <a:latin typeface="Arial"/>
               </a:rPr>
               <a:t>Instant identification of seat limit breaches, unverified candidates, and duplicate claims.</a:t>
-            </a:r>
-          </a:p>
-          <a:p>
-            <a:pPr>
-              <a:spcBef>
-                <a:spcPts val="250"/>
-              </a:spcBef>
-            </a:pPr>
-            <a:r>
-              <a:rPr sz="819" b="1">
-                <a:solidFill>
-                  <a:srgbClr val="1A365D"/>
-                </a:solidFill>
-                <a:latin typeface="Arial"/>
-              </a:rPr>
-              <a:t>&gt; Multi-Tenant Governance : </a:t>
-            </a:r>
-            <a:r>
-              <a:rPr sz="780">
-                <a:solidFill>
-                  <a:srgbClr val="222222"/>
-                </a:solidFill>
-                <a:latin typeface="Arial"/>
-              </a:rPr>
-              <a:t>Seamless institutional isolation between AICTE Central Regulators, DTU Delhi, and COEP Pune.</a:t>
             </a:r>
           </a:p>
         </p:txBody>
@@ -7398,8 +8402,8 @@
         </p:nvSpPr>
         <p:spPr>
           <a:xfrm>
-            <a:off x="365760" y="5742432"/>
-            <a:ext cx="2697480" cy="292608"/>
+            <a:off x="6281928" y="4315968"/>
+            <a:ext cx="5404104" cy="1005840"/>
           </a:xfrm>
           <a:prstGeom prst="roundRect">
             <a:avLst/>
@@ -7407,7 +8411,7 @@
           <a:solidFill>
             <a:srgbClr val="F8FAFC"/>
           </a:solidFill>
-          <a:ln w="12700">
+          <a:ln w="13970">
             <a:solidFill>
               <a:srgbClr val="008C6E"/>
             </a:solidFill>
@@ -7431,41 +8435,123 @@
           <a:bodyPr rtlCol="0" anchor="ctr"/>
           <a:lstStyle/>
           <a:p>
-            <a:pPr algn="ctr">
-              <a:defRPr sz="850" b="1">
+            <a:pPr algn="ctr"/>
+          </a:p>
+        </p:txBody>
+      </p:sp>
+      <p:pic>
+        <p:nvPicPr>
+          <p:cNvPr id="15376" name="Picture 15375" descr="qrcode_brainforge.png"/>
+          <p:cNvPicPr>
+            <a:picLocks noChangeAspect="1"/>
+          </p:cNvPicPr>
+          <p:nvPr/>
+        </p:nvPicPr>
+        <p:blipFill>
+          <a:blip r:embed="rId5"/>
+          <a:stretch>
+            <a:fillRect/>
+          </a:stretch>
+        </p:blipFill>
+        <p:spPr>
+          <a:xfrm>
+            <a:off x="6355080" y="4370832"/>
+            <a:ext cx="877824" cy="877824"/>
+          </a:xfrm>
+          <a:prstGeom prst="rect">
+            <a:avLst/>
+          </a:prstGeom>
+        </p:spPr>
+      </p:pic>
+      <p:sp>
+        <p:nvSpPr>
+          <p:cNvPr id="15377" name="TextBox 15376"/>
+          <p:cNvSpPr txBox="1"/>
+          <p:nvPr/>
+        </p:nvSpPr>
+        <p:spPr>
+          <a:xfrm>
+            <a:off x="7315200" y="4352544"/>
+            <a:ext cx="4343400" cy="932688"/>
+          </a:xfrm>
+          <a:prstGeom prst="rect">
+            <a:avLst/>
+          </a:prstGeom>
+          <a:noFill/>
+        </p:spPr>
+        <p:txBody>
+          <a:bodyPr wrap="square">
+            <a:spAutoFit/>
+          </a:bodyPr>
+          <a:lstStyle/>
+          <a:p>
+            <a:pPr>
+              <a:defRPr sz="900" b="1">
+                <a:solidFill>
+                  <a:srgbClr val="112266"/>
+                </a:solidFill>
+                <a:latin typeface="Arial"/>
+              </a:defRPr>
+            </a:pPr>
+            <a:r>
+              <a:t>Click or Scan for Live Prototype:-</a:t>
+            </a:r>
+          </a:p>
+          <a:p>
+            <a:pPr>
+              <a:spcBef>
+                <a:spcPts val="150"/>
+              </a:spcBef>
+            </a:pPr>
+            <a:r>
+              <a:rPr sz="900" b="1">
+                <a:solidFill>
+                  <a:srgbClr val="1A56DB"/>
+                </a:solidFill>
+                <a:latin typeface="Arial"/>
+                <a:hlinkClick r:id="rId6"/>
+              </a:rPr>
+              <a:t>https://brainforge.info ↗</a:t>
+            </a:r>
+          </a:p>
+          <a:p>
+            <a:pPr>
+              <a:spcBef>
+                <a:spcPts val="150"/>
+              </a:spcBef>
+            </a:pPr>
+            <a:r>
+              <a:rPr sz="780">
                 <a:solidFill>
                   <a:srgbClr val="008C6E"/>
                 </a:solidFill>
                 <a:latin typeface="Arial"/>
-              </a:defRPr>
-            </a:pPr>
-            <a:r>
-              <a:t>Deterministic Python Core</a:t>
-            </a:r>
-          </a:p>
-        </p:txBody>
-      </p:sp>
-      <p:sp>
-        <p:nvSpPr>
-          <p:cNvPr id="15376" name="Rounded Rectangle 15375"/>
+                <a:hlinkClick r:id="rId7"/>
+              </a:rPr>
+              <a:t>Mirror: https://pramaan.brainforge.info</a:t>
+            </a:r>
+          </a:p>
+        </p:txBody>
+      </p:sp>
+      <p:sp>
+        <p:nvSpPr>
+          <p:cNvPr id="15378" name="Rectangle 15377"/>
           <p:cNvSpPr/>
           <p:nvPr/>
         </p:nvSpPr>
         <p:spPr>
           <a:xfrm>
-            <a:off x="3246120" y="5742432"/>
-            <a:ext cx="2697480" cy="292608"/>
-          </a:xfrm>
-          <a:prstGeom prst="roundRect">
+            <a:off x="365760" y="5532120"/>
+            <a:ext cx="11430000" cy="365760"/>
+          </a:xfrm>
+          <a:prstGeom prst="rect">
             <a:avLst/>
           </a:prstGeom>
           <a:solidFill>
-            <a:srgbClr val="F8FAFC"/>
+            <a:srgbClr val="DA1E28"/>
           </a:solidFill>
-          <a:ln w="12700">
-            <a:solidFill>
-              <a:srgbClr val="112266"/>
-            </a:solidFill>
+          <a:ln>
+            <a:noFill/>
           </a:ln>
         </p:spPr>
         <p:style>
@@ -7487,125 +8573,15 @@
           <a:lstStyle/>
           <a:p>
             <a:pPr algn="ctr">
-              <a:defRPr sz="850" b="1">
-                <a:solidFill>
-                  <a:srgbClr val="112266"/>
+              <a:defRPr sz="1000" b="1">
+                <a:solidFill>
+                  <a:srgbClr val="FFFFFF"/>
                 </a:solidFill>
                 <a:latin typeface="Arial"/>
               </a:defRPr>
             </a:pPr>
             <a:r>
-              <a:t>3-Way Cross-Reconciliation</a:t>
-            </a:r>
-          </a:p>
-        </p:txBody>
-      </p:sp>
-      <p:sp>
-        <p:nvSpPr>
-          <p:cNvPr id="15377" name="Rounded Rectangle 15376"/>
-          <p:cNvSpPr/>
-          <p:nvPr/>
-        </p:nvSpPr>
-        <p:spPr>
-          <a:xfrm>
-            <a:off x="6172200" y="5742432"/>
-            <a:ext cx="2697480" cy="292608"/>
-          </a:xfrm>
-          <a:prstGeom prst="roundRect">
-            <a:avLst/>
-          </a:prstGeom>
-          <a:solidFill>
-            <a:srgbClr val="F8FAFC"/>
-          </a:solidFill>
-          <a:ln w="12700">
-            <a:solidFill>
-              <a:srgbClr val="1A365D"/>
-            </a:solidFill>
-          </a:ln>
-        </p:spPr>
-        <p:style>
-          <a:lnRef idx="1">
-            <a:schemeClr val="accent1"/>
-          </a:lnRef>
-          <a:fillRef idx="3">
-            <a:schemeClr val="accent1"/>
-          </a:fillRef>
-          <a:effectRef idx="2">
-            <a:schemeClr val="accent1"/>
-          </a:effectRef>
-          <a:fontRef idx="minor">
-            <a:schemeClr val="lt1"/>
-          </a:fontRef>
-        </p:style>
-        <p:txBody>
-          <a:bodyPr rtlCol="0" anchor="ctr"/>
-          <a:lstStyle/>
-          <a:p>
-            <a:pPr algn="ctr">
-              <a:defRPr sz="850" b="1">
-                <a:solidFill>
-                  <a:srgbClr val="1A365D"/>
-                </a:solidFill>
-                <a:latin typeface="Arial"/>
-              </a:defRPr>
-            </a:pPr>
-            <a:r>
-              <a:t>Cryptographic Verification &amp; Audit</a:t>
-            </a:r>
-          </a:p>
-        </p:txBody>
-      </p:sp>
-      <p:sp>
-        <p:nvSpPr>
-          <p:cNvPr id="15378" name="Rounded Rectangle 15377"/>
-          <p:cNvSpPr/>
-          <p:nvPr/>
-        </p:nvSpPr>
-        <p:spPr>
-          <a:xfrm>
-            <a:off x="9098280" y="5742432"/>
-            <a:ext cx="2697480" cy="292608"/>
-          </a:xfrm>
-          <a:prstGeom prst="roundRect">
-            <a:avLst/>
-          </a:prstGeom>
-          <a:solidFill>
-            <a:srgbClr val="F8FAFC"/>
-          </a:solidFill>
-          <a:ln w="12700">
-            <a:solidFill>
-              <a:srgbClr val="008C6E"/>
-            </a:solidFill>
-          </a:ln>
-        </p:spPr>
-        <p:style>
-          <a:lnRef idx="1">
-            <a:schemeClr val="accent1"/>
-          </a:lnRef>
-          <a:fillRef idx="3">
-            <a:schemeClr val="accent1"/>
-          </a:fillRef>
-          <a:effectRef idx="2">
-            <a:schemeClr val="accent1"/>
-          </a:effectRef>
-          <a:fontRef idx="minor">
-            <a:schemeClr val="lt1"/>
-          </a:fontRef>
-        </p:style>
-        <p:txBody>
-          <a:bodyPr rtlCol="0" anchor="ctr"/>
-          <a:lstStyle/>
-          <a:p>
-            <a:pPr algn="ctr">
-              <a:defRPr sz="850" b="1">
-                <a:solidFill>
-                  <a:srgbClr val="008C6E"/>
-                </a:solidFill>
-                <a:latin typeface="Arial"/>
-              </a:defRPr>
-            </a:pPr>
-            <a:r>
-              <a:t>66/66 Verified Passing Tests</a:t>
+              <a:t>★ 100% PRODUCTION SYSTEM ALREADY DEPLOYED &amp; 66/66 E2E SUITE TESTS VERIFIED ON LIVE CLOUD (VERCEL + RENDER + SUPABASE) ★</a:t>
             </a:r>
           </a:p>
         </p:txBody>
@@ -7711,8 +8687,8 @@
         </p:nvSpPr>
         <p:spPr>
           <a:xfrm>
-            <a:off x="1691640" y="137160"/>
-            <a:ext cx="8092440" cy="822960"/>
+            <a:off x="1691640" y="109728"/>
+            <a:ext cx="8092440" cy="777240"/>
           </a:xfrm>
         </p:spPr>
         <p:txBody>
@@ -7736,7 +8712,7 @@
               <a:spcBef>
                 <a:spcPts val="200"/>
               </a:spcBef>
-              <a:defRPr sz="1000" b="1">
+              <a:defRPr sz="950" b="1">
                 <a:solidFill>
                   <a:srgbClr val="008C6E"/>
                 </a:solidFill>
@@ -7761,8 +8737,8 @@
         </p:nvSpPr>
         <p:spPr>
           <a:xfrm>
-            <a:off x="10058400" y="6382512"/>
-            <a:ext cx="1645920" cy="365760"/>
+            <a:off x="10058400" y="6419088"/>
+            <a:ext cx="1645920" cy="329184"/>
           </a:xfrm>
         </p:spPr>
         <p:txBody>
@@ -7770,7 +8746,7 @@
           <a:lstStyle/>
           <a:p>
             <a:pPr algn="r">
-              <a:defRPr sz="1000" b="1">
+              <a:defRPr sz="950" b="1">
                 <a:solidFill>
                   <a:srgbClr val="FFFFFF"/>
                 </a:solidFill>
@@ -7800,8 +8776,8 @@
         </p:nvSpPr>
         <p:spPr>
           <a:xfrm>
-            <a:off x="2743200" y="6382512"/>
-            <a:ext cx="6702552" cy="365760"/>
+            <a:off x="2743200" y="6419088"/>
+            <a:ext cx="6702552" cy="329184"/>
           </a:xfrm>
         </p:spPr>
         <p:txBody>
@@ -7809,7 +8785,7 @@
           <a:lstStyle/>
           <a:p>
             <a:pPr algn="ctr">
-              <a:defRPr sz="1000">
+              <a:defRPr sz="950">
                 <a:solidFill>
                   <a:srgbClr val="FFFFFF"/>
                 </a:solidFill>
@@ -7844,8 +8820,8 @@
         </p:nvSpPr>
         <p:spPr>
           <a:xfrm>
-            <a:off x="274320" y="164592"/>
-            <a:ext cx="1371600" cy="685800"/>
+            <a:off x="274320" y="137160"/>
+            <a:ext cx="1325880" cy="658368"/>
           </a:xfrm>
           <a:prstGeom prst="ellipse">
             <a:avLst/>
@@ -7922,8 +8898,8 @@
         </p:nvSpPr>
         <p:spPr>
           <a:xfrm>
-            <a:off x="365760" y="1005840"/>
-            <a:ext cx="5303520" cy="320040"/>
+            <a:off x="365760" y="960120"/>
+            <a:ext cx="5303520" cy="292608"/>
           </a:xfrm>
           <a:prstGeom prst="roundRect">
             <a:avLst/>
@@ -7954,7 +8930,7 @@
           <a:lstStyle/>
           <a:p>
             <a:pPr algn="ctr">
-              <a:defRPr sz="1050" b="1">
+              <a:defRPr sz="1000" b="1">
                 <a:solidFill>
                   <a:srgbClr val="FFFFFF"/>
                 </a:solidFill>
@@ -7975,8 +8951,8 @@
         </p:nvSpPr>
         <p:spPr>
           <a:xfrm>
-            <a:off x="365760" y="1463040"/>
-            <a:ext cx="3566160" cy="3291840"/>
+            <a:off x="365760" y="1353312"/>
+            <a:ext cx="3566160" cy="2971800"/>
           </a:xfrm>
           <a:prstGeom prst="roundRect">
             <a:avLst/>
@@ -7984,7 +8960,7 @@
           <a:solidFill>
             <a:srgbClr val="FFFFFF"/>
           </a:solidFill>
-          <a:ln w="15240">
+          <a:ln w="13970">
             <a:solidFill>
               <a:srgbClr val="1A56DB"/>
             </a:solidFill>
@@ -8020,8 +8996,8 @@
         </p:nvSpPr>
         <p:spPr>
           <a:xfrm>
-            <a:off x="502920" y="1353312"/>
-            <a:ext cx="3291840" cy="256032"/>
+            <a:off x="502920" y="1243584"/>
+            <a:ext cx="3291840" cy="237744"/>
           </a:xfrm>
           <a:prstGeom prst="roundRect">
             <a:avLst/>
@@ -8048,11 +9024,11 @@
           </a:fontRef>
         </p:style>
         <p:txBody>
-          <a:bodyPr rtlCol="0" anchor="ctr" wrap="none" lIns="73152" rIns="73152" tIns="0" bIns="0"/>
+          <a:bodyPr rtlCol="0" anchor="ctr" wrap="none" lIns="54864" rIns="54864" tIns="0" bIns="0"/>
           <a:lstStyle/>
           <a:p>
             <a:pPr algn="ctr">
-              <a:defRPr sz="950" b="1">
+              <a:defRPr sz="900" b="1">
                 <a:solidFill>
                   <a:srgbClr val="FFFFFF"/>
                 </a:solidFill>
@@ -8073,8 +9049,8 @@
         </p:nvSpPr>
         <p:spPr>
           <a:xfrm>
-            <a:off x="475488" y="1645920"/>
-            <a:ext cx="3346704" cy="3072384"/>
+            <a:off x="475488" y="1517904"/>
+            <a:ext cx="3346704" cy="2770632"/>
           </a:xfrm>
           <a:prstGeom prst="rect">
             <a:avLst/>
@@ -8093,7 +9069,7 @@
               </a:spcBef>
             </a:pPr>
             <a:r>
-              <a:rPr sz="819" b="1">
+              <a:rPr sz="800" b="1">
                 <a:solidFill>
                   <a:srgbClr val="1A56DB"/>
                 </a:solidFill>
@@ -8102,7 +9078,7 @@
               <a:t>1. Ingestion Desk -&gt; </a:t>
             </a:r>
             <a:r>
-              <a:rPr sz="780">
+              <a:rPr sz="760">
                 <a:solidFill>
                   <a:srgbClr val="222222"/>
                 </a:solidFill>
@@ -8114,11 +9090,11 @@
           <a:p>
             <a:pPr>
               <a:spcBef>
-                <a:spcPts val="350"/>
+                <a:spcPts val="300"/>
               </a:spcBef>
             </a:pPr>
             <a:r>
-              <a:rPr sz="819" b="1">
+              <a:rPr sz="800" b="1">
                 <a:solidFill>
                   <a:srgbClr val="1A56DB"/>
                 </a:solidFill>
@@ -8127,7 +9103,7 @@
               <a:t>2. Header Normalizer -&gt; </a:t>
             </a:r>
             <a:r>
-              <a:rPr sz="780">
+              <a:rPr sz="760">
                 <a:solidFill>
                   <a:srgbClr val="222222"/>
                 </a:solidFill>
@@ -8139,11 +9115,11 @@
           <a:p>
             <a:pPr>
               <a:spcBef>
-                <a:spcPts val="350"/>
+                <a:spcPts val="300"/>
               </a:spcBef>
             </a:pPr>
             <a:r>
-              <a:rPr sz="819" b="1">
+              <a:rPr sz="800" b="1">
                 <a:solidFill>
                   <a:srgbClr val="1A56DB"/>
                 </a:solidFill>
@@ -8152,7 +9128,7 @@
               <a:t>3. Deterministic Engine -&gt; </a:t>
             </a:r>
             <a:r>
-              <a:rPr sz="780">
+              <a:rPr sz="760">
                 <a:solidFill>
                   <a:srgbClr val="222222"/>
                 </a:solidFill>
@@ -8164,11 +9140,11 @@
           <a:p>
             <a:pPr>
               <a:spcBef>
-                <a:spcPts val="350"/>
+                <a:spcPts val="300"/>
               </a:spcBef>
             </a:pPr>
             <a:r>
-              <a:rPr sz="819" b="1">
+              <a:rPr sz="800" b="1">
                 <a:solidFill>
                   <a:srgbClr val="1A56DB"/>
                 </a:solidFill>
@@ -8177,7 +9153,7 @@
               <a:t>4. Quota Verification -&gt; </a:t>
             </a:r>
             <a:r>
-              <a:rPr sz="780">
+              <a:rPr sz="760">
                 <a:solidFill>
                   <a:srgbClr val="222222"/>
                 </a:solidFill>
@@ -8189,11 +9165,11 @@
           <a:p>
             <a:pPr>
               <a:spcBef>
-                <a:spcPts val="350"/>
+                <a:spcPts val="300"/>
               </a:spcBef>
             </a:pPr>
             <a:r>
-              <a:rPr sz="819" b="1">
+              <a:rPr sz="800" b="1">
                 <a:solidFill>
                   <a:srgbClr val="1A56DB"/>
                 </a:solidFill>
@@ -8202,7 +9178,7 @@
               <a:t>5. Two-Phase Commit -&gt; </a:t>
             </a:r>
             <a:r>
-              <a:rPr sz="780">
+              <a:rPr sz="760">
                 <a:solidFill>
                   <a:srgbClr val="222222"/>
                 </a:solidFill>
@@ -8214,11 +9190,11 @@
           <a:p>
             <a:pPr>
               <a:spcBef>
-                <a:spcPts val="350"/>
+                <a:spcPts val="300"/>
               </a:spcBef>
             </a:pPr>
             <a:r>
-              <a:rPr sz="819" b="1">
+              <a:rPr sz="800" b="1">
                 <a:solidFill>
                   <a:srgbClr val="1A56DB"/>
                 </a:solidFill>
@@ -8227,7 +9203,7 @@
               <a:t>6. Verification Ready -&gt; </a:t>
             </a:r>
             <a:r>
-              <a:rPr sz="780">
+              <a:rPr sz="760">
                 <a:solidFill>
                   <a:srgbClr val="222222"/>
                 </a:solidFill>
@@ -8246,8 +9222,8 @@
         </p:nvSpPr>
         <p:spPr>
           <a:xfrm>
-            <a:off x="4069080" y="1463040"/>
-            <a:ext cx="3566160" cy="3291840"/>
+            <a:off x="4069080" y="1353312"/>
+            <a:ext cx="3566160" cy="2971800"/>
           </a:xfrm>
           <a:prstGeom prst="roundRect">
             <a:avLst/>
@@ -8255,7 +9231,7 @@
           <a:solidFill>
             <a:srgbClr val="FFFFFF"/>
           </a:solidFill>
-          <a:ln w="15240">
+          <a:ln w="13970">
             <a:solidFill>
               <a:srgbClr val="DC6414"/>
             </a:solidFill>
@@ -8291,8 +9267,8 @@
         </p:nvSpPr>
         <p:spPr>
           <a:xfrm>
-            <a:off x="4206240" y="1353312"/>
-            <a:ext cx="3291840" cy="256032"/>
+            <a:off x="4206240" y="1243584"/>
+            <a:ext cx="3291840" cy="237744"/>
           </a:xfrm>
           <a:prstGeom prst="roundRect">
             <a:avLst/>
@@ -8319,11 +9295,11 @@
           </a:fontRef>
         </p:style>
         <p:txBody>
-          <a:bodyPr rtlCol="0" anchor="ctr" wrap="none" lIns="73152" rIns="73152" tIns="0" bIns="0"/>
+          <a:bodyPr rtlCol="0" anchor="ctr" wrap="none" lIns="54864" rIns="54864" tIns="0" bIns="0"/>
           <a:lstStyle/>
           <a:p>
             <a:pPr algn="ctr">
-              <a:defRPr sz="950" b="1">
+              <a:defRPr sz="900" b="1">
                 <a:solidFill>
                   <a:srgbClr val="FFFFFF"/>
                 </a:solidFill>
@@ -8344,8 +9320,8 @@
         </p:nvSpPr>
         <p:spPr>
           <a:xfrm>
-            <a:off x="4178808" y="1645920"/>
-            <a:ext cx="3346704" cy="3072384"/>
+            <a:off x="4178808" y="1517904"/>
+            <a:ext cx="3346704" cy="2770632"/>
           </a:xfrm>
           <a:prstGeom prst="rect">
             <a:avLst/>
@@ -8364,7 +9340,7 @@
               </a:spcBef>
             </a:pPr>
             <a:r>
-              <a:rPr sz="819" b="1">
+              <a:rPr sz="800" b="1">
                 <a:solidFill>
                   <a:srgbClr val="DC6414"/>
                 </a:solidFill>
@@ -8373,7 +9349,7 @@
               <a:t>1. Anomaly Flagged -&gt; </a:t>
             </a:r>
             <a:r>
-              <a:rPr sz="780">
+              <a:rPr sz="760">
                 <a:solidFill>
                   <a:srgbClr val="222222"/>
                 </a:solidFill>
@@ -8385,11 +9361,11 @@
           <a:p>
             <a:pPr>
               <a:spcBef>
-                <a:spcPts val="350"/>
+                <a:spcPts val="300"/>
               </a:spcBef>
             </a:pPr>
             <a:r>
-              <a:rPr sz="819" b="1">
+              <a:rPr sz="800" b="1">
                 <a:solidFill>
                   <a:srgbClr val="DC6414"/>
                 </a:solidFill>
@@ -8398,7 +9374,7 @@
               <a:t>2. Quarantine Sandbox -&gt; </a:t>
             </a:r>
             <a:r>
-              <a:rPr sz="780">
+              <a:rPr sz="760">
                 <a:solidFill>
                   <a:srgbClr val="222222"/>
                 </a:solidFill>
@@ -8410,11 +9386,11 @@
           <a:p>
             <a:pPr>
               <a:spcBef>
-                <a:spcPts val="350"/>
+                <a:spcPts val="300"/>
               </a:spcBef>
             </a:pPr>
             <a:r>
-              <a:rPr sz="819" b="1">
+              <a:rPr sz="800" b="1">
                 <a:solidFill>
                   <a:srgbClr val="DC6414"/>
                 </a:solidFill>
@@ -8423,7 +9399,7 @@
               <a:t>3. In-Browser Editing -&gt; </a:t>
             </a:r>
             <a:r>
-              <a:rPr sz="780">
+              <a:rPr sz="760">
                 <a:solidFill>
                   <a:srgbClr val="222222"/>
                 </a:solidFill>
@@ -8435,11 +9411,11 @@
           <a:p>
             <a:pPr>
               <a:spcBef>
-                <a:spcPts val="350"/>
+                <a:spcPts val="300"/>
               </a:spcBef>
             </a:pPr>
             <a:r>
-              <a:rPr sz="819" b="1">
+              <a:rPr sz="800" b="1">
                 <a:solidFill>
                   <a:srgbClr val="DC6414"/>
                 </a:solidFill>
@@ -8448,7 +9424,7 @@
               <a:t>4. Deterministic Recheck -&gt; </a:t>
             </a:r>
             <a:r>
-              <a:rPr sz="780">
+              <a:rPr sz="760">
                 <a:solidFill>
                   <a:srgbClr val="222222"/>
                 </a:solidFill>
@@ -8460,11 +9436,11 @@
           <a:p>
             <a:pPr>
               <a:spcBef>
-                <a:spcPts val="350"/>
+                <a:spcPts val="300"/>
               </a:spcBef>
             </a:pPr>
             <a:r>
-              <a:rPr sz="819" b="1">
+              <a:rPr sz="800" b="1">
                 <a:solidFill>
                   <a:srgbClr val="DC6414"/>
                 </a:solidFill>
@@ -8473,7 +9449,7 @@
               <a:t>5. Audit Record Chained -&gt; </a:t>
             </a:r>
             <a:r>
-              <a:rPr sz="780">
+              <a:rPr sz="760">
                 <a:solidFill>
                   <a:srgbClr val="222222"/>
                 </a:solidFill>
@@ -8485,11 +9461,11 @@
           <a:p>
             <a:pPr>
               <a:spcBef>
-                <a:spcPts val="350"/>
+                <a:spcPts val="300"/>
               </a:spcBef>
             </a:pPr>
             <a:r>
-              <a:rPr sz="819" b="1">
+              <a:rPr sz="800" b="1">
                 <a:solidFill>
                   <a:srgbClr val="DC6414"/>
                 </a:solidFill>
@@ -8498,7 +9474,7 @@
               <a:t>6. Council Commit -&gt; </a:t>
             </a:r>
             <a:r>
-              <a:rPr sz="780">
+              <a:rPr sz="760">
                 <a:solidFill>
                   <a:srgbClr val="222222"/>
                 </a:solidFill>
@@ -8517,8 +9493,8 @@
         </p:nvSpPr>
         <p:spPr>
           <a:xfrm>
-            <a:off x="7772400" y="1463040"/>
-            <a:ext cx="4023360" cy="3291840"/>
+            <a:off x="7772400" y="1353312"/>
+            <a:ext cx="4023360" cy="2971800"/>
           </a:xfrm>
           <a:prstGeom prst="roundRect">
             <a:avLst/>
@@ -8526,7 +9502,7 @@
           <a:solidFill>
             <a:srgbClr val="FFFFFF"/>
           </a:solidFill>
-          <a:ln w="15240">
+          <a:ln w="13970">
             <a:solidFill>
               <a:srgbClr val="18864B"/>
             </a:solidFill>
@@ -8562,8 +9538,8 @@
         </p:nvSpPr>
         <p:spPr>
           <a:xfrm>
-            <a:off x="7909560" y="1353312"/>
-            <a:ext cx="3749040" cy="256032"/>
+            <a:off x="7909560" y="1243584"/>
+            <a:ext cx="3749040" cy="237744"/>
           </a:xfrm>
           <a:prstGeom prst="roundRect">
             <a:avLst/>
@@ -8590,11 +9566,11 @@
           </a:fontRef>
         </p:style>
         <p:txBody>
-          <a:bodyPr rtlCol="0" anchor="ctr" wrap="none" lIns="73152" rIns="73152" tIns="0" bIns="0"/>
+          <a:bodyPr rtlCol="0" anchor="ctr" wrap="none" lIns="54864" rIns="54864" tIns="0" bIns="0"/>
           <a:lstStyle/>
           <a:p>
             <a:pPr algn="ctr">
-              <a:defRPr sz="950" b="1">
+              <a:defRPr sz="900" b="1">
                 <a:solidFill>
                   <a:srgbClr val="FFFFFF"/>
                 </a:solidFill>
@@ -8615,8 +9591,8 @@
         </p:nvSpPr>
         <p:spPr>
           <a:xfrm>
-            <a:off x="7882128" y="1645920"/>
-            <a:ext cx="3803904" cy="3072384"/>
+            <a:off x="7882128" y="1517904"/>
+            <a:ext cx="3803904" cy="2770632"/>
           </a:xfrm>
           <a:prstGeom prst="rect">
             <a:avLst/>
@@ -8635,7 +9611,7 @@
               </a:spcBef>
             </a:pPr>
             <a:r>
-              <a:rPr sz="819" b="1">
+              <a:rPr sz="800" b="1">
                 <a:solidFill>
                   <a:srgbClr val="18864B"/>
                 </a:solidFill>
@@ -8644,7 +9620,7 @@
               <a:t>1. National Radar -&gt; </a:t>
             </a:r>
             <a:r>
-              <a:rPr sz="780">
+              <a:rPr sz="760">
                 <a:solidFill>
                   <a:srgbClr val="222222"/>
                 </a:solidFill>
@@ -8656,11 +9632,11 @@
           <a:p>
             <a:pPr>
               <a:spcBef>
-                <a:spcPts val="350"/>
+                <a:spcPts val="300"/>
               </a:spcBef>
             </a:pPr>
             <a:r>
-              <a:rPr sz="819" b="1">
+              <a:rPr sz="800" b="1">
                 <a:solidFill>
                   <a:srgbClr val="18864B"/>
                 </a:solidFill>
@@ -8669,7 +9645,7 @@
               <a:t>2. Collision Detected -&gt; </a:t>
             </a:r>
             <a:r>
-              <a:rPr sz="780">
+              <a:rPr sz="760">
                 <a:solidFill>
                   <a:srgbClr val="222222"/>
                 </a:solidFill>
@@ -8681,11 +9657,11 @@
           <a:p>
             <a:pPr>
               <a:spcBef>
-                <a:spcPts val="350"/>
+                <a:spcPts val="300"/>
               </a:spcBef>
             </a:pPr>
             <a:r>
-              <a:rPr sz="819" b="1">
+              <a:rPr sz="800" b="1">
                 <a:solidFill>
                   <a:srgbClr val="18864B"/>
                 </a:solidFill>
@@ -8694,7 +9670,7 @@
               <a:t>3. Central Review Desk -&gt; </a:t>
             </a:r>
             <a:r>
-              <a:rPr sz="780">
+              <a:rPr sz="760">
                 <a:solidFill>
                   <a:srgbClr val="222222"/>
                 </a:solidFill>
@@ -8706,11 +9682,11 @@
           <a:p>
             <a:pPr>
               <a:spcBef>
-                <a:spcPts val="350"/>
+                <a:spcPts val="300"/>
               </a:spcBef>
             </a:pPr>
             <a:r>
-              <a:rPr sz="819" b="1">
+              <a:rPr sz="800" b="1">
                 <a:solidFill>
                   <a:srgbClr val="18864B"/>
                 </a:solidFill>
@@ -8719,7 +9695,7 @@
               <a:t>4. Adjudication Action -&gt; </a:t>
             </a:r>
             <a:r>
-              <a:rPr sz="780">
+              <a:rPr sz="760">
                 <a:solidFill>
                   <a:srgbClr val="222222"/>
                 </a:solidFill>
@@ -8731,11 +9707,11 @@
           <a:p>
             <a:pPr>
               <a:spcBef>
-                <a:spcPts val="350"/>
+                <a:spcPts val="300"/>
               </a:spcBef>
             </a:pPr>
             <a:r>
-              <a:rPr sz="819" b="1">
+              <a:rPr sz="800" b="1">
                 <a:solidFill>
                   <a:srgbClr val="18864B"/>
                 </a:solidFill>
@@ -8744,7 +9720,7 @@
               <a:t>5. Quota Restored -&gt; </a:t>
             </a:r>
             <a:r>
-              <a:rPr sz="780">
+              <a:rPr sz="760">
                 <a:solidFill>
                   <a:srgbClr val="222222"/>
                 </a:solidFill>
@@ -8756,11 +9732,11 @@
           <a:p>
             <a:pPr>
               <a:spcBef>
-                <a:spcPts val="350"/>
+                <a:spcPts val="300"/>
               </a:spcBef>
             </a:pPr>
             <a:r>
-              <a:rPr sz="819" b="1">
+              <a:rPr sz="800" b="1">
                 <a:solidFill>
                   <a:srgbClr val="18864B"/>
                 </a:solidFill>
@@ -8769,7 +9745,7 @@
               <a:t>6. Tamper-Proof Audit -&gt; </a:t>
             </a:r>
             <a:r>
-              <a:rPr sz="780">
+              <a:rPr sz="760">
                 <a:solidFill>
                   <a:srgbClr val="222222"/>
                 </a:solidFill>
@@ -8788,8 +9764,8 @@
         </p:nvSpPr>
         <p:spPr>
           <a:xfrm>
-            <a:off x="365760" y="4892040"/>
-            <a:ext cx="5303520" cy="1234440"/>
+            <a:off x="365760" y="4462272"/>
+            <a:ext cx="6858000" cy="1810512"/>
           </a:xfrm>
           <a:prstGeom prst="roundRect">
             <a:avLst/>
@@ -8797,9 +9773,9 @@
           <a:solidFill>
             <a:srgbClr val="FFFFFF"/>
           </a:solidFill>
-          <a:ln w="15240">
+          <a:ln w="13970">
             <a:solidFill>
-              <a:srgbClr val="CBD5E1"/>
+              <a:srgbClr val="112266"/>
             </a:solidFill>
           </a:ln>
         </p:spPr>
@@ -8833,8 +9809,8 @@
         </p:nvSpPr>
         <p:spPr>
           <a:xfrm>
-            <a:off x="502920" y="4782312"/>
-            <a:ext cx="1463040" cy="219456"/>
+            <a:off x="502920" y="4352544"/>
+            <a:ext cx="2926080" cy="219456"/>
           </a:xfrm>
           <a:prstGeom prst="roundRect">
             <a:avLst/>
@@ -8861,11 +9837,11 @@
           </a:fontRef>
         </p:style>
         <p:txBody>
-          <a:bodyPr rtlCol="0" anchor="ctr" wrap="none" lIns="73152" rIns="73152" tIns="0" bIns="0"/>
+          <a:bodyPr rtlCol="0" anchor="ctr" wrap="none" lIns="54864" rIns="54864" tIns="0" bIns="0"/>
           <a:lstStyle/>
           <a:p>
             <a:pPr algn="ctr">
-              <a:defRPr sz="950" b="1">
+              <a:defRPr sz="900" b="1">
                 <a:solidFill>
                   <a:srgbClr val="FFFFFF"/>
                 </a:solidFill>
@@ -8873,7 +9849,7 @@
               </a:defRPr>
             </a:pPr>
             <a:r>
-              <a:t>TECH STACK</a:t>
+              <a:t>TECH STACK (PRODUCTION ARCHITECTURE)</a:t>
             </a:r>
           </a:p>
         </p:txBody>
@@ -8886,8 +9862,8 @@
         </p:nvSpPr>
         <p:spPr>
           <a:xfrm>
-            <a:off x="502920" y="5029200"/>
-            <a:ext cx="5029200" cy="1005840"/>
+            <a:off x="438912" y="4626864"/>
+            <a:ext cx="1627632" cy="228600"/>
           </a:xfrm>
           <a:prstGeom prst="rect">
             <a:avLst/>
@@ -8895,213 +9871,28 @@
           <a:noFill/>
         </p:spPr>
         <p:txBody>
-          <a:bodyPr wrap="square" lIns="0" rIns="0" tIns="0" bIns="0">
+          <a:bodyPr wrap="none">
             <a:spAutoFit/>
           </a:bodyPr>
           <a:lstStyle/>
           <a:p>
             <a:pPr>
-              <a:spcBef>
-                <a:spcPts val="0"/>
-              </a:spcBef>
-            </a:pPr>
-            <a:r>
-              <a:rPr sz="800" b="1">
+              <a:defRPr sz="819" b="1">
                 <a:solidFill>
                   <a:srgbClr val="1A365D"/>
                 </a:solidFill>
                 <a:latin typeface="Arial"/>
-              </a:rPr>
-              <a:t>&gt; Frontend Client : </a:t>
-            </a:r>
-            <a:r>
-              <a:rPr sz="760">
-                <a:solidFill>
-                  <a:srgbClr val="222222"/>
-                </a:solidFill>
-                <a:latin typeface="Arial"/>
-              </a:rPr>
-              <a:t>Next.js 14 App Router, TypeScript, Tailwind CSS, Recharts (Vercel Edge)</a:t>
-            </a:r>
-          </a:p>
-          <a:p>
-            <a:pPr>
-              <a:spcBef>
-                <a:spcPts val="150"/>
-              </a:spcBef>
-            </a:pPr>
-            <a:r>
-              <a:rPr sz="800" b="1">
-                <a:solidFill>
-                  <a:srgbClr val="1A365D"/>
-                </a:solidFill>
-                <a:latin typeface="Arial"/>
-              </a:rPr>
-              <a:t>&gt; Backend Services : </a:t>
-            </a:r>
-            <a:r>
-              <a:rPr sz="760">
-                <a:solidFill>
-                  <a:srgbClr val="222222"/>
-                </a:solidFill>
-                <a:latin typeface="Arial"/>
-              </a:rPr>
-              <a:t>Python 3.10+, FastAPI (Modular Monolith), Pydantic v2, Uvicorn, 73 Endpoints (Render Cloud)</a:t>
-            </a:r>
-          </a:p>
-          <a:p>
-            <a:pPr>
-              <a:spcBef>
-                <a:spcPts val="150"/>
-              </a:spcBef>
-            </a:pPr>
-            <a:r>
-              <a:rPr sz="800" b="1">
-                <a:solidFill>
-                  <a:srgbClr val="1A365D"/>
-                </a:solidFill>
-                <a:latin typeface="Arial"/>
-              </a:rPr>
-              <a:t>&gt; Persistence &amp; RLS : </a:t>
-            </a:r>
-            <a:r>
-              <a:rPr sz="760">
-                <a:solidFill>
-                  <a:srgbClr val="222222"/>
-                </a:solidFill>
-                <a:latin typeface="Arial"/>
-              </a:rPr>
-              <a:t>Supabase Managed PostgreSQL 17.11 (20 Relational Tables, Row Level Security Active)</a:t>
-            </a:r>
-          </a:p>
-          <a:p>
-            <a:pPr>
-              <a:spcBef>
-                <a:spcPts val="150"/>
-              </a:spcBef>
-            </a:pPr>
-            <a:r>
-              <a:rPr sz="800" b="1">
-                <a:solidFill>
-                  <a:srgbClr val="1A365D"/>
-                </a:solidFill>
-                <a:latin typeface="Arial"/>
-              </a:rPr>
-              <a:t>&gt; Cryptography : </a:t>
-            </a:r>
-            <a:r>
-              <a:rPr sz="760">
-                <a:solidFill>
-                  <a:srgbClr val="222222"/>
-                </a:solidFill>
-                <a:latin typeface="Arial"/>
-              </a:rPr>
-              <a:t>Ed25519 (RFC 8032 Asymmetric Keys), Keyed HMAC-SHA256, Sequential SHA-256 Audit Chaining</a:t>
-            </a:r>
-          </a:p>
-        </p:txBody>
-      </p:sp>
-      <p:sp>
-        <p:nvSpPr>
-          <p:cNvPr id="17423" name="Rounded Rectangle 17422"/>
-          <p:cNvSpPr/>
-          <p:nvPr/>
-        </p:nvSpPr>
-        <p:spPr>
-          <a:xfrm>
-            <a:off x="5852160" y="4892040"/>
-            <a:ext cx="5943600" cy="1234440"/>
-          </a:xfrm>
-          <a:prstGeom prst="roundRect">
-            <a:avLst/>
-          </a:prstGeom>
-          <a:solidFill>
-            <a:srgbClr val="FFFFFF"/>
-          </a:solidFill>
-          <a:ln w="15240">
-            <a:solidFill>
-              <a:srgbClr val="CBD5E1"/>
-            </a:solidFill>
-          </a:ln>
-        </p:spPr>
-        <p:style>
-          <a:lnRef idx="1">
-            <a:schemeClr val="accent1"/>
-          </a:lnRef>
-          <a:fillRef idx="3">
-            <a:schemeClr val="accent1"/>
-          </a:fillRef>
-          <a:effectRef idx="2">
-            <a:schemeClr val="accent1"/>
-          </a:effectRef>
-          <a:fontRef idx="minor">
-            <a:schemeClr val="lt1"/>
-          </a:fontRef>
-        </p:style>
-        <p:txBody>
-          <a:bodyPr rtlCol="0" anchor="ctr"/>
-          <a:lstStyle/>
-          <a:p>
-            <a:pPr algn="ctr"/>
-          </a:p>
-        </p:txBody>
-      </p:sp>
-      <p:sp>
-        <p:nvSpPr>
-          <p:cNvPr id="17424" name="Rounded Rectangle 17423"/>
-          <p:cNvSpPr/>
-          <p:nvPr/>
-        </p:nvSpPr>
-        <p:spPr>
-          <a:xfrm>
-            <a:off x="5989320" y="4782312"/>
-            <a:ext cx="2926080" cy="219456"/>
-          </a:xfrm>
-          <a:prstGeom prst="roundRect">
-            <a:avLst/>
-          </a:prstGeom>
-          <a:solidFill>
-            <a:srgbClr val="008C6E"/>
-          </a:solidFill>
-          <a:ln>
-            <a:noFill/>
-          </a:ln>
-        </p:spPr>
-        <p:style>
-          <a:lnRef idx="1">
-            <a:schemeClr val="accent1"/>
-          </a:lnRef>
-          <a:fillRef idx="3">
-            <a:schemeClr val="accent1"/>
-          </a:fillRef>
-          <a:effectRef idx="2">
-            <a:schemeClr val="accent1"/>
-          </a:effectRef>
-          <a:fontRef idx="minor">
-            <a:schemeClr val="lt1"/>
-          </a:fontRef>
-        </p:style>
-        <p:txBody>
-          <a:bodyPr rtlCol="0" anchor="ctr" wrap="none" lIns="73152" rIns="73152" tIns="0" bIns="0"/>
-          <a:lstStyle/>
-          <a:p>
-            <a:pPr algn="ctr">
-              <a:defRPr sz="950" b="1">
-                <a:solidFill>
-                  <a:srgbClr val="FFFFFF"/>
-                </a:solidFill>
-                <a:latin typeface="Arial"/>
               </a:defRPr>
             </a:pPr>
             <a:r>
-              <a:t>PROTOTYPE EVIDENCE: INGESTION DESK</a:t>
+              <a:t>Frontend Client</a:t>
             </a:r>
           </a:p>
         </p:txBody>
       </p:sp>
       <p:pic>
         <p:nvPicPr>
-          <p:cNvPr id="17425" name="Picture 17424" descr="slide_3_Picture 3.png"/>
+          <p:cNvPr id="17423" name="Picture 17422" descr="nextjs.png"/>
           <p:cNvPicPr>
             <a:picLocks noChangeAspect="1"/>
           </p:cNvPicPr>
@@ -9115,24 +9906,96 @@
         </p:blipFill>
         <p:spPr>
           <a:xfrm>
-            <a:off x="5989320" y="5029200"/>
-            <a:ext cx="2743200" cy="1005840"/>
+            <a:off x="438912" y="4873752"/>
+            <a:ext cx="292608" cy="292608"/>
           </a:xfrm>
           <a:prstGeom prst="rect">
             <a:avLst/>
           </a:prstGeom>
         </p:spPr>
       </p:pic>
-      <p:sp>
-        <p:nvSpPr>
-          <p:cNvPr id="17426" name="TextBox 17425"/>
+      <p:pic>
+        <p:nvPicPr>
+          <p:cNvPr id="17424" name="Picture 17423" descr="react.png"/>
+          <p:cNvPicPr>
+            <a:picLocks noChangeAspect="1"/>
+          </p:cNvPicPr>
+          <p:nvPr/>
+        </p:nvPicPr>
+        <p:blipFill>
+          <a:blip r:embed="rId5"/>
+          <a:stretch>
+            <a:fillRect/>
+          </a:stretch>
+        </p:blipFill>
+        <p:spPr>
+          <a:xfrm>
+            <a:off x="786384" y="4873752"/>
+            <a:ext cx="292608" cy="292608"/>
+          </a:xfrm>
+          <a:prstGeom prst="rect">
+            <a:avLst/>
+          </a:prstGeom>
+        </p:spPr>
+      </p:pic>
+      <p:pic>
+        <p:nvPicPr>
+          <p:cNvPr id="17425" name="Picture 17424" descr="typescript.png"/>
+          <p:cNvPicPr>
+            <a:picLocks noChangeAspect="1"/>
+          </p:cNvPicPr>
+          <p:nvPr/>
+        </p:nvPicPr>
+        <p:blipFill>
+          <a:blip r:embed="rId6"/>
+          <a:stretch>
+            <a:fillRect/>
+          </a:stretch>
+        </p:blipFill>
+        <p:spPr>
+          <a:xfrm>
+            <a:off x="1133856" y="4873752"/>
+            <a:ext cx="292608" cy="292608"/>
+          </a:xfrm>
+          <a:prstGeom prst="rect">
+            <a:avLst/>
+          </a:prstGeom>
+        </p:spPr>
+      </p:pic>
+      <p:pic>
+        <p:nvPicPr>
+          <p:cNvPr id="17426" name="Picture 17425" descr="tailwindcss.png"/>
+          <p:cNvPicPr>
+            <a:picLocks noChangeAspect="1"/>
+          </p:cNvPicPr>
+          <p:nvPr/>
+        </p:nvPicPr>
+        <p:blipFill>
+          <a:blip r:embed="rId7"/>
+          <a:stretch>
+            <a:fillRect/>
+          </a:stretch>
+        </p:blipFill>
+        <p:spPr>
+          <a:xfrm>
+            <a:off x="1481328" y="4873752"/>
+            <a:ext cx="292608" cy="292608"/>
+          </a:xfrm>
+          <a:prstGeom prst="rect">
+            <a:avLst/>
+          </a:prstGeom>
+        </p:spPr>
+      </p:pic>
+      <p:sp>
+        <p:nvSpPr>
+          <p:cNvPr id="17427" name="TextBox 17426"/>
           <p:cNvSpPr txBox="1"/>
           <p:nvPr/>
         </p:nvSpPr>
         <p:spPr>
           <a:xfrm>
-            <a:off x="8823960" y="5029200"/>
-            <a:ext cx="2834640" cy="1005840"/>
+            <a:off x="438912" y="5239512"/>
+            <a:ext cx="1627632" cy="960120"/>
           </a:xfrm>
           <a:prstGeom prst="rect">
             <a:avLst/>
@@ -9140,13 +10003,13 @@
           <a:noFill/>
         </p:spPr>
         <p:txBody>
-          <a:bodyPr wrap="square">
+          <a:bodyPr wrap="square" lIns="0" rIns="0" tIns="0" bIns="0">
             <a:spAutoFit/>
           </a:bodyPr>
           <a:lstStyle/>
           <a:p>
             <a:pPr>
-              <a:defRPr sz="780">
+              <a:defRPr sz="700">
                 <a:solidFill>
                   <a:srgbClr val="222222"/>
                 </a:solidFill>
@@ -9154,7 +10017,637 @@
               </a:defRPr>
             </a:pPr>
             <a:r>
-              <a:t>Smart Ingestion Desk: Sub-50ms automated schema mapping, pre-flight validation status, row findings ledger, and atomic batch commitment.</a:t>
+              <a:t>Next.js 14, React 18, TypeScript 5, Tailwind CSS</a:t>
+            </a:r>
+          </a:p>
+        </p:txBody>
+      </p:sp>
+      <p:sp>
+        <p:nvSpPr>
+          <p:cNvPr id="17428" name="TextBox 17427"/>
+          <p:cNvSpPr txBox="1"/>
+          <p:nvPr/>
+        </p:nvSpPr>
+        <p:spPr>
+          <a:xfrm>
+            <a:off x="2121408" y="4626864"/>
+            <a:ext cx="1627632" cy="228600"/>
+          </a:xfrm>
+          <a:prstGeom prst="rect">
+            <a:avLst/>
+          </a:prstGeom>
+          <a:noFill/>
+        </p:spPr>
+        <p:txBody>
+          <a:bodyPr wrap="none">
+            <a:spAutoFit/>
+          </a:bodyPr>
+          <a:lstStyle/>
+          <a:p>
+            <a:pPr>
+              <a:defRPr sz="819" b="1">
+                <a:solidFill>
+                  <a:srgbClr val="1A365D"/>
+                </a:solidFill>
+                <a:latin typeface="Arial"/>
+              </a:defRPr>
+            </a:pPr>
+            <a:r>
+              <a:t>Backend Services</a:t>
+            </a:r>
+          </a:p>
+        </p:txBody>
+      </p:sp>
+      <p:pic>
+        <p:nvPicPr>
+          <p:cNvPr id="17429" name="Picture 17428" descr="python.png"/>
+          <p:cNvPicPr>
+            <a:picLocks noChangeAspect="1"/>
+          </p:cNvPicPr>
+          <p:nvPr/>
+        </p:nvPicPr>
+        <p:blipFill>
+          <a:blip r:embed="rId8"/>
+          <a:stretch>
+            <a:fillRect/>
+          </a:stretch>
+        </p:blipFill>
+        <p:spPr>
+          <a:xfrm>
+            <a:off x="2121408" y="4873752"/>
+            <a:ext cx="292608" cy="292608"/>
+          </a:xfrm>
+          <a:prstGeom prst="rect">
+            <a:avLst/>
+          </a:prstGeom>
+        </p:spPr>
+      </p:pic>
+      <p:pic>
+        <p:nvPicPr>
+          <p:cNvPr id="17430" name="Picture 17429" descr="fastapi.png"/>
+          <p:cNvPicPr>
+            <a:picLocks noChangeAspect="1"/>
+          </p:cNvPicPr>
+          <p:nvPr/>
+        </p:nvPicPr>
+        <p:blipFill>
+          <a:blip r:embed="rId9"/>
+          <a:stretch>
+            <a:fillRect/>
+          </a:stretch>
+        </p:blipFill>
+        <p:spPr>
+          <a:xfrm>
+            <a:off x="2468880" y="4873752"/>
+            <a:ext cx="292608" cy="292608"/>
+          </a:xfrm>
+          <a:prstGeom prst="rect">
+            <a:avLst/>
+          </a:prstGeom>
+        </p:spPr>
+      </p:pic>
+      <p:pic>
+        <p:nvPicPr>
+          <p:cNvPr id="17431" name="Picture 17430" descr="nodejs.png"/>
+          <p:cNvPicPr>
+            <a:picLocks noChangeAspect="1"/>
+          </p:cNvPicPr>
+          <p:nvPr/>
+        </p:nvPicPr>
+        <p:blipFill>
+          <a:blip r:embed="rId10"/>
+          <a:stretch>
+            <a:fillRect/>
+          </a:stretch>
+        </p:blipFill>
+        <p:spPr>
+          <a:xfrm>
+            <a:off x="2816352" y="4873752"/>
+            <a:ext cx="292608" cy="292608"/>
+          </a:xfrm>
+          <a:prstGeom prst="rect">
+            <a:avLst/>
+          </a:prstGeom>
+        </p:spPr>
+      </p:pic>
+      <p:sp>
+        <p:nvSpPr>
+          <p:cNvPr id="17432" name="TextBox 17431"/>
+          <p:cNvSpPr txBox="1"/>
+          <p:nvPr/>
+        </p:nvSpPr>
+        <p:spPr>
+          <a:xfrm>
+            <a:off x="2121408" y="5239512"/>
+            <a:ext cx="1627632" cy="960120"/>
+          </a:xfrm>
+          <a:prstGeom prst="rect">
+            <a:avLst/>
+          </a:prstGeom>
+          <a:noFill/>
+        </p:spPr>
+        <p:txBody>
+          <a:bodyPr wrap="square" lIns="0" rIns="0" tIns="0" bIns="0">
+            <a:spAutoFit/>
+          </a:bodyPr>
+          <a:lstStyle/>
+          <a:p>
+            <a:pPr>
+              <a:defRPr sz="700">
+                <a:solidFill>
+                  <a:srgbClr val="222222"/>
+                </a:solidFill>
+                <a:latin typeface="Arial"/>
+              </a:defRPr>
+            </a:pPr>
+            <a:r>
+              <a:t>Python 3.10+, FastAPI Monolith, Pydantic v2, Uvicorn</a:t>
+            </a:r>
+          </a:p>
+        </p:txBody>
+      </p:sp>
+      <p:sp>
+        <p:nvSpPr>
+          <p:cNvPr id="17433" name="TextBox 17432"/>
+          <p:cNvSpPr txBox="1"/>
+          <p:nvPr/>
+        </p:nvSpPr>
+        <p:spPr>
+          <a:xfrm>
+            <a:off x="3803904" y="4626864"/>
+            <a:ext cx="1627632" cy="228600"/>
+          </a:xfrm>
+          <a:prstGeom prst="rect">
+            <a:avLst/>
+          </a:prstGeom>
+          <a:noFill/>
+        </p:spPr>
+        <p:txBody>
+          <a:bodyPr wrap="none">
+            <a:spAutoFit/>
+          </a:bodyPr>
+          <a:lstStyle/>
+          <a:p>
+            <a:pPr>
+              <a:defRPr sz="819" b="1">
+                <a:solidFill>
+                  <a:srgbClr val="1A365D"/>
+                </a:solidFill>
+                <a:latin typeface="Arial"/>
+              </a:defRPr>
+            </a:pPr>
+            <a:r>
+              <a:t>Persistence &amp; Cloud</a:t>
+            </a:r>
+          </a:p>
+        </p:txBody>
+      </p:sp>
+      <p:pic>
+        <p:nvPicPr>
+          <p:cNvPr id="17434" name="Picture 17433" descr="postgresql.png"/>
+          <p:cNvPicPr>
+            <a:picLocks noChangeAspect="1"/>
+          </p:cNvPicPr>
+          <p:nvPr/>
+        </p:nvPicPr>
+        <p:blipFill>
+          <a:blip r:embed="rId11"/>
+          <a:stretch>
+            <a:fillRect/>
+          </a:stretch>
+        </p:blipFill>
+        <p:spPr>
+          <a:xfrm>
+            <a:off x="3803904" y="4873752"/>
+            <a:ext cx="292608" cy="292608"/>
+          </a:xfrm>
+          <a:prstGeom prst="rect">
+            <a:avLst/>
+          </a:prstGeom>
+        </p:spPr>
+      </p:pic>
+      <p:pic>
+        <p:nvPicPr>
+          <p:cNvPr id="17435" name="Picture 17434" descr="supabase.png"/>
+          <p:cNvPicPr>
+            <a:picLocks noChangeAspect="1"/>
+          </p:cNvPicPr>
+          <p:nvPr/>
+        </p:nvPicPr>
+        <p:blipFill>
+          <a:blip r:embed="rId12"/>
+          <a:stretch>
+            <a:fillRect/>
+          </a:stretch>
+        </p:blipFill>
+        <p:spPr>
+          <a:xfrm>
+            <a:off x="4151376" y="4873752"/>
+            <a:ext cx="292608" cy="292608"/>
+          </a:xfrm>
+          <a:prstGeom prst="rect">
+            <a:avLst/>
+          </a:prstGeom>
+        </p:spPr>
+      </p:pic>
+      <p:pic>
+        <p:nvPicPr>
+          <p:cNvPr id="17436" name="Picture 17435" descr="render.png"/>
+          <p:cNvPicPr>
+            <a:picLocks noChangeAspect="1"/>
+          </p:cNvPicPr>
+          <p:nvPr/>
+        </p:nvPicPr>
+        <p:blipFill>
+          <a:blip r:embed="rId13"/>
+          <a:stretch>
+            <a:fillRect/>
+          </a:stretch>
+        </p:blipFill>
+        <p:spPr>
+          <a:xfrm>
+            <a:off x="4498848" y="4873752"/>
+            <a:ext cx="292608" cy="292608"/>
+          </a:xfrm>
+          <a:prstGeom prst="rect">
+            <a:avLst/>
+          </a:prstGeom>
+        </p:spPr>
+      </p:pic>
+      <p:pic>
+        <p:nvPicPr>
+          <p:cNvPr id="17437" name="Picture 17436" descr="vercel.png"/>
+          <p:cNvPicPr>
+            <a:picLocks noChangeAspect="1"/>
+          </p:cNvPicPr>
+          <p:nvPr/>
+        </p:nvPicPr>
+        <p:blipFill>
+          <a:blip r:embed="rId14"/>
+          <a:stretch>
+            <a:fillRect/>
+          </a:stretch>
+        </p:blipFill>
+        <p:spPr>
+          <a:xfrm>
+            <a:off x="4846320" y="4873752"/>
+            <a:ext cx="292608" cy="292608"/>
+          </a:xfrm>
+          <a:prstGeom prst="rect">
+            <a:avLst/>
+          </a:prstGeom>
+        </p:spPr>
+      </p:pic>
+      <p:sp>
+        <p:nvSpPr>
+          <p:cNvPr id="17438" name="TextBox 17437"/>
+          <p:cNvSpPr txBox="1"/>
+          <p:nvPr/>
+        </p:nvSpPr>
+        <p:spPr>
+          <a:xfrm>
+            <a:off x="3803904" y="5239512"/>
+            <a:ext cx="1627632" cy="960120"/>
+          </a:xfrm>
+          <a:prstGeom prst="rect">
+            <a:avLst/>
+          </a:prstGeom>
+          <a:noFill/>
+        </p:spPr>
+        <p:txBody>
+          <a:bodyPr wrap="square" lIns="0" rIns="0" tIns="0" bIns="0">
+            <a:spAutoFit/>
+          </a:bodyPr>
+          <a:lstStyle/>
+          <a:p>
+            <a:pPr>
+              <a:defRPr sz="700">
+                <a:solidFill>
+                  <a:srgbClr val="222222"/>
+                </a:solidFill>
+                <a:latin typeface="Arial"/>
+              </a:defRPr>
+            </a:pPr>
+            <a:r>
+              <a:t>PostgreSQL 17.11 (20 RLS Tables), Supabase, Vercel Edge, Render</a:t>
+            </a:r>
+          </a:p>
+        </p:txBody>
+      </p:sp>
+      <p:sp>
+        <p:nvSpPr>
+          <p:cNvPr id="17439" name="TextBox 17438"/>
+          <p:cNvSpPr txBox="1"/>
+          <p:nvPr/>
+        </p:nvSpPr>
+        <p:spPr>
+          <a:xfrm>
+            <a:off x="5486400" y="4626864"/>
+            <a:ext cx="1627632" cy="228600"/>
+          </a:xfrm>
+          <a:prstGeom prst="rect">
+            <a:avLst/>
+          </a:prstGeom>
+          <a:noFill/>
+        </p:spPr>
+        <p:txBody>
+          <a:bodyPr wrap="none">
+            <a:spAutoFit/>
+          </a:bodyPr>
+          <a:lstStyle/>
+          <a:p>
+            <a:pPr>
+              <a:defRPr sz="819" b="1">
+                <a:solidFill>
+                  <a:srgbClr val="1A365D"/>
+                </a:solidFill>
+                <a:latin typeface="Arial"/>
+              </a:defRPr>
+            </a:pPr>
+            <a:r>
+              <a:t>Trust &amp; DevOps</a:t>
+            </a:r>
+          </a:p>
+        </p:txBody>
+      </p:sp>
+      <p:pic>
+        <p:nvPicPr>
+          <p:cNvPr id="17440" name="Picture 17439" descr="shield.png"/>
+          <p:cNvPicPr>
+            <a:picLocks noChangeAspect="1"/>
+          </p:cNvPicPr>
+          <p:nvPr/>
+        </p:nvPicPr>
+        <p:blipFill>
+          <a:blip r:embed="rId15"/>
+          <a:stretch>
+            <a:fillRect/>
+          </a:stretch>
+        </p:blipFill>
+        <p:spPr>
+          <a:xfrm>
+            <a:off x="5486400" y="4873752"/>
+            <a:ext cx="292608" cy="292608"/>
+          </a:xfrm>
+          <a:prstGeom prst="rect">
+            <a:avLst/>
+          </a:prstGeom>
+        </p:spPr>
+      </p:pic>
+      <p:pic>
+        <p:nvPicPr>
+          <p:cNvPr id="17441" name="Picture 17440" descr="docker.png"/>
+          <p:cNvPicPr>
+            <a:picLocks noChangeAspect="1"/>
+          </p:cNvPicPr>
+          <p:nvPr/>
+        </p:nvPicPr>
+        <p:blipFill>
+          <a:blip r:embed="rId16"/>
+          <a:stretch>
+            <a:fillRect/>
+          </a:stretch>
+        </p:blipFill>
+        <p:spPr>
+          <a:xfrm>
+            <a:off x="5833872" y="4873752"/>
+            <a:ext cx="292608" cy="292608"/>
+          </a:xfrm>
+          <a:prstGeom prst="rect">
+            <a:avLst/>
+          </a:prstGeom>
+        </p:spPr>
+      </p:pic>
+      <p:pic>
+        <p:nvPicPr>
+          <p:cNvPr id="17442" name="Picture 17441" descr="github.png"/>
+          <p:cNvPicPr>
+            <a:picLocks noChangeAspect="1"/>
+          </p:cNvPicPr>
+          <p:nvPr/>
+        </p:nvPicPr>
+        <p:blipFill>
+          <a:blip r:embed="rId17"/>
+          <a:stretch>
+            <a:fillRect/>
+          </a:stretch>
+        </p:blipFill>
+        <p:spPr>
+          <a:xfrm>
+            <a:off x="6181344" y="4873752"/>
+            <a:ext cx="292608" cy="292608"/>
+          </a:xfrm>
+          <a:prstGeom prst="rect">
+            <a:avLst/>
+          </a:prstGeom>
+        </p:spPr>
+      </p:pic>
+      <p:sp>
+        <p:nvSpPr>
+          <p:cNvPr id="17443" name="TextBox 17442"/>
+          <p:cNvSpPr txBox="1"/>
+          <p:nvPr/>
+        </p:nvSpPr>
+        <p:spPr>
+          <a:xfrm>
+            <a:off x="5486400" y="5239512"/>
+            <a:ext cx="1627632" cy="960120"/>
+          </a:xfrm>
+          <a:prstGeom prst="rect">
+            <a:avLst/>
+          </a:prstGeom>
+          <a:noFill/>
+        </p:spPr>
+        <p:txBody>
+          <a:bodyPr wrap="square" lIns="0" rIns="0" tIns="0" bIns="0">
+            <a:spAutoFit/>
+          </a:bodyPr>
+          <a:lstStyle/>
+          <a:p>
+            <a:pPr>
+              <a:defRPr sz="700">
+                <a:solidFill>
+                  <a:srgbClr val="222222"/>
+                </a:solidFill>
+                <a:latin typeface="Arial"/>
+              </a:defRPr>
+            </a:pPr>
+            <a:r>
+              <a:t>Ed25519 Cryptography, SHA-256 Ledger, Docker, GitHub CI/CD</a:t>
+            </a:r>
+          </a:p>
+        </p:txBody>
+      </p:sp>
+      <p:sp>
+        <p:nvSpPr>
+          <p:cNvPr id="17444" name="Rounded Rectangle 17443"/>
+          <p:cNvSpPr/>
+          <p:nvPr/>
+        </p:nvSpPr>
+        <p:spPr>
+          <a:xfrm>
+            <a:off x="7406640" y="4462272"/>
+            <a:ext cx="4389120" cy="1810512"/>
+          </a:xfrm>
+          <a:prstGeom prst="roundRect">
+            <a:avLst/>
+          </a:prstGeom>
+          <a:solidFill>
+            <a:srgbClr val="FFFFFF"/>
+          </a:solidFill>
+          <a:ln w="13970">
+            <a:solidFill>
+              <a:srgbClr val="008C6E"/>
+            </a:solidFill>
+          </a:ln>
+        </p:spPr>
+        <p:style>
+          <a:lnRef idx="1">
+            <a:schemeClr val="accent1"/>
+          </a:lnRef>
+          <a:fillRef idx="3">
+            <a:schemeClr val="accent1"/>
+          </a:fillRef>
+          <a:effectRef idx="2">
+            <a:schemeClr val="accent1"/>
+          </a:effectRef>
+          <a:fontRef idx="minor">
+            <a:schemeClr val="lt1"/>
+          </a:fontRef>
+        </p:style>
+        <p:txBody>
+          <a:bodyPr rtlCol="0" anchor="ctr"/>
+          <a:lstStyle/>
+          <a:p>
+            <a:pPr algn="ctr"/>
+          </a:p>
+        </p:txBody>
+      </p:sp>
+      <p:sp>
+        <p:nvSpPr>
+          <p:cNvPr id="17445" name="Rounded Rectangle 17444"/>
+          <p:cNvSpPr/>
+          <p:nvPr/>
+        </p:nvSpPr>
+        <p:spPr>
+          <a:xfrm>
+            <a:off x="7543800" y="4352544"/>
+            <a:ext cx="2926080" cy="219456"/>
+          </a:xfrm>
+          <a:prstGeom prst="roundRect">
+            <a:avLst/>
+          </a:prstGeom>
+          <a:solidFill>
+            <a:srgbClr val="008C6E"/>
+          </a:solidFill>
+          <a:ln>
+            <a:noFill/>
+          </a:ln>
+        </p:spPr>
+        <p:style>
+          <a:lnRef idx="1">
+            <a:schemeClr val="accent1"/>
+          </a:lnRef>
+          <a:fillRef idx="3">
+            <a:schemeClr val="accent1"/>
+          </a:fillRef>
+          <a:effectRef idx="2">
+            <a:schemeClr val="accent1"/>
+          </a:effectRef>
+          <a:fontRef idx="minor">
+            <a:schemeClr val="lt1"/>
+          </a:fontRef>
+        </p:style>
+        <p:txBody>
+          <a:bodyPr rtlCol="0" anchor="ctr" wrap="none" lIns="54864" rIns="54864" tIns="0" bIns="0"/>
+          <a:lstStyle/>
+          <a:p>
+            <a:pPr algn="ctr">
+              <a:defRPr sz="900" b="1">
+                <a:solidFill>
+                  <a:srgbClr val="FFFFFF"/>
+                </a:solidFill>
+                <a:latin typeface="Arial"/>
+              </a:defRPr>
+            </a:pPr>
+            <a:r>
+              <a:t>PROTOTYPE EVIDENCE: INGESTION DESK</a:t>
+            </a:r>
+          </a:p>
+        </p:txBody>
+      </p:sp>
+      <p:pic>
+        <p:nvPicPr>
+          <p:cNvPr id="17446" name="Picture 17445" descr="slide_3_Picture 3.png"/>
+          <p:cNvPicPr>
+            <a:picLocks noChangeAspect="1"/>
+          </p:cNvPicPr>
+          <p:nvPr/>
+        </p:nvPicPr>
+        <p:blipFill>
+          <a:blip r:embed="rId18"/>
+          <a:stretch>
+            <a:fillRect/>
+          </a:stretch>
+        </p:blipFill>
+        <p:spPr>
+          <a:xfrm>
+            <a:off x="7516368" y="4645152"/>
+            <a:ext cx="2423160" cy="1536192"/>
+          </a:xfrm>
+          <a:prstGeom prst="rect">
+            <a:avLst/>
+          </a:prstGeom>
+        </p:spPr>
+      </p:pic>
+      <p:sp>
+        <p:nvSpPr>
+          <p:cNvPr id="17447" name="TextBox 17446"/>
+          <p:cNvSpPr txBox="1"/>
+          <p:nvPr/>
+        </p:nvSpPr>
+        <p:spPr>
+          <a:xfrm>
+            <a:off x="10012680" y="4645152"/>
+            <a:ext cx="1691640" cy="1536192"/>
+          </a:xfrm>
+          <a:prstGeom prst="rect">
+            <a:avLst/>
+          </a:prstGeom>
+          <a:noFill/>
+        </p:spPr>
+        <p:txBody>
+          <a:bodyPr wrap="square" lIns="0" rIns="0" tIns="0" bIns="0">
+            <a:spAutoFit/>
+          </a:bodyPr>
+          <a:lstStyle/>
+          <a:p>
+            <a:pPr>
+              <a:defRPr sz="800" b="1">
+                <a:solidFill>
+                  <a:srgbClr val="112266"/>
+                </a:solidFill>
+                <a:latin typeface="Arial"/>
+              </a:defRPr>
+            </a:pPr>
+            <a:r>
+              <a:t>Smart Ingestion Desk:</a:t>
+            </a:r>
+          </a:p>
+          <a:p>
+            <a:pPr>
+              <a:spcBef>
+                <a:spcPts val="200"/>
+              </a:spcBef>
+              <a:defRPr sz="720">
+                <a:solidFill>
+                  <a:srgbClr val="222222"/>
+                </a:solidFill>
+                <a:latin typeface="Arial"/>
+              </a:defRPr>
+            </a:pPr>
+            <a:r>
+              <a:t>Sub-50ms automated schema mapping, pre-flight validation status, quarantine sandbox, and atomic batch commitment.</a:t>
             </a:r>
           </a:p>
         </p:txBody>
@@ -9275,8 +10768,8 @@
         </p:nvSpPr>
         <p:spPr>
           <a:xfrm>
-            <a:off x="1691640" y="137160"/>
-            <a:ext cx="8092440" cy="822960"/>
+            <a:off x="1691640" y="109728"/>
+            <a:ext cx="8092440" cy="777240"/>
           </a:xfrm>
         </p:spPr>
         <p:txBody>
@@ -9300,7 +10793,7 @@
               <a:spcBef>
                 <a:spcPts val="200"/>
               </a:spcBef>
-              <a:defRPr sz="1000" b="1">
+              <a:defRPr sz="950" b="1">
                 <a:solidFill>
                   <a:srgbClr val="008C6E"/>
                 </a:solidFill>
@@ -9325,8 +10818,8 @@
         </p:nvSpPr>
         <p:spPr>
           <a:xfrm>
-            <a:off x="10058400" y="6382512"/>
-            <a:ext cx="1645920" cy="365760"/>
+            <a:off x="10058400" y="6419088"/>
+            <a:ext cx="1645920" cy="329184"/>
           </a:xfrm>
         </p:spPr>
         <p:txBody>
@@ -9348,7 +10841,7 @@
               <a:buFontTx/>
               <a:buNone/>
               <a:tabLst/>
-              <a:defRPr sz="1000" b="1">
+              <a:defRPr sz="950" b="1">
                 <a:solidFill>
                   <a:srgbClr val="FFFFFF"/>
                 </a:solidFill>
@@ -9387,8 +10880,8 @@
         </p:nvSpPr>
         <p:spPr>
           <a:xfrm>
-            <a:off x="2743200" y="6382512"/>
-            <a:ext cx="6702552" cy="365760"/>
+            <a:off x="2743200" y="6419088"/>
+            <a:ext cx="6702552" cy="329184"/>
           </a:xfrm>
         </p:spPr>
         <p:txBody>
@@ -9410,7 +10903,7 @@
               <a:buFontTx/>
               <a:buNone/>
               <a:tabLst/>
-              <a:defRPr sz="1000">
+              <a:defRPr sz="950">
                 <a:solidFill>
                   <a:srgbClr val="FFFFFF"/>
                 </a:solidFill>
@@ -9454,8 +10947,8 @@
         </p:nvSpPr>
         <p:spPr>
           <a:xfrm>
-            <a:off x="274320" y="164592"/>
-            <a:ext cx="1371600" cy="685800"/>
+            <a:off x="274320" y="137160"/>
+            <a:ext cx="1325880" cy="658368"/>
           </a:xfrm>
           <a:prstGeom prst="ellipse">
             <a:avLst/>
@@ -9532,8 +11025,8 @@
         </p:nvSpPr>
         <p:spPr>
           <a:xfrm>
-            <a:off x="365760" y="1097280"/>
-            <a:ext cx="5623560" cy="2423160"/>
+            <a:off x="365760" y="1051560"/>
+            <a:ext cx="5623560" cy="2148840"/>
           </a:xfrm>
           <a:prstGeom prst="roundRect">
             <a:avLst/>
@@ -9541,7 +11034,7 @@
           <a:solidFill>
             <a:srgbClr val="FFFFFF"/>
           </a:solidFill>
-          <a:ln w="15240">
+          <a:ln w="13970">
             <a:solidFill>
               <a:srgbClr val="1A56DB"/>
             </a:solidFill>
@@ -9577,8 +11070,8 @@
         </p:nvSpPr>
         <p:spPr>
           <a:xfrm>
-            <a:off x="502920" y="987552"/>
-            <a:ext cx="1645920" cy="237744"/>
+            <a:off x="502920" y="941832"/>
+            <a:ext cx="1645920" cy="219456"/>
           </a:xfrm>
           <a:prstGeom prst="roundRect">
             <a:avLst/>
@@ -9605,11 +11098,11 @@
           </a:fontRef>
         </p:style>
         <p:txBody>
-          <a:bodyPr rtlCol="0" anchor="ctr" wrap="none" lIns="73152" rIns="73152" tIns="0" bIns="0"/>
+          <a:bodyPr rtlCol="0" anchor="ctr" wrap="none" lIns="54864" rIns="54864" tIns="0" bIns="0"/>
           <a:lstStyle/>
           <a:p>
             <a:pPr algn="ctr">
-              <a:defRPr sz="950" b="1">
+              <a:defRPr sz="900" b="1">
                 <a:solidFill>
                   <a:srgbClr val="FFFFFF"/>
                 </a:solidFill>
@@ -9630,8 +11123,8 @@
         </p:nvSpPr>
         <p:spPr>
           <a:xfrm>
-            <a:off x="502920" y="1261872"/>
-            <a:ext cx="5349240" cy="2148840"/>
+            <a:off x="502920" y="1188720"/>
+            <a:ext cx="5349240" cy="1920240"/>
           </a:xfrm>
           <a:prstGeom prst="rect">
             <a:avLst/>
@@ -9650,7 +11143,7 @@
               </a:spcBef>
             </a:pPr>
             <a:r>
-              <a:rPr sz="850" b="1">
+              <a:rPr sz="819" b="1">
                 <a:solidFill>
                   <a:srgbClr val="112266"/>
                 </a:solidFill>
@@ -9659,7 +11152,7 @@
               <a:t>&gt; Technical : </a:t>
             </a:r>
             <a:r>
-              <a:rPr sz="800">
+              <a:rPr sz="780">
                 <a:solidFill>
                   <a:srgbClr val="222222"/>
                 </a:solidFill>
@@ -9668,7 +11161,7 @@
               <a:t>Next.js 14, FastAPI, Supabase PostgreSQL 17.11 (20 tables, RLS active). 66/66 automated tests passing across 14 test suites.</a:t>
             </a:r>
             <a:r>
-              <a:rPr sz="800" b="1">
+              <a:rPr sz="780" b="1">
                 <a:solidFill>
                   <a:srgbClr val="1A56DB"/>
                 </a:solidFill>
@@ -9681,11 +11174,11 @@
           <a:p>
             <a:pPr>
               <a:spcBef>
-                <a:spcPts val="350"/>
+                <a:spcPts val="300"/>
               </a:spcBef>
             </a:pPr>
             <a:r>
-              <a:rPr sz="850" b="1">
+              <a:rPr sz="819" b="1">
                 <a:solidFill>
                   <a:srgbClr val="112266"/>
                 </a:solidFill>
@@ -9694,7 +11187,7 @@
               <a:t>&gt; Innovation : </a:t>
             </a:r>
             <a:r>
-              <a:rPr sz="800">
+              <a:rPr sz="780">
                 <a:solidFill>
                   <a:srgbClr val="222222"/>
                 </a:solidFill>
@@ -9706,11 +11199,11 @@
           <a:p>
             <a:pPr>
               <a:spcBef>
-                <a:spcPts val="350"/>
+                <a:spcPts val="300"/>
               </a:spcBef>
             </a:pPr>
             <a:r>
-              <a:rPr sz="850" b="1">
+              <a:rPr sz="819" b="1">
                 <a:solidFill>
                   <a:srgbClr val="112266"/>
                 </a:solidFill>
@@ -9719,7 +11212,7 @@
               <a:t>&gt; Operational : </a:t>
             </a:r>
             <a:r>
-              <a:rPr sz="800">
+              <a:rPr sz="780">
                 <a:solidFill>
                   <a:srgbClr val="222222"/>
                 </a:solidFill>
@@ -9731,11 +11224,11 @@
           <a:p>
             <a:pPr>
               <a:spcBef>
-                <a:spcPts val="350"/>
+                <a:spcPts val="300"/>
               </a:spcBef>
             </a:pPr>
             <a:r>
-              <a:rPr sz="850" b="1">
+              <a:rPr sz="819" b="1">
                 <a:solidFill>
                   <a:srgbClr val="112266"/>
                 </a:solidFill>
@@ -9744,7 +11237,7 @@
               <a:t>&gt; Economic : </a:t>
             </a:r>
             <a:r>
-              <a:rPr sz="800">
+              <a:rPr sz="780">
                 <a:solidFill>
                   <a:srgbClr val="222222"/>
                 </a:solidFill>
@@ -9763,8 +11256,8 @@
         </p:nvSpPr>
         <p:spPr>
           <a:xfrm>
-            <a:off x="6172200" y="1097280"/>
-            <a:ext cx="5623560" cy="2423160"/>
+            <a:off x="6172200" y="1051560"/>
+            <a:ext cx="5623560" cy="2148840"/>
           </a:xfrm>
           <a:prstGeom prst="roundRect">
             <a:avLst/>
@@ -9772,7 +11265,7 @@
           <a:solidFill>
             <a:srgbClr val="FFFFFF"/>
           </a:solidFill>
-          <a:ln w="15240">
+          <a:ln w="13970">
             <a:solidFill>
               <a:srgbClr val="18864B"/>
             </a:solidFill>
@@ -9808,8 +11301,8 @@
         </p:nvSpPr>
         <p:spPr>
           <a:xfrm>
-            <a:off x="6309360" y="987552"/>
-            <a:ext cx="1645920" cy="237744"/>
+            <a:off x="6309360" y="941832"/>
+            <a:ext cx="1645920" cy="219456"/>
           </a:xfrm>
           <a:prstGeom prst="roundRect">
             <a:avLst/>
@@ -9836,11 +11329,11 @@
           </a:fontRef>
         </p:style>
         <p:txBody>
-          <a:bodyPr rtlCol="0" anchor="ctr" wrap="none" lIns="73152" rIns="73152" tIns="0" bIns="0"/>
+          <a:bodyPr rtlCol="0" anchor="ctr" wrap="none" lIns="54864" rIns="54864" tIns="0" bIns="0"/>
           <a:lstStyle/>
           <a:p>
             <a:pPr algn="ctr">
-              <a:defRPr sz="950" b="1">
+              <a:defRPr sz="900" b="1">
                 <a:solidFill>
                   <a:srgbClr val="FFFFFF"/>
                 </a:solidFill>
@@ -9861,8 +11354,8 @@
         </p:nvSpPr>
         <p:spPr>
           <a:xfrm>
-            <a:off x="6309360" y="1261872"/>
-            <a:ext cx="5349240" cy="2148840"/>
+            <a:off x="6309360" y="1188720"/>
+            <a:ext cx="5349240" cy="1920240"/>
           </a:xfrm>
           <a:prstGeom prst="rect">
             <a:avLst/>
@@ -9881,7 +11374,7 @@
               </a:spcBef>
             </a:pPr>
             <a:r>
-              <a:rPr sz="850" b="1">
+              <a:rPr sz="819" b="1">
                 <a:solidFill>
                   <a:srgbClr val="1A365D"/>
                 </a:solidFill>
@@ -9890,7 +11383,7 @@
               <a:t>&gt; Regulatory Scope : </a:t>
             </a:r>
             <a:r>
-              <a:rPr sz="800">
+              <a:rPr sz="780">
                 <a:solidFill>
                   <a:srgbClr val="222222"/>
                 </a:solidFill>
@@ -9899,7 +11392,7 @@
               <a:t>Strictly enforces AICTE Approval Process Handbook (APH 2026-27), NEP 2020, and DPDP Act 2023 mandates.</a:t>
             </a:r>
             <a:r>
-              <a:rPr sz="800" b="1">
+              <a:rPr sz="780" b="1">
                 <a:solidFill>
                   <a:srgbClr val="008C6E"/>
                 </a:solidFill>
@@ -9912,11 +11405,11 @@
           <a:p>
             <a:pPr>
               <a:spcBef>
-                <a:spcPts val="350"/>
+                <a:spcPts val="300"/>
               </a:spcBef>
             </a:pPr>
             <a:r>
-              <a:rPr sz="850" b="1">
+              <a:rPr sz="819" b="1">
                 <a:solidFill>
                   <a:srgbClr val="1A365D"/>
                 </a:solidFill>
@@ -9925,7 +11418,7 @@
               <a:t>&gt; Policy &amp; Revenue : </a:t>
             </a:r>
             <a:r>
-              <a:rPr sz="800">
+              <a:rPr sz="780">
                 <a:solidFill>
                   <a:srgbClr val="222222"/>
                 </a:solidFill>
@@ -9937,11 +11430,11 @@
           <a:p>
             <a:pPr>
               <a:spcBef>
-                <a:spcPts val="350"/>
+                <a:spcPts val="300"/>
               </a:spcBef>
             </a:pPr>
             <a:r>
-              <a:rPr sz="850" b="1">
+              <a:rPr sz="819" b="1">
                 <a:solidFill>
                   <a:srgbClr val="1A365D"/>
                 </a:solidFill>
@@ -9950,7 +11443,7 @@
               <a:t>&gt; Investment &amp; ROI : </a:t>
             </a:r>
             <a:r>
-              <a:rPr sz="800">
+              <a:rPr sz="780">
                 <a:solidFill>
                   <a:srgbClr val="222222"/>
                 </a:solidFill>
@@ -9962,11 +11455,11 @@
           <a:p>
             <a:pPr>
               <a:spcBef>
-                <a:spcPts val="350"/>
+                <a:spcPts val="300"/>
               </a:spcBef>
             </a:pPr>
             <a:r>
-              <a:rPr sz="850" b="1">
+              <a:rPr sz="819" b="1">
                 <a:solidFill>
                   <a:srgbClr val="1A365D"/>
                 </a:solidFill>
@@ -9975,7 +11468,7 @@
               <a:t>&gt; Scalability : </a:t>
             </a:r>
             <a:r>
-              <a:rPr sz="800">
+              <a:rPr sz="780">
                 <a:solidFill>
                   <a:srgbClr val="222222"/>
                 </a:solidFill>
@@ -9988,22 +11481,22 @@
       </p:sp>
       <p:sp>
         <p:nvSpPr>
-          <p:cNvPr id="17416" name="Rounded Rectangle 17415"/>
+          <p:cNvPr id="17416" name="Rectangle 17415"/>
           <p:cNvSpPr/>
           <p:nvPr/>
         </p:nvSpPr>
         <p:spPr>
           <a:xfrm>
-            <a:off x="365760" y="3657600"/>
-            <a:ext cx="5623560" cy="2423160"/>
-          </a:xfrm>
-          <a:prstGeom prst="roundRect">
+            <a:off x="365760" y="3364992"/>
+            <a:ext cx="11430000" cy="274320"/>
+          </a:xfrm>
+          <a:prstGeom prst="rect">
             <a:avLst/>
           </a:prstGeom>
           <a:solidFill>
-            <a:srgbClr val="FFFFFF"/>
+            <a:srgbClr val="F8FAFC"/>
           </a:solidFill>
-          <a:ln w="15240">
+          <a:ln w="12700">
             <a:solidFill>
               <a:srgbClr val="CBD5E1"/>
             </a:solidFill>
@@ -10027,7 +11520,17 @@
           <a:bodyPr rtlCol="0" anchor="ctr"/>
           <a:lstStyle/>
           <a:p>
-            <a:pPr algn="ctr"/>
+            <a:pPr algn="ctr">
+              <a:defRPr sz="950" b="1">
+                <a:solidFill>
+                  <a:srgbClr val="112266"/>
+                </a:solidFill>
+                <a:latin typeface="Arial"/>
+              </a:defRPr>
+            </a:pPr>
+            <a:r>
+              <a:t>WHAT IFs....? &amp; GOVERNANCE CHALLENGES MITIGATED (FAIL-SAFE ARCHITECTURE)</a:t>
+            </a:r>
           </a:p>
         </p:txBody>
       </p:sp>
@@ -10039,8 +11542,53 @@
         </p:nvSpPr>
         <p:spPr>
           <a:xfrm>
-            <a:off x="502920" y="3547872"/>
-            <a:ext cx="2560320" cy="237744"/>
+            <a:off x="365760" y="3730752"/>
+            <a:ext cx="2724912" cy="2542032"/>
+          </a:xfrm>
+          <a:prstGeom prst="roundRect">
+            <a:avLst/>
+          </a:prstGeom>
+          <a:solidFill>
+            <a:srgbClr val="FFFFFF"/>
+          </a:solidFill>
+          <a:ln w="13970">
+            <a:solidFill>
+              <a:srgbClr val="B42828"/>
+            </a:solidFill>
+          </a:ln>
+        </p:spPr>
+        <p:style>
+          <a:lnRef idx="1">
+            <a:schemeClr val="accent1"/>
+          </a:lnRef>
+          <a:fillRef idx="3">
+            <a:schemeClr val="accent1"/>
+          </a:fillRef>
+          <a:effectRef idx="2">
+            <a:schemeClr val="accent1"/>
+          </a:effectRef>
+          <a:fontRef idx="minor">
+            <a:schemeClr val="lt1"/>
+          </a:fontRef>
+        </p:style>
+        <p:txBody>
+          <a:bodyPr rtlCol="0" anchor="ctr"/>
+          <a:lstStyle/>
+          <a:p>
+            <a:pPr algn="ctr"/>
+          </a:p>
+        </p:txBody>
+      </p:sp>
+      <p:sp>
+        <p:nvSpPr>
+          <p:cNvPr id="17418" name="Rounded Rectangle 17417"/>
+          <p:cNvSpPr/>
+          <p:nvPr/>
+        </p:nvSpPr>
+        <p:spPr>
+          <a:xfrm>
+            <a:off x="475488" y="3621024"/>
+            <a:ext cx="2505456" cy="228600"/>
           </a:xfrm>
           <a:prstGeom prst="roundRect">
             <a:avLst/>
@@ -10067,11 +11615,11 @@
           </a:fontRef>
         </p:style>
         <p:txBody>
-          <a:bodyPr rtlCol="0" anchor="ctr" wrap="none" lIns="73152" rIns="73152" tIns="0" bIns="0"/>
+          <a:bodyPr rtlCol="0" anchor="ctr" wrap="none" lIns="54864" rIns="54864" tIns="0" bIns="0"/>
           <a:lstStyle/>
           <a:p>
             <a:pPr algn="ctr">
-              <a:defRPr sz="950" b="1">
+              <a:defRPr sz="900" b="1">
                 <a:solidFill>
                   <a:srgbClr val="FFFFFF"/>
                 </a:solidFill>
@@ -10079,21 +11627,21 @@
               </a:defRPr>
             </a:pPr>
             <a:r>
-              <a:t>TECHNICAL CHALLENGES :</a:t>
-            </a:r>
-          </a:p>
-        </p:txBody>
-      </p:sp>
-      <p:sp>
-        <p:nvSpPr>
-          <p:cNvPr id="17418" name="TextBox 17417"/>
+              <a:t>WHAT IF 01: Schema Divergence?</a:t>
+            </a:r>
+          </a:p>
+        </p:txBody>
+      </p:sp>
+      <p:sp>
+        <p:nvSpPr>
+          <p:cNvPr id="17419" name="TextBox 17418"/>
           <p:cNvSpPr txBox="1"/>
           <p:nvPr/>
         </p:nvSpPr>
         <p:spPr>
           <a:xfrm>
-            <a:off x="502920" y="3822191"/>
-            <a:ext cx="5349240" cy="2148840"/>
+            <a:off x="475488" y="3886200"/>
+            <a:ext cx="2505456" cy="2331720"/>
           </a:xfrm>
           <a:prstGeom prst="rect">
             <a:avLst/>
@@ -10106,117 +11654,62 @@
           </a:bodyPr>
           <a:lstStyle/>
           <a:p>
+            <a:r>
+              <a:rPr sz="800" b="1">
+                <a:solidFill>
+                  <a:srgbClr val="B42828"/>
+                </a:solidFill>
+                <a:latin typeface="Arial"/>
+              </a:rPr>
+              <a:t>Challenge: </a:t>
+            </a:r>
+            <a:r>
+              <a:rPr sz="750">
+                <a:solidFill>
+                  <a:srgbClr val="222222"/>
+                </a:solidFill>
+                <a:latin typeface="Arial"/>
+              </a:rPr>
+              <a:t>Colleges upload unverified, non-standard ERP spreadsheets with 50+ divergent column headers.</a:t>
+            </a:r>
+          </a:p>
+          <a:p>
             <a:pPr>
               <a:spcBef>
-                <a:spcPts val="0"/>
+                <a:spcPts val="400"/>
               </a:spcBef>
             </a:pPr>
             <a:r>
-              <a:rPr sz="830" b="1">
-                <a:solidFill>
-                  <a:srgbClr val="B42828"/>
-                </a:solidFill>
-                <a:latin typeface="Arial"/>
-              </a:rPr>
-              <a:t>Risk : Inconsistent College Spreadsheets : </a:t>
-            </a:r>
-            <a:r>
-              <a:rPr sz="780">
+              <a:rPr sz="800" b="1">
+                <a:solidFill>
+                  <a:srgbClr val="008C6E"/>
+                </a:solidFill>
+                <a:latin typeface="Arial"/>
+              </a:rPr>
+              <a:t>Engine Mitigation: </a:t>
+            </a:r>
+            <a:r>
+              <a:rPr sz="750">
                 <a:solidFill>
                   <a:srgbClr val="222222"/>
                 </a:solidFill>
                 <a:latin typeface="Arial"/>
               </a:rPr>
-              <a:t>Colleges use divergent ERP schemas and column headers (apaar_no, uid, student_apaar).</a:t>
-            </a:r>
-          </a:p>
-          <a:p>
-            <a:pPr>
-              <a:spcBef>
-                <a:spcPts val="250"/>
-              </a:spcBef>
-            </a:pPr>
-            <a:r>
-              <a:rPr sz="830" b="1">
-                <a:solidFill>
-                  <a:srgbClr val="008C6E"/>
-                </a:solidFill>
-                <a:latin typeface="Arial"/>
-              </a:rPr>
-              <a:t>Mitigation : Resilient Header Normalizer : </a:t>
-            </a:r>
-            <a:r>
-              <a:rPr sz="780">
-                <a:solidFill>
-                  <a:srgbClr val="222222"/>
-                </a:solidFill>
-                <a:latin typeface="Arial"/>
-              </a:rPr>
-              <a:t>Sub-50ms regex mapping normalizes 50+ divergent column variants into standard canonical schema automatically.</a:t>
-            </a:r>
-          </a:p>
-          <a:p>
-            <a:pPr>
-              <a:spcBef>
-                <a:spcPts val="250"/>
-              </a:spcBef>
-            </a:pPr>
-            <a:r>
-              <a:rPr sz="830" b="1">
-                <a:solidFill>
-                  <a:srgbClr val="B42828"/>
-                </a:solidFill>
-                <a:latin typeface="Arial"/>
-              </a:rPr>
-              <a:t>Risk : Student Identifier Privacy Exposure : </a:t>
-            </a:r>
-            <a:r>
-              <a:rPr sz="780">
-                <a:solidFill>
-                  <a:srgbClr val="222222"/>
-                </a:solidFill>
-                <a:latin typeface="Arial"/>
-              </a:rPr>
-              <a:t>Storing plaintext 12-digit student APAAR identifiers risks data leakage under DPDP Act 2023.</a:t>
-            </a:r>
-          </a:p>
-          <a:p>
-            <a:pPr>
-              <a:spcBef>
-                <a:spcPts val="250"/>
-              </a:spcBef>
-            </a:pPr>
-            <a:r>
-              <a:rPr sz="830" b="1">
-                <a:solidFill>
-                  <a:srgbClr val="008C6E"/>
-                </a:solidFill>
-                <a:latin typeface="Arial"/>
-              </a:rPr>
-              <a:t>Mitigation : Keyed HMAC-SHA256 Shield : </a:t>
-            </a:r>
-            <a:r>
-              <a:rPr sz="780">
-                <a:solidFill>
-                  <a:srgbClr val="222222"/>
-                </a:solidFill>
-                <a:latin typeface="Arial"/>
-              </a:rPr>
-              <a:t>Keyed HMAC-SHA256 pseudonymized indexing and dynamic masking (XXXX-XXXX-9012) ensure zero plaintext PII exposure.</a:t>
-            </a:r>
-          </a:p>
-        </p:txBody>
-      </p:sp>
-      <p:sp>
-        <p:nvSpPr>
-          <p:cNvPr id="17419" name="Rounded Rectangle 17418"/>
+              <a:t>Sub-50ms regex normalizer auto-maps aliases (apaar_no, uid -&gt; apaar_id) with 99.8% schema tolerance.</a:t>
+            </a:r>
+          </a:p>
+        </p:txBody>
+      </p:sp>
+      <p:sp>
+        <p:nvSpPr>
+          <p:cNvPr id="17420" name="Rounded Rectangle 17419"/>
           <p:cNvSpPr/>
           <p:nvPr/>
         </p:nvSpPr>
         <p:spPr>
           <a:xfrm>
-            <a:off x="6172200" y="3657600"/>
-            <a:ext cx="5623560" cy="2423160"/>
+            <a:off x="3264408" y="3730752"/>
+            <a:ext cx="2724912" cy="2542032"/>
           </a:xfrm>
           <a:prstGeom prst="roundRect">
             <a:avLst/>
@@ -10224,9 +11717,9 @@
           <a:solidFill>
             <a:srgbClr val="FFFFFF"/>
           </a:solidFill>
-          <a:ln w="15240">
+          <a:ln w="13970">
             <a:solidFill>
-              <a:srgbClr val="CBD5E1"/>
+              <a:srgbClr val="1A56DB"/>
             </a:solidFill>
           </a:ln>
         </p:spPr>
@@ -10254,20 +11747,20 @@
       </p:sp>
       <p:sp>
         <p:nvSpPr>
-          <p:cNvPr id="17420" name="Rounded Rectangle 17419"/>
+          <p:cNvPr id="17421" name="Rounded Rectangle 17420"/>
           <p:cNvSpPr/>
           <p:nvPr/>
         </p:nvSpPr>
         <p:spPr>
           <a:xfrm>
-            <a:off x="6309360" y="3547872"/>
-            <a:ext cx="3200400" cy="237744"/>
+            <a:off x="3374136" y="3621024"/>
+            <a:ext cx="2505456" cy="228600"/>
           </a:xfrm>
           <a:prstGeom prst="roundRect">
             <a:avLst/>
           </a:prstGeom>
           <a:solidFill>
-            <a:srgbClr val="B42828"/>
+            <a:srgbClr val="1A56DB"/>
           </a:solidFill>
           <a:ln>
             <a:noFill/>
@@ -10288,11 +11781,11 @@
           </a:fontRef>
         </p:style>
         <p:txBody>
-          <a:bodyPr rtlCol="0" anchor="ctr" wrap="none" lIns="73152" rIns="73152" tIns="0" bIns="0"/>
+          <a:bodyPr rtlCol="0" anchor="ctr" wrap="none" lIns="54864" rIns="54864" tIns="0" bIns="0"/>
           <a:lstStyle/>
           <a:p>
             <a:pPr algn="ctr">
-              <a:defRPr sz="950" b="1">
+              <a:defRPr sz="900" b="1">
                 <a:solidFill>
                   <a:srgbClr val="FFFFFF"/>
                 </a:solidFill>
@@ -10300,21 +11793,21 @@
               </a:defRPr>
             </a:pPr>
             <a:r>
-              <a:t>GOVERNANCE / REGULATORY CHALLENGES :</a:t>
-            </a:r>
-          </a:p>
-        </p:txBody>
-      </p:sp>
-      <p:sp>
-        <p:nvSpPr>
-          <p:cNvPr id="17421" name="TextBox 17420"/>
+              <a:t>WHAT IF 02: APAAR Data Leaks?</a:t>
+            </a:r>
+          </a:p>
+        </p:txBody>
+      </p:sp>
+      <p:sp>
+        <p:nvSpPr>
+          <p:cNvPr id="17422" name="TextBox 17421"/>
           <p:cNvSpPr txBox="1"/>
           <p:nvPr/>
         </p:nvSpPr>
         <p:spPr>
           <a:xfrm>
-            <a:off x="6309360" y="3822191"/>
-            <a:ext cx="5349240" cy="2148840"/>
+            <a:off x="3374136" y="3886200"/>
+            <a:ext cx="2505456" cy="2331720"/>
           </a:xfrm>
           <a:prstGeom prst="rect">
             <a:avLst/>
@@ -10327,103 +11820,380 @@
           </a:bodyPr>
           <a:lstStyle/>
           <a:p>
+            <a:r>
+              <a:rPr sz="800" b="1">
+                <a:solidFill>
+                  <a:srgbClr val="B42828"/>
+                </a:solidFill>
+                <a:latin typeface="Arial"/>
+              </a:rPr>
+              <a:t>Challenge: </a:t>
+            </a:r>
+            <a:r>
+              <a:rPr sz="750">
+                <a:solidFill>
+                  <a:srgbClr val="222222"/>
+                </a:solidFill>
+                <a:latin typeface="Arial"/>
+              </a:rPr>
+              <a:t>Storing plaintext 12-digit student APAAR identifiers risks data leakage under DPDP Act 2023.</a:t>
+            </a:r>
+          </a:p>
+          <a:p>
             <a:pPr>
               <a:spcBef>
-                <a:spcPts val="0"/>
+                <a:spcPts val="400"/>
               </a:spcBef>
             </a:pPr>
             <a:r>
-              <a:rPr sz="830" b="1">
+              <a:rPr sz="800" b="1">
+                <a:solidFill>
+                  <a:srgbClr val="008C6E"/>
+                </a:solidFill>
+                <a:latin typeface="Arial"/>
+              </a:rPr>
+              <a:t>Engine Mitigation: </a:t>
+            </a:r>
+            <a:r>
+              <a:rPr sz="750">
+                <a:solidFill>
+                  <a:srgbClr val="222222"/>
+                </a:solidFill>
+                <a:latin typeface="Arial"/>
+              </a:rPr>
+              <a:t>Keyed HMAC-SHA256 pseudonymized indexing and dynamic masking (XXXX-XXXX-9012) ensure zero plaintext PII.</a:t>
+            </a:r>
+          </a:p>
+        </p:txBody>
+      </p:sp>
+      <p:sp>
+        <p:nvSpPr>
+          <p:cNvPr id="17423" name="Rounded Rectangle 17422"/>
+          <p:cNvSpPr/>
+          <p:nvPr/>
+        </p:nvSpPr>
+        <p:spPr>
+          <a:xfrm>
+            <a:off x="6163056" y="3730752"/>
+            <a:ext cx="2724912" cy="2542032"/>
+          </a:xfrm>
+          <a:prstGeom prst="roundRect">
+            <a:avLst/>
+          </a:prstGeom>
+          <a:solidFill>
+            <a:srgbClr val="FFFFFF"/>
+          </a:solidFill>
+          <a:ln w="13970">
+            <a:solidFill>
+              <a:srgbClr val="DC6414"/>
+            </a:solidFill>
+          </a:ln>
+        </p:spPr>
+        <p:style>
+          <a:lnRef idx="1">
+            <a:schemeClr val="accent1"/>
+          </a:lnRef>
+          <a:fillRef idx="3">
+            <a:schemeClr val="accent1"/>
+          </a:fillRef>
+          <a:effectRef idx="2">
+            <a:schemeClr val="accent1"/>
+          </a:effectRef>
+          <a:fontRef idx="minor">
+            <a:schemeClr val="lt1"/>
+          </a:fontRef>
+        </p:style>
+        <p:txBody>
+          <a:bodyPr rtlCol="0" anchor="ctr"/>
+          <a:lstStyle/>
+          <a:p>
+            <a:pPr algn="ctr"/>
+          </a:p>
+        </p:txBody>
+      </p:sp>
+      <p:sp>
+        <p:nvSpPr>
+          <p:cNvPr id="17424" name="Rounded Rectangle 17423"/>
+          <p:cNvSpPr/>
+          <p:nvPr/>
+        </p:nvSpPr>
+        <p:spPr>
+          <a:xfrm>
+            <a:off x="6272784" y="3621024"/>
+            <a:ext cx="2505456" cy="228600"/>
+          </a:xfrm>
+          <a:prstGeom prst="roundRect">
+            <a:avLst/>
+          </a:prstGeom>
+          <a:solidFill>
+            <a:srgbClr val="DC6414"/>
+          </a:solidFill>
+          <a:ln>
+            <a:noFill/>
+          </a:ln>
+        </p:spPr>
+        <p:style>
+          <a:lnRef idx="1">
+            <a:schemeClr val="accent1"/>
+          </a:lnRef>
+          <a:fillRef idx="3">
+            <a:schemeClr val="accent1"/>
+          </a:fillRef>
+          <a:effectRef idx="2">
+            <a:schemeClr val="accent1"/>
+          </a:effectRef>
+          <a:fontRef idx="minor">
+            <a:schemeClr val="lt1"/>
+          </a:fontRef>
+        </p:style>
+        <p:txBody>
+          <a:bodyPr rtlCol="0" anchor="ctr" wrap="none" lIns="54864" rIns="54864" tIns="0" bIns="0"/>
+          <a:lstStyle/>
+          <a:p>
+            <a:pPr algn="ctr">
+              <a:defRPr sz="900" b="1">
+                <a:solidFill>
+                  <a:srgbClr val="FFFFFF"/>
+                </a:solidFill>
+                <a:latin typeface="Arial"/>
+              </a:defRPr>
+            </a:pPr>
+            <a:r>
+              <a:t>WHAT IF 03: Double Admission?</a:t>
+            </a:r>
+          </a:p>
+        </p:txBody>
+      </p:sp>
+      <p:sp>
+        <p:nvSpPr>
+          <p:cNvPr id="17425" name="TextBox 17424"/>
+          <p:cNvSpPr txBox="1"/>
+          <p:nvPr/>
+        </p:nvSpPr>
+        <p:spPr>
+          <a:xfrm>
+            <a:off x="6272784" y="3886200"/>
+            <a:ext cx="2505456" cy="2331720"/>
+          </a:xfrm>
+          <a:prstGeom prst="rect">
+            <a:avLst/>
+          </a:prstGeom>
+          <a:noFill/>
+        </p:spPr>
+        <p:txBody>
+          <a:bodyPr wrap="square" lIns="0" rIns="0" tIns="0" bIns="0">
+            <a:spAutoFit/>
+          </a:bodyPr>
+          <a:lstStyle/>
+          <a:p>
+            <a:r>
+              <a:rPr sz="800" b="1">
                 <a:solidFill>
                   <a:srgbClr val="B42828"/>
                 </a:solidFill>
                 <a:latin typeface="Arial"/>
               </a:rPr>
-              <a:t>Risk : Concurrent Multi-College Admissions : </a:t>
-            </a:r>
-            <a:r>
-              <a:rPr sz="780">
+              <a:t>Challenge: </a:t>
+            </a:r>
+            <a:r>
+              <a:rPr sz="750">
                 <a:solidFill>
                   <a:srgbClr val="222222"/>
                 </a:solidFill>
                 <a:latin typeface="Arial"/>
               </a:rPr>
-              <a:t>Students admitted concurrently across different institutions leading to fraudulent seat blocking.</a:t>
+              <a:t>Students admitted concurrently across multiple colleges, blocking seats and diverting grants.</a:t>
             </a:r>
           </a:p>
           <a:p>
             <a:pPr>
               <a:spcBef>
-                <a:spcPts val="250"/>
+                <a:spcPts val="400"/>
               </a:spcBef>
             </a:pPr>
             <a:r>
-              <a:rPr sz="830" b="1">
+              <a:rPr sz="800" b="1">
                 <a:solidFill>
                   <a:srgbClr val="008C6E"/>
                 </a:solidFill>
                 <a:latin typeface="Arial"/>
               </a:rPr>
-              <a:t>Mitigation : Duplicate Collision Radar : </a:t>
-            </a:r>
-            <a:r>
-              <a:rPr sz="780">
+              <a:t>Engine Mitigation: </a:t>
+            </a:r>
+            <a:r>
+              <a:rPr sz="750">
                 <a:solidFill>
                   <a:srgbClr val="222222"/>
                 </a:solidFill>
                 <a:latin typeface="Arial"/>
               </a:rPr>
-              <a:t>Real-time cross-institution collision radar cross-checks active admissions against central records and flags duplicates.</a:t>
+              <a:t>National Collision Radar detects cross-college overlaps in real time and auto-returns vacated seats.</a:t>
+            </a:r>
+          </a:p>
+        </p:txBody>
+      </p:sp>
+      <p:sp>
+        <p:nvSpPr>
+          <p:cNvPr id="17426" name="Rounded Rectangle 17425"/>
+          <p:cNvSpPr/>
+          <p:nvPr/>
+        </p:nvSpPr>
+        <p:spPr>
+          <a:xfrm>
+            <a:off x="9061704" y="3730752"/>
+            <a:ext cx="2724912" cy="2542032"/>
+          </a:xfrm>
+          <a:prstGeom prst="roundRect">
+            <a:avLst/>
+          </a:prstGeom>
+          <a:solidFill>
+            <a:srgbClr val="FFFFFF"/>
+          </a:solidFill>
+          <a:ln w="13970">
+            <a:solidFill>
+              <a:srgbClr val="7030A0"/>
+            </a:solidFill>
+          </a:ln>
+        </p:spPr>
+        <p:style>
+          <a:lnRef idx="1">
+            <a:schemeClr val="accent1"/>
+          </a:lnRef>
+          <a:fillRef idx="3">
+            <a:schemeClr val="accent1"/>
+          </a:fillRef>
+          <a:effectRef idx="2">
+            <a:schemeClr val="accent1"/>
+          </a:effectRef>
+          <a:fontRef idx="minor">
+            <a:schemeClr val="lt1"/>
+          </a:fontRef>
+        </p:style>
+        <p:txBody>
+          <a:bodyPr rtlCol="0" anchor="ctr"/>
+          <a:lstStyle/>
+          <a:p>
+            <a:pPr algn="ctr"/>
+          </a:p>
+        </p:txBody>
+      </p:sp>
+      <p:sp>
+        <p:nvSpPr>
+          <p:cNvPr id="17427" name="Rounded Rectangle 17426"/>
+          <p:cNvSpPr/>
+          <p:nvPr/>
+        </p:nvSpPr>
+        <p:spPr>
+          <a:xfrm>
+            <a:off x="9171432" y="3621024"/>
+            <a:ext cx="2505456" cy="228600"/>
+          </a:xfrm>
+          <a:prstGeom prst="roundRect">
+            <a:avLst/>
+          </a:prstGeom>
+          <a:solidFill>
+            <a:srgbClr val="7030A0"/>
+          </a:solidFill>
+          <a:ln>
+            <a:noFill/>
+          </a:ln>
+        </p:spPr>
+        <p:style>
+          <a:lnRef idx="1">
+            <a:schemeClr val="accent1"/>
+          </a:lnRef>
+          <a:fillRef idx="3">
+            <a:schemeClr val="accent1"/>
+          </a:fillRef>
+          <a:effectRef idx="2">
+            <a:schemeClr val="accent1"/>
+          </a:effectRef>
+          <a:fontRef idx="minor">
+            <a:schemeClr val="lt1"/>
+          </a:fontRef>
+        </p:style>
+        <p:txBody>
+          <a:bodyPr rtlCol="0" anchor="ctr" wrap="none" lIns="54864" rIns="54864" tIns="0" bIns="0"/>
+          <a:lstStyle/>
+          <a:p>
+            <a:pPr algn="ctr">
+              <a:defRPr sz="900" b="1">
+                <a:solidFill>
+                  <a:srgbClr val="FFFFFF"/>
+                </a:solidFill>
+                <a:latin typeface="Arial"/>
+              </a:defRPr>
+            </a:pPr>
+            <a:r>
+              <a:t>WHAT IF 04: Record Tampering?</a:t>
+            </a:r>
+          </a:p>
+        </p:txBody>
+      </p:sp>
+      <p:sp>
+        <p:nvSpPr>
+          <p:cNvPr id="17428" name="TextBox 17427"/>
+          <p:cNvSpPr txBox="1"/>
+          <p:nvPr/>
+        </p:nvSpPr>
+        <p:spPr>
+          <a:xfrm>
+            <a:off x="9171432" y="3886200"/>
+            <a:ext cx="2505456" cy="2331720"/>
+          </a:xfrm>
+          <a:prstGeom prst="rect">
+            <a:avLst/>
+          </a:prstGeom>
+          <a:noFill/>
+        </p:spPr>
+        <p:txBody>
+          <a:bodyPr wrap="square" lIns="0" rIns="0" tIns="0" bIns="0">
+            <a:spAutoFit/>
+          </a:bodyPr>
+          <a:lstStyle/>
+          <a:p>
+            <a:r>
+              <a:rPr sz="800" b="1">
+                <a:solidFill>
+                  <a:srgbClr val="B42828"/>
+                </a:solidFill>
+                <a:latin typeface="Arial"/>
+              </a:rPr>
+              <a:t>Challenge: </a:t>
+            </a:r>
+            <a:r>
+              <a:rPr sz="750">
+                <a:solidFill>
+                  <a:srgbClr val="222222"/>
+                </a:solidFill>
+                <a:latin typeface="Arial"/>
+              </a:rPr>
+              <a:t>Unauthorized administrator attempts to tamper with student approval status or intake quota.</a:t>
             </a:r>
           </a:p>
           <a:p>
             <a:pPr>
               <a:spcBef>
-                <a:spcPts val="250"/>
+                <a:spcPts val="400"/>
               </a:spcBef>
             </a:pPr>
             <a:r>
-              <a:rPr sz="830" b="1">
-                <a:solidFill>
-                  <a:srgbClr val="B42828"/>
-                </a:solidFill>
-                <a:latin typeface="Arial"/>
-              </a:rPr>
-              <a:t>Risk : Regulatory Non-Repudiation &amp; Tampering : </a:t>
-            </a:r>
-            <a:r>
-              <a:rPr sz="780">
+              <a:rPr sz="800" b="1">
+                <a:solidFill>
+                  <a:srgbClr val="008C6E"/>
+                </a:solidFill>
+                <a:latin typeface="Arial"/>
+              </a:rPr>
+              <a:t>Engine Mitigation: </a:t>
+            </a:r>
+            <a:r>
+              <a:rPr sz="750">
                 <a:solidFill>
                   <a:srgbClr val="222222"/>
                 </a:solidFill>
                 <a:latin typeface="Arial"/>
               </a:rPr>
-              <a:t>Unauthorized insider tampering with approved intake capacity or student status.</a:t>
-            </a:r>
-          </a:p>
-          <a:p>
-            <a:pPr>
-              <a:spcBef>
-                <a:spcPts val="250"/>
-              </a:spcBef>
-            </a:pPr>
-            <a:r>
-              <a:rPr sz="830" b="1">
-                <a:solidFill>
-                  <a:srgbClr val="008C6E"/>
-                </a:solidFill>
-                <a:latin typeface="Arial"/>
-              </a:rPr>
-              <a:t>Mitigation : Append-Only Hash Chain Ledger : </a:t>
-            </a:r>
-            <a:r>
-              <a:rPr sz="780">
-                <a:solidFill>
-                  <a:srgbClr val="222222"/>
-                </a:solidFill>
-                <a:latin typeface="Arial"/>
-              </a:rPr>
-              <a:t>Sequential SHA-256 hash chaining (Hash_n = SHA256(Record_n || Hash_n-1)) mathematically exposes any tampering.</a:t>
+              <a:t>Sequential SHA-256 hash chaining (Hash_n = SHA256(Record_n || Hash_n-1)) mathematically breaks if altered.</a:t>
             </a:r>
           </a:p>
         </p:txBody>
@@ -10549,8 +12319,8 @@
         </p:nvSpPr>
         <p:spPr>
           <a:xfrm>
-            <a:off x="1691640" y="137160"/>
-            <a:ext cx="8092440" cy="822960"/>
+            <a:off x="1691640" y="109728"/>
+            <a:ext cx="8092440" cy="777240"/>
           </a:xfrm>
         </p:spPr>
         <p:txBody>
@@ -10574,7 +12344,7 @@
               <a:spcBef>
                 <a:spcPts val="200"/>
               </a:spcBef>
-              <a:defRPr sz="1000" b="1">
+              <a:defRPr sz="950" b="1">
                 <a:solidFill>
                   <a:srgbClr val="008C6E"/>
                 </a:solidFill>
@@ -10599,8 +12369,8 @@
         </p:nvSpPr>
         <p:spPr>
           <a:xfrm>
-            <a:off x="10058400" y="6382512"/>
-            <a:ext cx="1645920" cy="365760"/>
+            <a:off x="10058400" y="6419088"/>
+            <a:ext cx="1645920" cy="329184"/>
           </a:xfrm>
         </p:spPr>
         <p:txBody>
@@ -10622,7 +12392,7 @@
               <a:buFontTx/>
               <a:buNone/>
               <a:tabLst/>
-              <a:defRPr sz="1000" b="1">
+              <a:defRPr sz="950" b="1">
                 <a:solidFill>
                   <a:srgbClr val="FFFFFF"/>
                 </a:solidFill>
@@ -10661,8 +12431,8 @@
         </p:nvSpPr>
         <p:spPr>
           <a:xfrm>
-            <a:off x="2743200" y="6382512"/>
-            <a:ext cx="6702552" cy="365760"/>
+            <a:off x="2743200" y="6419088"/>
+            <a:ext cx="6702552" cy="329184"/>
           </a:xfrm>
         </p:spPr>
         <p:txBody>
@@ -10684,7 +12454,7 @@
               <a:buFontTx/>
               <a:buNone/>
               <a:tabLst/>
-              <a:defRPr sz="1000">
+              <a:defRPr sz="950">
                 <a:solidFill>
                   <a:srgbClr val="FFFFFF"/>
                 </a:solidFill>
@@ -10728,8 +12498,8 @@
         </p:nvSpPr>
         <p:spPr>
           <a:xfrm>
-            <a:off x="274320" y="164592"/>
-            <a:ext cx="1371600" cy="685800"/>
+            <a:off x="274320" y="137160"/>
+            <a:ext cx="1325880" cy="658368"/>
           </a:xfrm>
           <a:prstGeom prst="ellipse">
             <a:avLst/>
@@ -10806,8 +12576,8 @@
         </p:nvSpPr>
         <p:spPr>
           <a:xfrm>
-            <a:off x="365760" y="1097280"/>
-            <a:ext cx="6858000" cy="2560320"/>
+            <a:off x="365760" y="1051560"/>
+            <a:ext cx="6812280" cy="2560320"/>
           </a:xfrm>
           <a:prstGeom prst="roundRect">
             <a:avLst/>
@@ -10815,7 +12585,7 @@
           <a:solidFill>
             <a:srgbClr val="FFFFFF"/>
           </a:solidFill>
-          <a:ln w="15240">
+          <a:ln w="13970">
             <a:solidFill>
               <a:srgbClr val="CBD5E1"/>
             </a:solidFill>
@@ -10851,8 +12621,8 @@
         </p:nvSpPr>
         <p:spPr>
           <a:xfrm>
-            <a:off x="502920" y="1188720"/>
-            <a:ext cx="6583680" cy="2377440"/>
+            <a:off x="502920" y="1143000"/>
+            <a:ext cx="6537960" cy="2377440"/>
           </a:xfrm>
           <a:prstGeom prst="rect">
             <a:avLst/>
@@ -10871,7 +12641,7 @@
               </a:spcBef>
             </a:pPr>
             <a:r>
-              <a:rPr sz="880" b="1">
+              <a:rPr sz="850" b="1">
                 <a:solidFill>
                   <a:srgbClr val="1A365D"/>
                 </a:solidFill>
@@ -10880,7 +12650,7 @@
               <a:t>&gt; The Regulatory &amp; Grant Protection Impact : </a:t>
             </a:r>
             <a:r>
-              <a:rPr sz="810">
+              <a:rPr sz="800">
                 <a:solidFill>
                   <a:srgbClr val="222222"/>
                 </a:solidFill>
@@ -10892,11 +12662,11 @@
           <a:p>
             <a:pPr>
               <a:spcBef>
-                <a:spcPts val="500"/>
+                <a:spcPts val="350"/>
               </a:spcBef>
             </a:pPr>
             <a:r>
-              <a:rPr sz="880" b="1">
+              <a:rPr sz="850" b="1">
                 <a:solidFill>
                   <a:srgbClr val="1A365D"/>
                 </a:solidFill>
@@ -10905,7 +12675,7 @@
               <a:t>&gt; Social Equity &amp; Affirmative Action Gains : </a:t>
             </a:r>
             <a:r>
-              <a:rPr sz="810">
+              <a:rPr sz="800">
                 <a:solidFill>
                   <a:srgbClr val="222222"/>
                 </a:solidFill>
@@ -10917,11 +12687,11 @@
           <a:p>
             <a:pPr>
               <a:spcBef>
-                <a:spcPts val="500"/>
+                <a:spcPts val="350"/>
               </a:spcBef>
             </a:pPr>
             <a:r>
-              <a:rPr sz="880" b="1">
+              <a:rPr sz="850" b="1">
                 <a:solidFill>
                   <a:srgbClr val="1A365D"/>
                 </a:solidFill>
@@ -10930,7 +12700,7 @@
               <a:t>&gt; Environmental &amp; Paperless Transformation : </a:t>
             </a:r>
             <a:r>
-              <a:rPr sz="810">
+              <a:rPr sz="800">
                 <a:solidFill>
                   <a:srgbClr val="222222"/>
                 </a:solidFill>
@@ -10949,7 +12719,7 @@
         </p:nvSpPr>
         <p:spPr>
           <a:xfrm>
-            <a:off x="7360920" y="1097280"/>
+            <a:off x="7360920" y="1051560"/>
             <a:ext cx="4462272" cy="2560320"/>
           </a:xfrm>
           <a:prstGeom prst="roundRect">
@@ -10958,7 +12728,7 @@
           <a:solidFill>
             <a:srgbClr val="181C24"/>
           </a:solidFill>
-          <a:ln w="15240">
+          <a:ln w="13970">
             <a:solidFill>
               <a:srgbClr val="CBD5E1"/>
             </a:solidFill>
@@ -10995,8 +12765,8 @@
           <p:nvPr/>
         </p:nvGraphicFramePr>
         <p:xfrm>
-          <a:off x="7452360" y="1143000"/>
-          <a:ext cx="4279392" cy="2450592"/>
+          <a:off x="7452360" y="1097280"/>
+          <a:ext cx="4279392" cy="2468880"/>
         </p:xfrm>
         <a:graphic>
           <a:graphicData uri="http://schemas.openxmlformats.org/drawingml/2006/table">
@@ -11009,7 +12779,7 @@
                 <a:gridCol w="868680"/>
                 <a:gridCol w="804672"/>
               </a:tblGrid>
-              <a:tr h="245059">
+              <a:tr h="246888">
                 <a:tc>
                   <a:txBody>
                     <a:bodyPr/>
@@ -11027,7 +12797,7 @@
                       </a:r>
                     </a:p>
                   </a:txBody>
-                  <a:tcPr marL="54864" marR="36576" marT="18288" marB="18288">
+                  <a:tcPr marL="36576" marR="36576" marT="18288" marB="18288">
                     <a:solidFill>
                       <a:srgbClr val="102542"/>
                     </a:solidFill>
@@ -11050,7 +12820,7 @@
                       </a:r>
                     </a:p>
                   </a:txBody>
-                  <a:tcPr marL="54864" marR="36576" marT="18288" marB="18288">
+                  <a:tcPr marL="36576" marR="36576" marT="18288" marB="18288">
                     <a:solidFill>
                       <a:srgbClr val="102542"/>
                     </a:solidFill>
@@ -11073,14 +12843,14 @@
                       </a:r>
                     </a:p>
                   </a:txBody>
-                  <a:tcPr marL="54864" marR="36576" marT="18288" marB="18288">
+                  <a:tcPr marL="36576" marR="36576" marT="18288" marB="18288">
                     <a:solidFill>
                       <a:srgbClr val="102542"/>
                     </a:solidFill>
                   </a:tcPr>
                 </a:tc>
               </a:tr>
-              <a:tr h="245059">
+              <a:tr h="246888">
                 <a:tc>
                   <a:txBody>
                     <a:bodyPr/>
@@ -11151,7 +12921,7 @@
                   </a:tcPr>
                 </a:tc>
               </a:tr>
-              <a:tr h="245059">
+              <a:tr h="246888">
                 <a:tc>
                   <a:txBody>
                     <a:bodyPr/>
@@ -11222,7 +12992,7 @@
                   </a:tcPr>
                 </a:tc>
               </a:tr>
-              <a:tr h="245059">
+              <a:tr h="246888">
                 <a:tc>
                   <a:txBody>
                     <a:bodyPr/>
@@ -11293,7 +13063,7 @@
                   </a:tcPr>
                 </a:tc>
               </a:tr>
-              <a:tr h="245059">
+              <a:tr h="246888">
                 <a:tc>
                   <a:txBody>
                     <a:bodyPr/>
@@ -11364,7 +13134,7 @@
                   </a:tcPr>
                 </a:tc>
               </a:tr>
-              <a:tr h="245059">
+              <a:tr h="246888">
                 <a:tc>
                   <a:txBody>
                     <a:bodyPr/>
@@ -11435,7 +13205,7 @@
                   </a:tcPr>
                 </a:tc>
               </a:tr>
-              <a:tr h="245059">
+              <a:tr h="246888">
                 <a:tc>
                   <a:txBody>
                     <a:bodyPr/>
@@ -11506,7 +13276,7 @@
                   </a:tcPr>
                 </a:tc>
               </a:tr>
-              <a:tr h="245059">
+              <a:tr h="246888">
                 <a:tc>
                   <a:txBody>
                     <a:bodyPr/>
@@ -11577,7 +13347,7 @@
                   </a:tcPr>
                 </a:tc>
               </a:tr>
-              <a:tr h="245059">
+              <a:tr h="246888">
                 <a:tc>
                   <a:txBody>
                     <a:bodyPr/>
@@ -11648,7 +13418,7 @@
                   </a:tcPr>
                 </a:tc>
               </a:tr>
-              <a:tr h="245061">
+              <a:tr h="246888">
                 <a:tc>
                   <a:txBody>
                     <a:bodyPr/>
@@ -11731,8 +13501,8 @@
         </p:nvSpPr>
         <p:spPr>
           <a:xfrm>
-            <a:off x="365760" y="3749039"/>
-            <a:ext cx="11430000" cy="292608"/>
+            <a:off x="365760" y="3730752"/>
+            <a:ext cx="11430000" cy="274320"/>
           </a:xfrm>
           <a:prstGeom prst="rect">
             <a:avLst/>
@@ -11765,7 +13535,7 @@
           <a:lstStyle/>
           <a:p>
             <a:pPr algn="ctr">
-              <a:defRPr sz="1000" b="1">
+              <a:defRPr sz="950" b="1">
                 <a:solidFill>
                   <a:srgbClr val="112266"/>
                 </a:solidFill>
@@ -11786,8 +13556,8 @@
         </p:nvSpPr>
         <p:spPr>
           <a:xfrm>
-            <a:off x="365760" y="4114800"/>
-            <a:ext cx="3657600" cy="1965960"/>
+            <a:off x="365760" y="4096512"/>
+            <a:ext cx="3657600" cy="2057400"/>
           </a:xfrm>
           <a:prstGeom prst="roundRect">
             <a:avLst/>
@@ -11795,7 +13565,7 @@
           <a:solidFill>
             <a:srgbClr val="FFFFFF"/>
           </a:solidFill>
-          <a:ln w="15240">
+          <a:ln w="13970">
             <a:solidFill>
               <a:srgbClr val="1A56DB"/>
             </a:solidFill>
@@ -11831,8 +13601,8 @@
         </p:nvSpPr>
         <p:spPr>
           <a:xfrm>
-            <a:off x="475488" y="4005072"/>
-            <a:ext cx="3438144" cy="256032"/>
+            <a:off x="475488" y="3986784"/>
+            <a:ext cx="3438144" cy="237744"/>
           </a:xfrm>
           <a:prstGeom prst="roundRect">
             <a:avLst/>
@@ -11859,11 +13629,11 @@
           </a:fontRef>
         </p:style>
         <p:txBody>
-          <a:bodyPr rtlCol="0" anchor="ctr" wrap="none" lIns="73152" rIns="73152" tIns="0" bIns="0"/>
+          <a:bodyPr rtlCol="0" anchor="ctr" wrap="none" lIns="54864" rIns="54864" tIns="0" bIns="0"/>
           <a:lstStyle/>
           <a:p>
             <a:pPr algn="ctr">
-              <a:defRPr sz="950" b="1">
+              <a:defRPr sz="900" b="1">
                 <a:solidFill>
                   <a:srgbClr val="FFFFFF"/>
                 </a:solidFill>
@@ -11884,8 +13654,8 @@
         </p:nvSpPr>
         <p:spPr>
           <a:xfrm>
-            <a:off x="475488" y="4297680"/>
-            <a:ext cx="3438144" cy="1746504"/>
+            <a:off x="475488" y="4261104"/>
+            <a:ext cx="3438144" cy="1856232"/>
           </a:xfrm>
           <a:prstGeom prst="rect">
             <a:avLst/>
@@ -11904,7 +13674,7 @@
               </a:spcBef>
             </a:pPr>
             <a:r>
-              <a:rPr sz="819" b="1">
+              <a:rPr sz="800" b="1">
                 <a:solidFill>
                   <a:srgbClr val="1A56DB"/>
                 </a:solidFill>
@@ -11913,7 +13683,7 @@
               <a:t>&gt; For : </a:t>
             </a:r>
             <a:r>
-              <a:rPr sz="780">
+              <a:rPr sz="760">
                 <a:solidFill>
                   <a:srgbClr val="222222"/>
                 </a:solidFill>
@@ -11929,7 +13699,7 @@
               </a:spcBef>
             </a:pPr>
             <a:r>
-              <a:rPr sz="819" b="1">
+              <a:rPr sz="800" b="1">
                 <a:solidFill>
                   <a:srgbClr val="1A56DB"/>
                 </a:solidFill>
@@ -11938,7 +13708,7 @@
               <a:t>&gt; Process : </a:t>
             </a:r>
             <a:r>
-              <a:rPr sz="780">
+              <a:rPr sz="760">
                 <a:solidFill>
                   <a:srgbClr val="222222"/>
                 </a:solidFill>
@@ -11954,7 +13724,7 @@
               </a:spcBef>
             </a:pPr>
             <a:r>
-              <a:rPr sz="819" b="1">
+              <a:rPr sz="800" b="1">
                 <a:solidFill>
                   <a:srgbClr val="1A56DB"/>
                 </a:solidFill>
@@ -11963,7 +13733,7 @@
               <a:t>&gt; Time : </a:t>
             </a:r>
             <a:r>
-              <a:rPr sz="780">
+              <a:rPr sz="760">
                 <a:solidFill>
                   <a:srgbClr val="222222"/>
                 </a:solidFill>
@@ -11979,7 +13749,7 @@
               </a:spcBef>
             </a:pPr>
             <a:r>
-              <a:rPr sz="819" b="1">
+              <a:rPr sz="800" b="1">
                 <a:solidFill>
                   <a:srgbClr val="1A56DB"/>
                 </a:solidFill>
@@ -11988,7 +13758,7 @@
               <a:t>&gt; Success Rate : </a:t>
             </a:r>
             <a:r>
-              <a:rPr sz="780">
+              <a:rPr sz="760">
                 <a:solidFill>
                   <a:srgbClr val="222222"/>
                 </a:solidFill>
@@ -12004,7 +13774,7 @@
               </a:spcBef>
             </a:pPr>
             <a:r>
-              <a:rPr sz="819" b="1">
+              <a:rPr sz="800" b="1">
                 <a:solidFill>
                   <a:srgbClr val="1A56DB"/>
                 </a:solidFill>
@@ -12013,7 +13783,7 @@
               <a:t>&gt; Best For : </a:t>
             </a:r>
             <a:r>
-              <a:rPr sz="780">
+              <a:rPr sz="760">
                 <a:solidFill>
                   <a:srgbClr val="222222"/>
                 </a:solidFill>
@@ -12032,8 +13802,8 @@
         </p:nvSpPr>
         <p:spPr>
           <a:xfrm>
-            <a:off x="4251960" y="4114800"/>
-            <a:ext cx="3657600" cy="1965960"/>
+            <a:off x="4251960" y="4096512"/>
+            <a:ext cx="3657600" cy="2057400"/>
           </a:xfrm>
           <a:prstGeom prst="roundRect">
             <a:avLst/>
@@ -12041,7 +13811,7 @@
           <a:solidFill>
             <a:srgbClr val="FFFFFF"/>
           </a:solidFill>
-          <a:ln w="15240">
+          <a:ln w="13970">
             <a:solidFill>
               <a:srgbClr val="DC6414"/>
             </a:solidFill>
@@ -12077,8 +13847,8 @@
         </p:nvSpPr>
         <p:spPr>
           <a:xfrm>
-            <a:off x="4361688" y="4005072"/>
-            <a:ext cx="3438144" cy="256032"/>
+            <a:off x="4361688" y="3986784"/>
+            <a:ext cx="3438144" cy="237744"/>
           </a:xfrm>
           <a:prstGeom prst="roundRect">
             <a:avLst/>
@@ -12105,11 +13875,11 @@
           </a:fontRef>
         </p:style>
         <p:txBody>
-          <a:bodyPr rtlCol="0" anchor="ctr" wrap="none" lIns="73152" rIns="73152" tIns="0" bIns="0"/>
+          <a:bodyPr rtlCol="0" anchor="ctr" wrap="none" lIns="54864" rIns="54864" tIns="0" bIns="0"/>
           <a:lstStyle/>
           <a:p>
             <a:pPr algn="ctr">
-              <a:defRPr sz="950" b="1">
+              <a:defRPr sz="900" b="1">
                 <a:solidFill>
                   <a:srgbClr val="FFFFFF"/>
                 </a:solidFill>
@@ -12130,8 +13900,8 @@
         </p:nvSpPr>
         <p:spPr>
           <a:xfrm>
-            <a:off x="4361688" y="4297680"/>
-            <a:ext cx="3438144" cy="1746504"/>
+            <a:off x="4361688" y="4261104"/>
+            <a:ext cx="3438144" cy="1856232"/>
           </a:xfrm>
           <a:prstGeom prst="rect">
             <a:avLst/>
@@ -12150,7 +13920,7 @@
               </a:spcBef>
             </a:pPr>
             <a:r>
-              <a:rPr sz="819" b="1">
+              <a:rPr sz="800" b="1">
                 <a:solidFill>
                   <a:srgbClr val="DC6414"/>
                 </a:solidFill>
@@ -12159,7 +13929,7 @@
               <a:t>&gt; For : </a:t>
             </a:r>
             <a:r>
-              <a:rPr sz="780">
+              <a:rPr sz="760">
                 <a:solidFill>
                   <a:srgbClr val="222222"/>
                 </a:solidFill>
@@ -12175,7 +13945,7 @@
               </a:spcBef>
             </a:pPr>
             <a:r>
-              <a:rPr sz="819" b="1">
+              <a:rPr sz="800" b="1">
                 <a:solidFill>
                   <a:srgbClr val="DC6414"/>
                 </a:solidFill>
@@ -12184,7 +13954,7 @@
               <a:t>&gt; Process : </a:t>
             </a:r>
             <a:r>
-              <a:rPr sz="780">
+              <a:rPr sz="760">
                 <a:solidFill>
                   <a:srgbClr val="222222"/>
                 </a:solidFill>
@@ -12200,7 +13970,7 @@
               </a:spcBef>
             </a:pPr>
             <a:r>
-              <a:rPr sz="819" b="1">
+              <a:rPr sz="800" b="1">
                 <a:solidFill>
                   <a:srgbClr val="DC6414"/>
                 </a:solidFill>
@@ -12209,7 +13979,7 @@
               <a:t>&gt; Time : </a:t>
             </a:r>
             <a:r>
-              <a:rPr sz="780">
+              <a:rPr sz="760">
                 <a:solidFill>
                   <a:srgbClr val="222222"/>
                 </a:solidFill>
@@ -12225,7 +13995,7 @@
               </a:spcBef>
             </a:pPr>
             <a:r>
-              <a:rPr sz="819" b="1">
+              <a:rPr sz="800" b="1">
                 <a:solidFill>
                   <a:srgbClr val="DC6414"/>
                 </a:solidFill>
@@ -12234,7 +14004,7 @@
               <a:t>&gt; Success Rate : </a:t>
             </a:r>
             <a:r>
-              <a:rPr sz="780">
+              <a:rPr sz="760">
                 <a:solidFill>
                   <a:srgbClr val="222222"/>
                 </a:solidFill>
@@ -12250,7 +14020,7 @@
               </a:spcBef>
             </a:pPr>
             <a:r>
-              <a:rPr sz="819" b="1">
+              <a:rPr sz="800" b="1">
                 <a:solidFill>
                   <a:srgbClr val="DC6414"/>
                 </a:solidFill>
@@ -12259,7 +14029,7 @@
               <a:t>&gt; Best For : </a:t>
             </a:r>
             <a:r>
-              <a:rPr sz="780">
+              <a:rPr sz="760">
                 <a:solidFill>
                   <a:srgbClr val="222222"/>
                 </a:solidFill>
@@ -12278,8 +14048,8 @@
         </p:nvSpPr>
         <p:spPr>
           <a:xfrm>
-            <a:off x="8138160" y="4114800"/>
-            <a:ext cx="3657600" cy="1965960"/>
+            <a:off x="8138160" y="4096512"/>
+            <a:ext cx="3657600" cy="2057400"/>
           </a:xfrm>
           <a:prstGeom prst="roundRect">
             <a:avLst/>
@@ -12287,7 +14057,7 @@
           <a:solidFill>
             <a:srgbClr val="FFFFFF"/>
           </a:solidFill>
-          <a:ln w="15240">
+          <a:ln w="13970">
             <a:solidFill>
               <a:srgbClr val="18864B"/>
             </a:solidFill>
@@ -12323,8 +14093,8 @@
         </p:nvSpPr>
         <p:spPr>
           <a:xfrm>
-            <a:off x="8247888" y="4005072"/>
-            <a:ext cx="3438144" cy="256032"/>
+            <a:off x="8247888" y="3986784"/>
+            <a:ext cx="3438144" cy="237744"/>
           </a:xfrm>
           <a:prstGeom prst="roundRect">
             <a:avLst/>
@@ -12351,11 +14121,11 @@
           </a:fontRef>
         </p:style>
         <p:txBody>
-          <a:bodyPr rtlCol="0" anchor="ctr" wrap="none" lIns="73152" rIns="73152" tIns="0" bIns="0"/>
+          <a:bodyPr rtlCol="0" anchor="ctr" wrap="none" lIns="54864" rIns="54864" tIns="0" bIns="0"/>
           <a:lstStyle/>
           <a:p>
             <a:pPr algn="ctr">
-              <a:defRPr sz="950" b="1">
+              <a:defRPr sz="900" b="1">
                 <a:solidFill>
                   <a:srgbClr val="FFFFFF"/>
                 </a:solidFill>
@@ -12376,8 +14146,8 @@
         </p:nvSpPr>
         <p:spPr>
           <a:xfrm>
-            <a:off x="8247888" y="4297680"/>
-            <a:ext cx="3438144" cy="1746504"/>
+            <a:off x="8247888" y="4261104"/>
+            <a:ext cx="3438144" cy="1856232"/>
           </a:xfrm>
           <a:prstGeom prst="rect">
             <a:avLst/>
@@ -12396,7 +14166,7 @@
               </a:spcBef>
             </a:pPr>
             <a:r>
-              <a:rPr sz="819" b="1">
+              <a:rPr sz="800" b="1">
                 <a:solidFill>
                   <a:srgbClr val="18864B"/>
                 </a:solidFill>
@@ -12405,7 +14175,7 @@
               <a:t>&gt; For : </a:t>
             </a:r>
             <a:r>
-              <a:rPr sz="780">
+              <a:rPr sz="760">
                 <a:solidFill>
                   <a:srgbClr val="222222"/>
                 </a:solidFill>
@@ -12421,7 +14191,7 @@
               </a:spcBef>
             </a:pPr>
             <a:r>
-              <a:rPr sz="819" b="1">
+              <a:rPr sz="800" b="1">
                 <a:solidFill>
                   <a:srgbClr val="18864B"/>
                 </a:solidFill>
@@ -12430,7 +14200,7 @@
               <a:t>&gt; Process : </a:t>
             </a:r>
             <a:r>
-              <a:rPr sz="780">
+              <a:rPr sz="760">
                 <a:solidFill>
                   <a:srgbClr val="222222"/>
                 </a:solidFill>
@@ -12446,7 +14216,7 @@
               </a:spcBef>
             </a:pPr>
             <a:r>
-              <a:rPr sz="819" b="1">
+              <a:rPr sz="800" b="1">
                 <a:solidFill>
                   <a:srgbClr val="18864B"/>
                 </a:solidFill>
@@ -12455,7 +14225,7 @@
               <a:t>&gt; Time : </a:t>
             </a:r>
             <a:r>
-              <a:rPr sz="780">
+              <a:rPr sz="760">
                 <a:solidFill>
                   <a:srgbClr val="222222"/>
                 </a:solidFill>
@@ -12471,7 +14241,7 @@
               </a:spcBef>
             </a:pPr>
             <a:r>
-              <a:rPr sz="819" b="1">
+              <a:rPr sz="800" b="1">
                 <a:solidFill>
                   <a:srgbClr val="18864B"/>
                 </a:solidFill>
@@ -12480,7 +14250,7 @@
               <a:t>&gt; Success Rate : </a:t>
             </a:r>
             <a:r>
-              <a:rPr sz="780">
+              <a:rPr sz="760">
                 <a:solidFill>
                   <a:srgbClr val="222222"/>
                 </a:solidFill>
@@ -12496,7 +14266,7 @@
               </a:spcBef>
             </a:pPr>
             <a:r>
-              <a:rPr sz="819" b="1">
+              <a:rPr sz="800" b="1">
                 <a:solidFill>
                   <a:srgbClr val="18864B"/>
                 </a:solidFill>
@@ -12505,7 +14275,7 @@
               <a:t>&gt; Best For : </a:t>
             </a:r>
             <a:r>
-              <a:rPr sz="780">
+              <a:rPr sz="760">
                 <a:solidFill>
                   <a:srgbClr val="222222"/>
                 </a:solidFill>
@@ -12637,8 +14407,8 @@
         </p:nvSpPr>
         <p:spPr>
           <a:xfrm>
-            <a:off x="1691640" y="137160"/>
-            <a:ext cx="8092440" cy="822960"/>
+            <a:off x="1691640" y="109728"/>
+            <a:ext cx="8092440" cy="777240"/>
           </a:xfrm>
         </p:spPr>
         <p:txBody>
@@ -12662,7 +14432,7 @@
               <a:spcBef>
                 <a:spcPts val="200"/>
               </a:spcBef>
-              <a:defRPr sz="1000" b="1">
+              <a:defRPr sz="950" b="1">
                 <a:solidFill>
                   <a:srgbClr val="008C6E"/>
                 </a:solidFill>
@@ -12687,8 +14457,8 @@
         </p:nvSpPr>
         <p:spPr>
           <a:xfrm>
-            <a:off x="10058400" y="6382512"/>
-            <a:ext cx="1645920" cy="365760"/>
+            <a:off x="10058400" y="6419088"/>
+            <a:ext cx="1645920" cy="329184"/>
           </a:xfrm>
         </p:spPr>
         <p:txBody>
@@ -12710,7 +14480,7 @@
               <a:buFontTx/>
               <a:buNone/>
               <a:tabLst/>
-              <a:defRPr sz="1000" b="1">
+              <a:defRPr sz="950" b="1">
                 <a:solidFill>
                   <a:srgbClr val="FFFFFF"/>
                 </a:solidFill>
@@ -12749,8 +14519,8 @@
         </p:nvSpPr>
         <p:spPr>
           <a:xfrm>
-            <a:off x="2743200" y="6382512"/>
-            <a:ext cx="6702552" cy="365760"/>
+            <a:off x="2743200" y="6419088"/>
+            <a:ext cx="6702552" cy="329184"/>
           </a:xfrm>
         </p:spPr>
         <p:txBody>
@@ -12772,7 +14542,7 @@
               <a:buFontTx/>
               <a:buNone/>
               <a:tabLst/>
-              <a:defRPr sz="1000">
+              <a:defRPr sz="950">
                 <a:solidFill>
                   <a:srgbClr val="FFFFFF"/>
                 </a:solidFill>
@@ -12816,8 +14586,8 @@
         </p:nvSpPr>
         <p:spPr>
           <a:xfrm>
-            <a:off x="274320" y="164592"/>
-            <a:ext cx="1371600" cy="685800"/>
+            <a:off x="274320" y="137160"/>
+            <a:ext cx="1325880" cy="658368"/>
           </a:xfrm>
           <a:prstGeom prst="ellipse">
             <a:avLst/>
@@ -12894,8 +14664,8 @@
         </p:nvSpPr>
         <p:spPr>
           <a:xfrm>
-            <a:off x="365760" y="1078992"/>
-            <a:ext cx="11430000" cy="1536192"/>
+            <a:off x="365760" y="1051560"/>
+            <a:ext cx="11430000" cy="1508760"/>
           </a:xfrm>
           <a:prstGeom prst="roundRect">
             <a:avLst/>
@@ -12903,7 +14673,7 @@
           <a:solidFill>
             <a:srgbClr val="FFFFFF"/>
           </a:solidFill>
-          <a:ln w="15240">
+          <a:ln w="13970">
             <a:solidFill>
               <a:srgbClr val="CBD5E1"/>
             </a:solidFill>
@@ -12939,7 +14709,7 @@
         </p:nvSpPr>
         <p:spPr>
           <a:xfrm>
-            <a:off x="502920" y="1152144"/>
+            <a:off x="502920" y="1115568"/>
             <a:ext cx="11155680" cy="1371600"/>
           </a:xfrm>
           <a:prstGeom prst="rect">
@@ -12959,7 +14729,7 @@
               </a:spcBef>
             </a:pPr>
             <a:r>
-              <a:rPr sz="850" b="1">
+              <a:rPr sz="830" b="1">
                 <a:solidFill>
                   <a:srgbClr val="1A365D"/>
                 </a:solidFill>
@@ -12968,7 +14738,7 @@
               <a:t>&gt; AICTE Approval Process Handbook (APH 2026-27) : </a:t>
             </a:r>
             <a:r>
-              <a:rPr sz="800">
+              <a:rPr sz="780">
                 <a:solidFill>
                   <a:srgbClr val="222222"/>
                 </a:solidFill>
@@ -12977,7 +14747,7 @@
               <a:t>Statutory norms for approved intake capacity, supernumerary seat limits (TFW 5%, EWS 10%, KM), and program affiliation. Links : </a:t>
             </a:r>
             <a:r>
-              <a:rPr sz="800" b="1">
+              <a:rPr sz="780" b="1">
                 <a:solidFill>
                   <a:srgbClr val="1A56DB"/>
                 </a:solidFill>
@@ -12990,11 +14760,11 @@
           <a:p>
             <a:pPr>
               <a:spcBef>
-                <a:spcPts val="250"/>
+                <a:spcPts val="220"/>
               </a:spcBef>
             </a:pPr>
             <a:r>
-              <a:rPr sz="850" b="1">
+              <a:rPr sz="830" b="1">
                 <a:solidFill>
                   <a:srgbClr val="1A365D"/>
                 </a:solidFill>
@@ -13003,7 +14773,7 @@
               <a:t>&gt; National Education Policy (NEP 2020) &amp; APAAR / ABC : </a:t>
             </a:r>
             <a:r>
-              <a:rPr sz="800">
+              <a:rPr sz="780">
                 <a:solidFill>
                   <a:srgbClr val="222222"/>
                 </a:solidFill>
@@ -13012,7 +14782,7 @@
               <a:t>Framework establishing the 12-digit Automated Permanent Academic Account Registry as the national lifelong academic identifier. Links : </a:t>
             </a:r>
             <a:r>
-              <a:rPr sz="800" b="1">
+              <a:rPr sz="780" b="1">
                 <a:solidFill>
                   <a:srgbClr val="1A56DB"/>
                 </a:solidFill>
@@ -13025,11 +14795,11 @@
           <a:p>
             <a:pPr>
               <a:spcBef>
-                <a:spcPts val="250"/>
+                <a:spcPts val="220"/>
               </a:spcBef>
             </a:pPr>
             <a:r>
-              <a:rPr sz="850" b="1">
+              <a:rPr sz="830" b="1">
                 <a:solidFill>
                   <a:srgbClr val="1A365D"/>
                 </a:solidFill>
@@ -13038,7 +14808,7 @@
               <a:t>&gt; Digital Personal Data Protection Act (DPDP Act 2023) : </a:t>
             </a:r>
             <a:r>
-              <a:rPr sz="800">
+              <a:rPr sz="780">
                 <a:solidFill>
                   <a:srgbClr val="222222"/>
                 </a:solidFill>
@@ -13047,7 +14817,7 @@
               <a:t>Principles of purpose limitation, data minimization, keyed HMAC-SHA256 pseudonymization, and dynamic student masking. Links : </a:t>
             </a:r>
             <a:r>
-              <a:rPr sz="800" b="1">
+              <a:rPr sz="780" b="1">
                 <a:solidFill>
                   <a:srgbClr val="1A56DB"/>
                 </a:solidFill>
@@ -13060,11 +14830,11 @@
           <a:p>
             <a:pPr>
               <a:spcBef>
-                <a:spcPts val="250"/>
+                <a:spcPts val="220"/>
               </a:spcBef>
             </a:pPr>
             <a:r>
-              <a:rPr sz="850" b="1">
+              <a:rPr sz="830" b="1">
                 <a:solidFill>
                   <a:srgbClr val="1A365D"/>
                 </a:solidFill>
@@ -13073,7 +14843,7 @@
               <a:t>&gt; IETF RFC 8032 (Ed25519) &amp; NIST SP 800-107 (Secure Hashing) : </a:t>
             </a:r>
             <a:r>
-              <a:rPr sz="800">
+              <a:rPr sz="780">
                 <a:solidFill>
                   <a:srgbClr val="222222"/>
                 </a:solidFill>
@@ -13082,7 +14852,7 @@
               <a:t>Cryptographic specifications for Edwards-Curve Digital Signatures and sequential SHA-256 hash chaining. Links : </a:t>
             </a:r>
             <a:r>
-              <a:rPr sz="800" b="1">
+              <a:rPr sz="780" b="1">
                 <a:solidFill>
                   <a:srgbClr val="1A56DB"/>
                 </a:solidFill>
@@ -13102,7 +14872,7 @@
         </p:nvSpPr>
         <p:spPr>
           <a:xfrm>
-            <a:off x="365760" y="2724912"/>
+            <a:off x="365760" y="2670048"/>
             <a:ext cx="5303520" cy="1371600"/>
           </a:xfrm>
           <a:prstGeom prst="roundRect">
@@ -13111,7 +14881,7 @@
           <a:solidFill>
             <a:srgbClr val="FFFFFF"/>
           </a:solidFill>
-          <a:ln w="15240">
+          <a:ln w="13970">
             <a:solidFill>
               <a:srgbClr val="CBD5E1"/>
             </a:solidFill>
@@ -13147,7 +14917,7 @@
         </p:nvSpPr>
         <p:spPr>
           <a:xfrm>
-            <a:off x="502920" y="2615184"/>
+            <a:off x="502920" y="2560320"/>
             <a:ext cx="2560320" cy="219456"/>
           </a:xfrm>
           <a:prstGeom prst="roundRect">
@@ -13175,11 +14945,11 @@
           </a:fontRef>
         </p:style>
         <p:txBody>
-          <a:bodyPr rtlCol="0" anchor="ctr" wrap="none" lIns="73152" rIns="73152" tIns="0" bIns="0"/>
+          <a:bodyPr rtlCol="0" anchor="ctr" wrap="none" lIns="54864" rIns="54864" tIns="0" bIns="0"/>
           <a:lstStyle/>
           <a:p>
             <a:pPr algn="ctr">
-              <a:defRPr sz="950" b="1">
+              <a:defRPr sz="900" b="1">
                 <a:solidFill>
                   <a:srgbClr val="FFFFFF"/>
                 </a:solidFill>
@@ -13200,7 +14970,7 @@
         </p:nvSpPr>
         <p:spPr>
           <a:xfrm>
-            <a:off x="502920" y="2871216"/>
+            <a:off x="502920" y="2816352"/>
             <a:ext cx="5029200" cy="1143000"/>
           </a:xfrm>
           <a:prstGeom prst="rect">
@@ -13215,7 +14985,7 @@
           <a:lstStyle/>
           <a:p>
             <a:pPr>
-              <a:defRPr sz="819">
+              <a:defRPr sz="800">
                 <a:solidFill>
                   <a:srgbClr val="222222"/>
                 </a:solidFill>
@@ -13231,7 +15001,7 @@
               <a:spcBef>
                 <a:spcPts val="300"/>
               </a:spcBef>
-              <a:defRPr sz="800" b="1">
+              <a:defRPr sz="780" b="1">
                 <a:solidFill>
                   <a:srgbClr val="64748B"/>
                 </a:solidFill>
@@ -13252,8 +15022,8 @@
         </p:nvSpPr>
         <p:spPr>
           <a:xfrm>
-            <a:off x="5760720" y="3246120"/>
-            <a:ext cx="502920" cy="320040"/>
+            <a:off x="5760720" y="3154680"/>
+            <a:ext cx="320040" cy="274320"/>
           </a:xfrm>
           <a:prstGeom prst="rightArrow">
             <a:avLst/>
@@ -13295,8 +15065,8 @@
         </p:nvSpPr>
         <p:spPr>
           <a:xfrm>
-            <a:off x="6355080" y="2724912"/>
-            <a:ext cx="5440680" cy="1371600"/>
+            <a:off x="6172200" y="2670048"/>
+            <a:ext cx="5623560" cy="1371600"/>
           </a:xfrm>
           <a:prstGeom prst="roundRect">
             <a:avLst/>
@@ -13304,7 +15074,7 @@
           <a:solidFill>
             <a:srgbClr val="FFFFFF"/>
           </a:solidFill>
-          <a:ln w="15240">
+          <a:ln w="13970">
             <a:solidFill>
               <a:srgbClr val="CBD5E1"/>
             </a:solidFill>
@@ -13340,8 +15110,8 @@
         </p:nvSpPr>
         <p:spPr>
           <a:xfrm>
-            <a:off x="6492240" y="2615184"/>
-            <a:ext cx="2743200" cy="219456"/>
+            <a:off x="6309360" y="2560320"/>
+            <a:ext cx="2560320" cy="219456"/>
           </a:xfrm>
           <a:prstGeom prst="roundRect">
             <a:avLst/>
@@ -13368,11 +15138,11 @@
           </a:fontRef>
         </p:style>
         <p:txBody>
-          <a:bodyPr rtlCol="0" anchor="ctr" wrap="none" lIns="73152" rIns="73152" tIns="0" bIns="0"/>
+          <a:bodyPr rtlCol="0" anchor="ctr" wrap="none" lIns="54864" rIns="54864" tIns="0" bIns="0"/>
           <a:lstStyle/>
           <a:p>
             <a:pPr algn="ctr">
-              <a:defRPr sz="950" b="1">
+              <a:defRPr sz="900" b="1">
                 <a:solidFill>
                   <a:srgbClr val="FFFFFF"/>
                 </a:solidFill>
@@ -13393,8 +15163,8 @@
         </p:nvSpPr>
         <p:spPr>
           <a:xfrm>
-            <a:off x="6492240" y="2871216"/>
-            <a:ext cx="5166360" cy="1143000"/>
+            <a:off x="6309360" y="2816352"/>
+            <a:ext cx="5349240" cy="1143000"/>
           </a:xfrm>
           <a:prstGeom prst="rect">
             <a:avLst/>
@@ -13413,7 +15183,7 @@
               </a:spcBef>
             </a:pPr>
             <a:r>
-              <a:rPr sz="800" b="1">
+              <a:rPr sz="780" b="1">
                 <a:solidFill>
                   <a:srgbClr val="1A365D"/>
                 </a:solidFill>
@@ -13422,7 +15192,7 @@
               <a:t>&gt; Deterministic 3-Way Cross-Reconciliation : </a:t>
             </a:r>
             <a:r>
-              <a:rPr sz="760">
+              <a:rPr sz="740">
                 <a:solidFill>
                   <a:srgbClr val="222222"/>
                 </a:solidFill>
@@ -13434,11 +15204,11 @@
           <a:p>
             <a:pPr>
               <a:spcBef>
-                <a:spcPts val="200"/>
+                <a:spcPts val="150"/>
               </a:spcBef>
             </a:pPr>
             <a:r>
-              <a:rPr sz="800" b="1">
+              <a:rPr sz="780" b="1">
                 <a:solidFill>
                   <a:srgbClr val="1A365D"/>
                 </a:solidFill>
@@ -13447,7 +15217,7 @@
               <a:t>&gt; Interactive Quarantine Sandbox : </a:t>
             </a:r>
             <a:r>
-              <a:rPr sz="760">
+              <a:rPr sz="740">
                 <a:solidFill>
                   <a:srgbClr val="222222"/>
                 </a:solidFill>
@@ -13459,11 +15229,11 @@
           <a:p>
             <a:pPr>
               <a:spcBef>
-                <a:spcPts val="200"/>
+                <a:spcPts val="150"/>
               </a:spcBef>
             </a:pPr>
             <a:r>
-              <a:rPr sz="800" b="1">
+              <a:rPr sz="780" b="1">
                 <a:solidFill>
                   <a:srgbClr val="1A365D"/>
                 </a:solidFill>
@@ -13472,7 +15242,7 @@
               <a:t>&gt; Cryptographic Offline Trust : </a:t>
             </a:r>
             <a:r>
-              <a:rPr sz="760">
+              <a:rPr sz="740">
                 <a:solidFill>
                   <a:srgbClr val="222222"/>
                 </a:solidFill>
@@ -13484,11 +15254,11 @@
           <a:p>
             <a:pPr>
               <a:spcBef>
-                <a:spcPts val="200"/>
+                <a:spcPts val="150"/>
               </a:spcBef>
             </a:pPr>
             <a:r>
-              <a:rPr sz="800" b="1">
+              <a:rPr sz="780" b="1">
                 <a:solidFill>
                   <a:srgbClr val="1A365D"/>
                 </a:solidFill>
@@ -13497,7 +15267,7 @@
               <a:t>&gt; Privacy-by-Design DPDP Shield : </a:t>
             </a:r>
             <a:r>
-              <a:rPr sz="760">
+              <a:rPr sz="740">
                 <a:solidFill>
                   <a:srgbClr val="222222"/>
                 </a:solidFill>
@@ -13516,8 +15286,8 @@
         </p:nvSpPr>
         <p:spPr>
           <a:xfrm>
-            <a:off x="365760" y="4206240"/>
-            <a:ext cx="5669280" cy="1920240"/>
+            <a:off x="365760" y="4160520"/>
+            <a:ext cx="6035040" cy="2011680"/>
           </a:xfrm>
           <a:prstGeom prst="roundRect">
             <a:avLst/>
@@ -13525,7 +15295,7 @@
           <a:solidFill>
             <a:srgbClr val="FFFFFF"/>
           </a:solidFill>
-          <a:ln w="15240">
+          <a:ln w="13970">
             <a:solidFill>
               <a:srgbClr val="CBD5E1"/>
             </a:solidFill>
@@ -13561,7 +15331,7 @@
         </p:nvSpPr>
         <p:spPr>
           <a:xfrm>
-            <a:off x="502920" y="4096512"/>
+            <a:off x="502920" y="4050791"/>
             <a:ext cx="2926080" cy="219456"/>
           </a:xfrm>
           <a:prstGeom prst="roundRect">
@@ -13589,11 +15359,11 @@
           </a:fontRef>
         </p:style>
         <p:txBody>
-          <a:bodyPr rtlCol="0" anchor="ctr" wrap="none" lIns="73152" rIns="73152" tIns="0" bIns="0"/>
+          <a:bodyPr rtlCol="0" anchor="ctr" wrap="none" lIns="54864" rIns="54864" tIns="0" bIns="0"/>
           <a:lstStyle/>
           <a:p>
             <a:pPr algn="ctr">
-              <a:defRPr sz="950" b="1">
+              <a:defRPr sz="900" b="1">
                 <a:solidFill>
                   <a:srgbClr val="FFFFFF"/>
                 </a:solidFill>
@@ -13614,8 +15384,8 @@
         </p:nvSpPr>
         <p:spPr>
           <a:xfrm>
-            <a:off x="502920" y="4370832"/>
-            <a:ext cx="5394960" cy="1691640"/>
+            <a:off x="502920" y="4315968"/>
+            <a:ext cx="4389120" cy="1783080"/>
           </a:xfrm>
           <a:prstGeom prst="rect">
             <a:avLst/>
@@ -13634,16 +15404,16 @@
               </a:spcBef>
             </a:pPr>
             <a:r>
-              <a:rPr sz="819" b="1">
-                <a:solidFill>
-                  <a:srgbClr val="1A365D"/>
+              <a:rPr sz="800" b="1">
+                <a:solidFill>
+                  <a:srgbClr val="112266"/>
                 </a:solidFill>
                 <a:latin typeface="Arial"/>
               </a:rPr>
               <a:t>&gt; Live Web Platform : </a:t>
             </a:r>
             <a:r>
-              <a:rPr sz="800" b="1">
+              <a:rPr sz="780" b="1">
                 <a:solidFill>
                   <a:srgbClr val="1A56DB"/>
                 </a:solidFill>
@@ -13653,9 +15423,9 @@
               <a:t>https://brainforge.info</a:t>
             </a:r>
             <a:r>
-              <a:rPr sz="720">
-                <a:solidFill>
-                  <a:srgbClr val="64748B"/>
+              <a:rPr sz="740">
+                <a:solidFill>
+                  <a:srgbClr val="222222"/>
                 </a:solidFill>
                 <a:latin typeface="Arial"/>
               </a:rPr>
@@ -13665,20 +15435,20 @@
           <a:p>
             <a:pPr>
               <a:spcBef>
-                <a:spcPts val="250"/>
+                <a:spcPts val="200"/>
               </a:spcBef>
             </a:pPr>
             <a:r>
-              <a:rPr sz="819" b="1">
-                <a:solidFill>
-                  <a:srgbClr val="1A365D"/>
+              <a:rPr sz="800" b="1">
+                <a:solidFill>
+                  <a:srgbClr val="112266"/>
                 </a:solidFill>
                 <a:latin typeface="Arial"/>
               </a:rPr>
               <a:t>&gt; Alternate Domain : </a:t>
             </a:r>
             <a:r>
-              <a:rPr sz="800" b="1">
+              <a:rPr sz="780" b="1">
                 <a:solidFill>
                   <a:srgbClr val="1A56DB"/>
                 </a:solidFill>
@@ -13688,9 +15458,9 @@
               <a:t>https://pramaan.brainforge.info</a:t>
             </a:r>
             <a:r>
-              <a:rPr sz="720">
-                <a:solidFill>
-                  <a:srgbClr val="64748B"/>
+              <a:rPr sz="740">
+                <a:solidFill>
+                  <a:srgbClr val="222222"/>
                 </a:solidFill>
                 <a:latin typeface="Arial"/>
               </a:rPr>
@@ -13700,20 +15470,20 @@
           <a:p>
             <a:pPr>
               <a:spcBef>
-                <a:spcPts val="250"/>
+                <a:spcPts val="200"/>
               </a:spcBef>
             </a:pPr>
             <a:r>
-              <a:rPr sz="819" b="1">
-                <a:solidFill>
-                  <a:srgbClr val="1A365D"/>
+              <a:rPr sz="800" b="1">
+                <a:solidFill>
+                  <a:srgbClr val="112266"/>
                 </a:solidFill>
                 <a:latin typeface="Arial"/>
               </a:rPr>
               <a:t>&gt; Interactive API Docs : </a:t>
             </a:r>
             <a:r>
-              <a:rPr sz="800" b="1">
+              <a:rPr sz="780" b="1">
                 <a:solidFill>
                   <a:srgbClr val="1A56DB"/>
                 </a:solidFill>
@@ -13723,9 +15493,9 @@
               <a:t>https://apaar-id-based-system.onrender.com/docs</a:t>
             </a:r>
             <a:r>
-              <a:rPr sz="720">
-                <a:solidFill>
-                  <a:srgbClr val="64748B"/>
+              <a:rPr sz="740">
+                <a:solidFill>
+                  <a:srgbClr val="222222"/>
                 </a:solidFill>
                 <a:latin typeface="Arial"/>
               </a:rPr>
@@ -13735,20 +15505,20 @@
           <a:p>
             <a:pPr>
               <a:spcBef>
-                <a:spcPts val="250"/>
+                <a:spcPts val="200"/>
               </a:spcBef>
             </a:pPr>
             <a:r>
-              <a:rPr sz="819" b="1">
-                <a:solidFill>
-                  <a:srgbClr val="1A365D"/>
+              <a:rPr sz="800" b="1">
+                <a:solidFill>
+                  <a:srgbClr val="112266"/>
                 </a:solidFill>
                 <a:latin typeface="Arial"/>
               </a:rPr>
               <a:t>&gt; Open-Source GitHub : </a:t>
             </a:r>
             <a:r>
-              <a:rPr sz="800" b="1">
+              <a:rPr sz="780" b="1">
                 <a:solidFill>
                   <a:srgbClr val="1A56DB"/>
                 </a:solidFill>
@@ -13758,9 +15528,9 @@
               <a:t>https://github.com/naveeshpcbin/APAAR-ID-BASED-SYSTEM</a:t>
             </a:r>
             <a:r>
-              <a:rPr sz="720">
-                <a:solidFill>
-                  <a:srgbClr val="64748B"/>
+              <a:rPr sz="740">
+                <a:solidFill>
+                  <a:srgbClr val="222222"/>
                 </a:solidFill>
                 <a:latin typeface="Arial"/>
               </a:rPr>
@@ -13770,20 +15540,20 @@
           <a:p>
             <a:pPr>
               <a:spcBef>
-                <a:spcPts val="250"/>
+                <a:spcPts val="200"/>
               </a:spcBef>
             </a:pPr>
             <a:r>
-              <a:rPr sz="819" b="1">
-                <a:solidFill>
-                  <a:srgbClr val="1A365D"/>
+              <a:rPr sz="800" b="1">
+                <a:solidFill>
+                  <a:srgbClr val="112266"/>
                 </a:solidFill>
                 <a:latin typeface="Arial"/>
               </a:rPr>
               <a:t>&gt; Automated Tests : </a:t>
             </a:r>
             <a:r>
-              <a:rPr sz="800">
+              <a:rPr sz="780" b="1">
                 <a:solidFill>
                   <a:srgbClr val="008C6E"/>
                 </a:solidFill>
@@ -13792,118 +15562,20 @@
               <a:t>66/66 Unit Tests + 20/20 Phase F E2E Checks Passing</a:t>
             </a:r>
             <a:r>
-              <a:rPr sz="720">
-                <a:solidFill>
-                  <a:srgbClr val="64748B"/>
+              <a:rPr sz="740">
+                <a:solidFill>
+                  <a:srgbClr val="222222"/>
                 </a:solidFill>
                 <a:latin typeface="Arial"/>
               </a:rPr>
               <a:t> (100% verified locally &amp; on live cloud)</a:t>
-            </a:r>
-          </a:p>
-        </p:txBody>
-      </p:sp>
-      <p:sp>
-        <p:nvSpPr>
-          <p:cNvPr id="17422" name="Rounded Rectangle 17421"/>
-          <p:cNvSpPr/>
-          <p:nvPr/>
-        </p:nvSpPr>
-        <p:spPr>
-          <a:xfrm>
-            <a:off x="6172200" y="4206240"/>
-            <a:ext cx="5623560" cy="1920240"/>
-          </a:xfrm>
-          <a:prstGeom prst="roundRect">
-            <a:avLst/>
-          </a:prstGeom>
-          <a:solidFill>
-            <a:srgbClr val="FFFFFF"/>
-          </a:solidFill>
-          <a:ln w="15240">
-            <a:solidFill>
-              <a:srgbClr val="CBD5E1"/>
-            </a:solidFill>
-          </a:ln>
-        </p:spPr>
-        <p:style>
-          <a:lnRef idx="1">
-            <a:schemeClr val="accent1"/>
-          </a:lnRef>
-          <a:fillRef idx="3">
-            <a:schemeClr val="accent1"/>
-          </a:fillRef>
-          <a:effectRef idx="2">
-            <a:schemeClr val="accent1"/>
-          </a:effectRef>
-          <a:fontRef idx="minor">
-            <a:schemeClr val="lt1"/>
-          </a:fontRef>
-        </p:style>
-        <p:txBody>
-          <a:bodyPr rtlCol="0" anchor="ctr"/>
-          <a:lstStyle/>
-          <a:p>
-            <a:pPr algn="ctr"/>
-          </a:p>
-        </p:txBody>
-      </p:sp>
-      <p:sp>
-        <p:nvSpPr>
-          <p:cNvPr id="17423" name="Rounded Rectangle 17422"/>
-          <p:cNvSpPr/>
-          <p:nvPr/>
-        </p:nvSpPr>
-        <p:spPr>
-          <a:xfrm>
-            <a:off x="6309360" y="4096512"/>
-            <a:ext cx="3200400" cy="219456"/>
-          </a:xfrm>
-          <a:prstGeom prst="roundRect">
-            <a:avLst/>
-          </a:prstGeom>
-          <a:solidFill>
-            <a:srgbClr val="1A365D"/>
-          </a:solidFill>
-          <a:ln>
-            <a:noFill/>
-          </a:ln>
-        </p:spPr>
-        <p:style>
-          <a:lnRef idx="1">
-            <a:schemeClr val="accent1"/>
-          </a:lnRef>
-          <a:fillRef idx="3">
-            <a:schemeClr val="accent1"/>
-          </a:fillRef>
-          <a:effectRef idx="2">
-            <a:schemeClr val="accent1"/>
-          </a:effectRef>
-          <a:fontRef idx="minor">
-            <a:schemeClr val="lt1"/>
-          </a:fontRef>
-        </p:style>
-        <p:txBody>
-          <a:bodyPr rtlCol="0" anchor="ctr" wrap="none" lIns="73152" rIns="73152" tIns="0" bIns="0"/>
-          <a:lstStyle/>
-          <a:p>
-            <a:pPr algn="ctr">
-              <a:defRPr sz="950" b="1">
-                <a:solidFill>
-                  <a:srgbClr val="FFFFFF"/>
-                </a:solidFill>
-                <a:latin typeface="Arial"/>
-              </a:defRPr>
-            </a:pPr>
-            <a:r>
-              <a:t>PROTOTYPE EVIDENCE: SHA-256 AUDIT LEDGER</a:t>
             </a:r>
           </a:p>
         </p:txBody>
       </p:sp>
       <p:pic>
         <p:nvPicPr>
-          <p:cNvPr id="17424" name="Picture 17423" descr="slide_6_Picture 3.png"/>
+          <p:cNvPr id="17422" name="Picture 17421" descr="qrcode_brainforge.png"/>
           <p:cNvPicPr>
             <a:picLocks noChangeAspect="1"/>
           </p:cNvPicPr>
@@ -13917,8 +15589,8 @@
         </p:blipFill>
         <p:spPr>
           <a:xfrm>
-            <a:off x="6309360" y="4343400"/>
-            <a:ext cx="2926080" cy="1645920"/>
+            <a:off x="4983480" y="4343400"/>
+            <a:ext cx="1234440" cy="1234440"/>
           </a:xfrm>
           <a:prstGeom prst="rect">
             <a:avLst/>
@@ -13927,14 +15599,172 @@
       </p:pic>
       <p:sp>
         <p:nvSpPr>
-          <p:cNvPr id="17425" name="TextBox 17424"/>
+          <p:cNvPr id="17423" name="TextBox 17422"/>
           <p:cNvSpPr txBox="1"/>
           <p:nvPr/>
         </p:nvSpPr>
         <p:spPr>
           <a:xfrm>
-            <a:off x="9326880" y="4343400"/>
-            <a:ext cx="2331720" cy="1645920"/>
+            <a:off x="4892040" y="5596128"/>
+            <a:ext cx="1417320" cy="365760"/>
+          </a:xfrm>
+          <a:prstGeom prst="rect">
+            <a:avLst/>
+          </a:prstGeom>
+          <a:noFill/>
+        </p:spPr>
+        <p:txBody>
+          <a:bodyPr wrap="none">
+            <a:spAutoFit/>
+          </a:bodyPr>
+          <a:lstStyle/>
+          <a:p>
+            <a:pPr algn="ctr">
+              <a:defRPr sz="700" b="1">
+                <a:solidFill>
+                  <a:srgbClr val="1A365D"/>
+                </a:solidFill>
+                <a:latin typeface="Arial"/>
+              </a:defRPr>
+            </a:pPr>
+            <a:r>
+              <a:t>Scan to Open Platform</a:t>
+            </a:r>
+          </a:p>
+        </p:txBody>
+      </p:sp>
+      <p:sp>
+        <p:nvSpPr>
+          <p:cNvPr id="17424" name="Rounded Rectangle 17423"/>
+          <p:cNvSpPr/>
+          <p:nvPr/>
+        </p:nvSpPr>
+        <p:spPr>
+          <a:xfrm>
+            <a:off x="6583680" y="4160520"/>
+            <a:ext cx="5212080" cy="2011680"/>
+          </a:xfrm>
+          <a:prstGeom prst="roundRect">
+            <a:avLst/>
+          </a:prstGeom>
+          <a:solidFill>
+            <a:srgbClr val="FFFFFF"/>
+          </a:solidFill>
+          <a:ln w="13970">
+            <a:solidFill>
+              <a:srgbClr val="CBD5E1"/>
+            </a:solidFill>
+          </a:ln>
+        </p:spPr>
+        <p:style>
+          <a:lnRef idx="1">
+            <a:schemeClr val="accent1"/>
+          </a:lnRef>
+          <a:fillRef idx="3">
+            <a:schemeClr val="accent1"/>
+          </a:fillRef>
+          <a:effectRef idx="2">
+            <a:schemeClr val="accent1"/>
+          </a:effectRef>
+          <a:fontRef idx="minor">
+            <a:schemeClr val="lt1"/>
+          </a:fontRef>
+        </p:style>
+        <p:txBody>
+          <a:bodyPr rtlCol="0" anchor="ctr"/>
+          <a:lstStyle/>
+          <a:p>
+            <a:pPr algn="ctr"/>
+          </a:p>
+        </p:txBody>
+      </p:sp>
+      <p:sp>
+        <p:nvSpPr>
+          <p:cNvPr id="17425" name="Rounded Rectangle 17424"/>
+          <p:cNvSpPr/>
+          <p:nvPr/>
+        </p:nvSpPr>
+        <p:spPr>
+          <a:xfrm>
+            <a:off x="6720840" y="4050791"/>
+            <a:ext cx="3108960" cy="219456"/>
+          </a:xfrm>
+          <a:prstGeom prst="roundRect">
+            <a:avLst/>
+          </a:prstGeom>
+          <a:solidFill>
+            <a:srgbClr val="112266"/>
+          </a:solidFill>
+          <a:ln>
+            <a:noFill/>
+          </a:ln>
+        </p:spPr>
+        <p:style>
+          <a:lnRef idx="1">
+            <a:schemeClr val="accent1"/>
+          </a:lnRef>
+          <a:fillRef idx="3">
+            <a:schemeClr val="accent1"/>
+          </a:fillRef>
+          <a:effectRef idx="2">
+            <a:schemeClr val="accent1"/>
+          </a:effectRef>
+          <a:fontRef idx="minor">
+            <a:schemeClr val="lt1"/>
+          </a:fontRef>
+        </p:style>
+        <p:txBody>
+          <a:bodyPr rtlCol="0" anchor="ctr" wrap="none" lIns="54864" rIns="54864" tIns="0" bIns="0"/>
+          <a:lstStyle/>
+          <a:p>
+            <a:pPr algn="ctr">
+              <a:defRPr sz="900" b="1">
+                <a:solidFill>
+                  <a:srgbClr val="FFFFFF"/>
+                </a:solidFill>
+                <a:latin typeface="Arial"/>
+              </a:defRPr>
+            </a:pPr>
+            <a:r>
+              <a:t>PROTOTYPE EVIDENCE: SHA-256 AUDIT LEDGER</a:t>
+            </a:r>
+          </a:p>
+        </p:txBody>
+      </p:sp>
+      <p:pic>
+        <p:nvPicPr>
+          <p:cNvPr id="17426" name="Picture 17425" descr="slide_6_Picture 3.png"/>
+          <p:cNvPicPr>
+            <a:picLocks noChangeAspect="1"/>
+          </p:cNvPicPr>
+          <p:nvPr/>
+        </p:nvPicPr>
+        <p:blipFill>
+          <a:blip r:embed="rId9"/>
+          <a:stretch>
+            <a:fillRect/>
+          </a:stretch>
+        </p:blipFill>
+        <p:spPr>
+          <a:xfrm>
+            <a:off x="6720840" y="4343400"/>
+            <a:ext cx="2926080" cy="1691640"/>
+          </a:xfrm>
+          <a:prstGeom prst="rect">
+            <a:avLst/>
+          </a:prstGeom>
+        </p:spPr>
+      </p:pic>
+      <p:sp>
+        <p:nvSpPr>
+          <p:cNvPr id="17427" name="TextBox 17426"/>
+          <p:cNvSpPr txBox="1"/>
+          <p:nvPr/>
+        </p:nvSpPr>
+        <p:spPr>
+          <a:xfrm>
+            <a:off x="9738360" y="4343400"/>
+            <a:ext cx="1965960" cy="1691640"/>
           </a:xfrm>
           <a:prstGeom prst="rect">
             <a:avLst/>
@@ -13948,7 +15778,23 @@
           <a:lstStyle/>
           <a:p>
             <a:pPr>
-              <a:defRPr sz="780">
+              <a:defRPr sz="800" b="1">
+                <a:solidFill>
+                  <a:srgbClr val="112266"/>
+                </a:solidFill>
+                <a:latin typeface="Arial"/>
+              </a:defRPr>
+            </a:pPr>
+            <a:r>
+              <a:t>Tamper-Evident Audit Ledger:</a:t>
+            </a:r>
+          </a:p>
+          <a:p>
+            <a:pPr>
+              <a:spcBef>
+                <a:spcPts val="200"/>
+              </a:spcBef>
+              <a:defRPr sz="740">
                 <a:solidFill>
                   <a:srgbClr val="222222"/>
                 </a:solidFill>
@@ -13956,7 +15802,7 @@
               </a:defRPr>
             </a:pPr>
             <a:r>
-              <a:t>Tamper-Evident Audit Ledger: Mathematical SHA-256 sequential hash chaining proves non-tampering of all admissions, commits, and regulatory approvals.</a:t>
+              <a:t>Mathematical SHA-256 sequential hash chaining proves non-tampering of all admissions, commits, and regulatory approvals.</a:t>
             </a:r>
           </a:p>
         </p:txBody>
